--- a/presenter/slides.pptx
+++ b/presenter/slides.pptx
@@ -3,7 +3,7 @@
 <p:presentation xmlns:a="http://schemas.openxmlformats.org/drawingml/2006/main" xmlns:p="http://schemas.openxmlformats.org/presentationml/2006/main" xmlns:r="http://schemas.openxmlformats.org/officeDocument/2006/relationships" xmlns:p14="http://schemas.microsoft.com/office/powerpoint/2010/main" xmlns:p15="http://schemas.microsoft.com/office/powerpoint/2012/main" xmlns:mc="http://schemas.openxmlformats.org/markup-compatibility/2006">
   <p:sldMasterIdLst>
     <p:sldMasterId id="2147483648" r:id="rId2"/>
-    <p:sldMasterId id="2147483650" r:id="rId3"/>
+    <p:sldMasterId id="2147483651" r:id="rId3"/>
   </p:sldMasterIdLst>
   <p:sldIdLst>
     <p:sldId id="256" r:id="rId4"/>
@@ -25,6 +25,176 @@
 </file>
 
 <file path=ppt/slideLayouts/slideLayout1.xml><?xml version="1.0" encoding="utf-8"?>
+<p:sldLayout xmlns:a="http://schemas.openxmlformats.org/drawingml/2006/main" xmlns:p="http://schemas.openxmlformats.org/presentationml/2006/main" xmlns:r="http://schemas.openxmlformats.org/officeDocument/2006/relationships" xmlns:p14="http://schemas.microsoft.com/office/powerpoint/2010/main" xmlns:p15="http://schemas.microsoft.com/office/powerpoint/2012/main" xmlns:mc="http://schemas.openxmlformats.org/markup-compatibility/2006" type="title" preserve="1">
+  <p:cSld name="DNA">
+    <p:spTree>
+      <p:nvGrpSpPr>
+        <p:cNvPr id="1" name=""/>
+        <p:cNvGrpSpPr/>
+        <p:nvPr/>
+      </p:nvGrpSpPr>
+      <p:grpSpPr>
+        <a:xfrm>
+          <a:off x="0" y="0"/>
+          <a:ext cx="0" cy="0"/>
+          <a:chOff x="0" y="0"/>
+          <a:chExt cx="0" cy="0"/>
+        </a:xfrm>
+      </p:grpSpPr>
+      <p:sp>
+        <p:nvSpPr>
+          <p:cNvPr id="87" name="PlaceHolder 1"/>
+          <p:cNvSpPr>
+            <a:spLocks noGrp="1"/>
+          </p:cNvSpPr>
+          <p:nvPr>
+            <p:ph type="title"/>
+          </p:nvPr>
+        </p:nvSpPr>
+        <p:spPr>
+          <a:xfrm>
+            <a:off x="1620000" y="432000"/>
+            <a:ext cx="8099280" cy="503280"/>
+          </a:xfrm>
+          <a:prstGeom prst="rect">
+            <a:avLst/>
+          </a:prstGeom>
+          <a:noFill/>
+          <a:ln w="0">
+            <a:noFill/>
+          </a:ln>
+        </p:spPr>
+        <p:txBody>
+          <a:bodyPr lIns="0" tIns="0" rIns="0" bIns="0" anchor="ctr">
+            <a:spAutoFit/>
+          </a:bodyPr>
+          <a:p>
+            <a:pPr indent="0" algn="ctr">
+              <a:buNone/>
+              <a:tabLst>
+                <a:tab pos="0" algn="l"/>
+              </a:tabLst>
+            </a:pPr>
+            <a:endParaRPr lang="en-US" sz="3300" b="0" u="none" strike="noStrike">
+              <a:solidFill>
+                <a:srgbClr val="050505"/>
+              </a:solidFill>
+              <a:effectLst/>
+              <a:uFillTx/>
+              <a:latin typeface="Times New Roman"/>
+            </a:endParaRPr>
+          </a:p>
+        </p:txBody>
+      </p:sp>
+      <p:sp>
+        <p:nvSpPr>
+          <p:cNvPr id="88" name="PlaceHolder 2"/>
+          <p:cNvSpPr>
+            <a:spLocks noGrp="1"/>
+          </p:cNvSpPr>
+          <p:nvPr>
+            <p:ph type="subTitle"/>
+          </p:nvPr>
+        </p:nvSpPr>
+        <p:spPr>
+          <a:xfrm>
+            <a:off x="1620000" y="1368000"/>
+            <a:ext cx="8099280" cy="3287520"/>
+          </a:xfrm>
+          <a:prstGeom prst="rect">
+            <a:avLst/>
+          </a:prstGeom>
+          <a:noFill/>
+          <a:ln w="0">
+            <a:noFill/>
+          </a:ln>
+        </p:spPr>
+        <p:txBody>
+          <a:bodyPr lIns="0" tIns="0" rIns="0" bIns="0" anchor="ctr">
+            <a:spAutoFit/>
+          </a:bodyPr>
+          <a:p>
+            <a:pPr indent="0" algn="ctr">
+              <a:buNone/>
+            </a:pPr>
+            <a:endParaRPr lang="en-US" sz="3200" b="0" u="none" strike="noStrike">
+              <a:solidFill>
+                <a:srgbClr val="000000"/>
+              </a:solidFill>
+              <a:effectLst/>
+              <a:uFillTx/>
+              <a:latin typeface="Arial"/>
+            </a:endParaRPr>
+          </a:p>
+        </p:txBody>
+      </p:sp>
+      <p:sp>
+        <p:nvSpPr>
+          <p:cNvPr id="4" name="PlaceHolder 3"/>
+          <p:cNvSpPr>
+            <a:spLocks noGrp="1"/>
+          </p:cNvSpPr>
+          <p:nvPr>
+            <p:ph type="ftr" idx="1"/>
+          </p:nvPr>
+        </p:nvSpPr>
+        <p:spPr/>
+        <p:txBody>
+          <a:bodyPr/>
+          <a:p>
+            <a:r>
+              <a:t>Footer</a:t>
+            </a:r>
+          </a:p>
+        </p:txBody>
+      </p:sp>
+      <p:sp>
+        <p:nvSpPr>
+          <p:cNvPr id="5" name="PlaceHolder 4"/>
+          <p:cNvSpPr>
+            <a:spLocks noGrp="1"/>
+          </p:cNvSpPr>
+          <p:nvPr>
+            <p:ph type="sldNum" idx="2"/>
+          </p:nvPr>
+        </p:nvSpPr>
+        <p:spPr/>
+        <p:txBody>
+          <a:bodyPr/>
+          <a:p>
+            <a:fld id="{83B3F2D7-98BC-4F53-B303-0B9D2368696B}" type="slidenum">
+              <a:t>&lt;#&gt;</a:t>
+            </a:fld>
+          </a:p>
+        </p:txBody>
+      </p:sp>
+      <p:sp>
+        <p:nvSpPr>
+          <p:cNvPr id="6" name="PlaceHolder 5"/>
+          <p:cNvSpPr>
+            <a:spLocks noGrp="1"/>
+          </p:cNvSpPr>
+          <p:nvPr>
+            <p:ph type="dt" idx="3"/>
+          </p:nvPr>
+        </p:nvSpPr>
+        <p:spPr/>
+        <p:txBody>
+          <a:bodyPr/>
+          <a:p>
+            <a:r>
+              <a:rPr lang="en-US"/>
+              <a:t/>
+            </a:r>
+          </a:p>
+        </p:txBody>
+      </p:sp>
+    </p:spTree>
+  </p:cSld>
+</p:sldLayout>
+</file>
+
+<file path=ppt/slideLayouts/slideLayout2.xml><?xml version="1.0" encoding="utf-8"?>
 <p:sldLayout xmlns:a="http://schemas.openxmlformats.org/drawingml/2006/main" xmlns:p="http://schemas.openxmlformats.org/presentationml/2006/main" xmlns:r="http://schemas.openxmlformats.org/officeDocument/2006/relationships" xmlns:p14="http://schemas.microsoft.com/office/powerpoint/2010/main" xmlns:p15="http://schemas.microsoft.com/office/powerpoint/2012/main" xmlns:mc="http://schemas.openxmlformats.org/markup-compatibility/2006" type="tx" preserve="1">
   <p:cSld name="DNA">
     <p:spTree>
@@ -53,8 +223,8 @@
         </p:nvSpPr>
         <p:spPr>
           <a:xfrm>
-            <a:off x="1620000" y="216000"/>
-            <a:ext cx="8099640" cy="935640"/>
+            <a:off x="1620000" y="432000"/>
+            <a:ext cx="8099280" cy="503280"/>
           </a:xfrm>
           <a:prstGeom prst="rect">
             <a:avLst/>
@@ -99,7 +269,7 @@
         <p:spPr>
           <a:xfrm>
             <a:off x="1620000" y="1368000"/>
-            <a:ext cx="8099640" cy="3287880"/>
+            <a:ext cx="8099280" cy="3287520"/>
           </a:xfrm>
           <a:prstGeom prst="rect">
             <a:avLst/>
@@ -165,7 +335,7 @@
         <p:txBody>
           <a:bodyPr/>
           <a:p>
-            <a:fld id="{511F7F72-BA24-48C4-A73A-6C87F1589204}" type="slidenum">
+            <a:fld id="{3BFB0AC3-BA15-47EC-A0CF-4D1884F3D6B1}" type="slidenum">
               <a:t>&lt;#&gt;</a:t>
             </a:fld>
           </a:p>
@@ -197,7 +367,7 @@
 </p:sldLayout>
 </file>
 
-<file path=ppt/slideLayouts/slideLayout2.xml><?xml version="1.0" encoding="utf-8"?>
+<file path=ppt/slideLayouts/slideLayout3.xml><?xml version="1.0" encoding="utf-8"?>
 <p:sldLayout xmlns:a="http://schemas.openxmlformats.org/drawingml/2006/main" xmlns:p="http://schemas.openxmlformats.org/presentationml/2006/main" xmlns:r="http://schemas.openxmlformats.org/officeDocument/2006/relationships" xmlns:p14="http://schemas.microsoft.com/office/powerpoint/2010/main" xmlns:p15="http://schemas.microsoft.com/office/powerpoint/2012/main" xmlns:mc="http://schemas.openxmlformats.org/markup-compatibility/2006" type="title" preserve="1">
   <p:cSld name="Default">
     <p:spTree>
@@ -226,8 +396,8 @@
         </p:nvSpPr>
         <p:spPr>
           <a:xfrm>
-            <a:off x="1620000" y="216000"/>
-            <a:ext cx="8099640" cy="935640"/>
+            <a:off x="1620000" y="432000"/>
+            <a:ext cx="8099280" cy="503280"/>
           </a:xfrm>
           <a:prstGeom prst="rect">
             <a:avLst/>
@@ -272,7 +442,7 @@
         <p:spPr>
           <a:xfrm>
             <a:off x="1620000" y="1368000"/>
-            <a:ext cx="8099640" cy="3287880"/>
+            <a:ext cx="8099280" cy="3287520"/>
           </a:xfrm>
           <a:prstGeom prst="rect">
             <a:avLst/>
@@ -335,7 +505,7 @@
         <p:txBody>
           <a:bodyPr/>
           <a:p>
-            <a:fld id="{397F817F-A273-4ECA-B8E9-4D0294DAA73A}" type="slidenum">
+            <a:fld id="{ABB95766-1967-421F-BC3E-24AF25D55BE5}" type="slidenum">
               <a:t>&lt;#&gt;</a:t>
             </a:fld>
           </a:p>
@@ -384,3183 +554,3191 @@
           <a:chExt cx="0" cy="0"/>
         </a:xfrm>
       </p:grpSpPr>
-      <p:grpSp>
-        <p:nvGrpSpPr>
+      <p:cxnSp>
+        <p:nvCxnSpPr>
           <p:cNvPr id="2" name=""/>
-          <p:cNvGrpSpPr/>
+          <p:cNvCxnSpPr>
+            <a:stCxn id="3" idx="6"/>
+            <a:endCxn id="4" idx="2"/>
+          </p:cNvCxnSpPr>
           <p:nvPr/>
-        </p:nvGrpSpPr>
-        <p:grpSpPr>
+        </p:nvCxnSpPr>
+        <p:spPr>
           <a:xfrm>
-            <a:off x="358920" y="36000"/>
-            <a:ext cx="1080720" cy="5795640"/>
-            <a:chOff x="358920" y="36000"/>
-            <a:chExt cx="1080720" cy="5795640"/>
-          </a:xfrm>
-        </p:grpSpPr>
-        <p:cxnSp>
-          <p:nvCxnSpPr>
-            <p:cNvPr id="3" name=""/>
-            <p:cNvCxnSpPr>
-              <a:stCxn id="4" idx="6"/>
-              <a:endCxn id="5" idx="2"/>
-            </p:cNvCxnSpPr>
-            <p:nvPr/>
-          </p:nvCxnSpPr>
-          <p:spPr>
-            <a:xfrm>
-              <a:off x="625680" y="126000"/>
-              <a:ext cx="548640" cy="360"/>
-            </a:xfrm>
-            <a:prstGeom prst="bentConnector2">
-              <a:avLst/>
-            </a:prstGeom>
-            <a:ln w="18000">
-              <a:solidFill>
-                <a:srgbClr val="2A6099"/>
-              </a:solidFill>
-              <a:round/>
-            </a:ln>
-          </p:spPr>
-        </p:cxnSp>
-        <p:cxnSp>
-          <p:nvCxnSpPr>
-            <p:cNvPr id="6" name=""/>
-            <p:cNvCxnSpPr>
-              <a:stCxn id="7" idx="6"/>
-              <a:endCxn id="8" idx="2"/>
-            </p:cNvCxnSpPr>
-            <p:nvPr/>
-          </p:nvCxnSpPr>
-          <p:spPr>
-            <a:xfrm>
-              <a:off x="539640" y="342000"/>
-              <a:ext cx="720720" cy="360"/>
-            </a:xfrm>
-            <a:prstGeom prst="bentConnector2">
-              <a:avLst/>
-            </a:prstGeom>
-            <a:ln w="18000">
-              <a:solidFill>
-                <a:srgbClr val="2A6099"/>
-              </a:solidFill>
-              <a:round/>
-            </a:ln>
-          </p:spPr>
-        </p:cxnSp>
-        <p:cxnSp>
-          <p:nvCxnSpPr>
-            <p:cNvPr id="9" name=""/>
-            <p:cNvCxnSpPr>
-              <a:stCxn id="10" idx="6"/>
-              <a:endCxn id="11" idx="2"/>
-            </p:cNvCxnSpPr>
-            <p:nvPr/>
-          </p:nvCxnSpPr>
-          <p:spPr>
-            <a:xfrm>
-              <a:off x="625680" y="558000"/>
-              <a:ext cx="548640" cy="360"/>
-            </a:xfrm>
-            <a:prstGeom prst="bentConnector2">
-              <a:avLst/>
-            </a:prstGeom>
-            <a:ln w="18000">
-              <a:solidFill>
-                <a:srgbClr val="2A6099"/>
-              </a:solidFill>
-              <a:round/>
-            </a:ln>
-          </p:spPr>
-        </p:cxnSp>
-        <p:cxnSp>
-          <p:nvCxnSpPr>
-            <p:cNvPr id="12" name=""/>
-            <p:cNvCxnSpPr>
-              <a:stCxn id="13" idx="6"/>
-              <a:endCxn id="14" idx="2"/>
-            </p:cNvCxnSpPr>
-            <p:nvPr/>
-          </p:nvCxnSpPr>
-          <p:spPr>
-            <a:xfrm>
-              <a:off x="850680" y="774000"/>
-              <a:ext cx="98640" cy="360"/>
-            </a:xfrm>
-            <a:prstGeom prst="bentConnector2">
-              <a:avLst/>
-            </a:prstGeom>
-            <a:ln w="18000">
-              <a:solidFill>
-                <a:srgbClr val="2A6099"/>
-              </a:solidFill>
-              <a:round/>
-            </a:ln>
-          </p:spPr>
-        </p:cxnSp>
-        <p:cxnSp>
-          <p:nvCxnSpPr>
-            <p:cNvPr id="15" name=""/>
-            <p:cNvCxnSpPr>
-              <a:stCxn id="16" idx="6"/>
-              <a:endCxn id="17" idx="2"/>
-            </p:cNvCxnSpPr>
-            <p:nvPr/>
-          </p:nvCxnSpPr>
-          <p:spPr>
-            <a:xfrm>
-              <a:off x="850680" y="990000"/>
-              <a:ext cx="98640" cy="360"/>
-            </a:xfrm>
-            <a:prstGeom prst="bentConnector2">
-              <a:avLst/>
-            </a:prstGeom>
-            <a:ln w="18000">
-              <a:solidFill>
-                <a:srgbClr val="2A6099"/>
-              </a:solidFill>
-              <a:round/>
-            </a:ln>
-          </p:spPr>
-        </p:cxnSp>
-        <p:cxnSp>
-          <p:nvCxnSpPr>
-            <p:cNvPr id="18" name=""/>
-            <p:cNvCxnSpPr>
-              <a:stCxn id="19" idx="6"/>
-              <a:endCxn id="20" idx="2"/>
-            </p:cNvCxnSpPr>
-            <p:nvPr/>
-          </p:nvCxnSpPr>
-          <p:spPr>
-            <a:xfrm rot="10800000">
-              <a:off x="624240" y="1206000"/>
-              <a:ext cx="548640" cy="360"/>
-            </a:xfrm>
-            <a:prstGeom prst="bentConnector2">
-              <a:avLst/>
-            </a:prstGeom>
-            <a:ln w="18000">
-              <a:solidFill>
-                <a:srgbClr val="2A6099"/>
-              </a:solidFill>
-              <a:round/>
-            </a:ln>
-          </p:spPr>
-        </p:cxnSp>
-        <p:cxnSp>
-          <p:nvCxnSpPr>
-            <p:cNvPr id="21" name=""/>
-            <p:cNvCxnSpPr>
-              <a:stCxn id="22" idx="6"/>
-              <a:endCxn id="23" idx="2"/>
-            </p:cNvCxnSpPr>
-            <p:nvPr/>
-          </p:nvCxnSpPr>
-          <p:spPr>
-            <a:xfrm rot="10800000">
-              <a:off x="538200" y="1422000"/>
-              <a:ext cx="720720" cy="360"/>
-            </a:xfrm>
-            <a:prstGeom prst="bentConnector2">
-              <a:avLst/>
-            </a:prstGeom>
-            <a:ln w="18000">
-              <a:solidFill>
-                <a:srgbClr val="2A6099"/>
-              </a:solidFill>
-              <a:round/>
-            </a:ln>
-          </p:spPr>
-        </p:cxnSp>
-        <p:cxnSp>
-          <p:nvCxnSpPr>
-            <p:cNvPr id="24" name=""/>
-            <p:cNvCxnSpPr>
-              <a:stCxn id="25" idx="6"/>
-              <a:endCxn id="26" idx="2"/>
-            </p:cNvCxnSpPr>
-            <p:nvPr/>
-          </p:nvCxnSpPr>
-          <p:spPr>
-            <a:xfrm rot="10800000">
-              <a:off x="624240" y="1638000"/>
-              <a:ext cx="548640" cy="360"/>
-            </a:xfrm>
-            <a:prstGeom prst="bentConnector2">
-              <a:avLst/>
-            </a:prstGeom>
-            <a:ln w="18000">
-              <a:solidFill>
-                <a:srgbClr val="2A6099"/>
-              </a:solidFill>
-              <a:round/>
-            </a:ln>
-          </p:spPr>
-        </p:cxnSp>
-        <p:cxnSp>
-          <p:nvCxnSpPr>
-            <p:cNvPr id="27" name=""/>
-            <p:cNvCxnSpPr>
-              <a:stCxn id="28" idx="6"/>
-              <a:endCxn id="29" idx="2"/>
-            </p:cNvCxnSpPr>
-            <p:nvPr/>
-          </p:nvCxnSpPr>
-          <p:spPr>
-            <a:xfrm rot="10800000">
-              <a:off x="849240" y="1854000"/>
-              <a:ext cx="98640" cy="360"/>
-            </a:xfrm>
-            <a:prstGeom prst="bentConnector2">
-              <a:avLst/>
-            </a:prstGeom>
-            <a:ln w="18000">
-              <a:solidFill>
-                <a:srgbClr val="2A6099"/>
-              </a:solidFill>
-              <a:round/>
-            </a:ln>
-          </p:spPr>
-        </p:cxnSp>
-        <p:cxnSp>
-          <p:nvCxnSpPr>
-            <p:cNvPr id="30" name=""/>
-            <p:cNvCxnSpPr>
-              <a:stCxn id="31" idx="6"/>
-              <a:endCxn id="32" idx="2"/>
-            </p:cNvCxnSpPr>
-            <p:nvPr/>
-          </p:nvCxnSpPr>
-          <p:spPr>
-            <a:xfrm rot="10800000">
-              <a:off x="849240" y="2070000"/>
-              <a:ext cx="98640" cy="360"/>
-            </a:xfrm>
-            <a:prstGeom prst="bentConnector2">
-              <a:avLst/>
-            </a:prstGeom>
-            <a:ln w="18000">
-              <a:solidFill>
-                <a:srgbClr val="2A6099"/>
-              </a:solidFill>
-              <a:round/>
-            </a:ln>
-          </p:spPr>
-        </p:cxnSp>
-        <p:cxnSp>
-          <p:nvCxnSpPr>
-            <p:cNvPr id="33" name=""/>
-            <p:cNvCxnSpPr>
-              <a:stCxn id="34" idx="6"/>
-              <a:endCxn id="35" idx="2"/>
-            </p:cNvCxnSpPr>
-            <p:nvPr/>
-          </p:nvCxnSpPr>
-          <p:spPr>
-            <a:xfrm>
-              <a:off x="625680" y="2286000"/>
-              <a:ext cx="548640" cy="360"/>
-            </a:xfrm>
-            <a:prstGeom prst="bentConnector2">
-              <a:avLst/>
-            </a:prstGeom>
-            <a:ln w="18000">
-              <a:solidFill>
-                <a:srgbClr val="2A6099"/>
-              </a:solidFill>
-              <a:round/>
-            </a:ln>
-          </p:spPr>
-        </p:cxnSp>
-        <p:cxnSp>
-          <p:nvCxnSpPr>
-            <p:cNvPr id="36" name=""/>
-            <p:cNvCxnSpPr>
-              <a:stCxn id="37" idx="6"/>
-              <a:endCxn id="38" idx="2"/>
-            </p:cNvCxnSpPr>
-            <p:nvPr/>
-          </p:nvCxnSpPr>
-          <p:spPr>
-            <a:xfrm>
-              <a:off x="539640" y="2502000"/>
-              <a:ext cx="720720" cy="360"/>
-            </a:xfrm>
-            <a:prstGeom prst="bentConnector2">
-              <a:avLst/>
-            </a:prstGeom>
-            <a:ln w="18000">
-              <a:solidFill>
-                <a:srgbClr val="2A6099"/>
-              </a:solidFill>
-              <a:round/>
-            </a:ln>
-          </p:spPr>
-        </p:cxnSp>
-        <p:cxnSp>
-          <p:nvCxnSpPr>
-            <p:cNvPr id="39" name=""/>
-            <p:cNvCxnSpPr>
-              <a:stCxn id="40" idx="6"/>
-              <a:endCxn id="41" idx="2"/>
-            </p:cNvCxnSpPr>
-            <p:nvPr/>
-          </p:nvCxnSpPr>
-          <p:spPr>
-            <a:xfrm>
-              <a:off x="625680" y="2718000"/>
-              <a:ext cx="548640" cy="360"/>
-            </a:xfrm>
-            <a:prstGeom prst="bentConnector2">
-              <a:avLst/>
-            </a:prstGeom>
-            <a:ln w="18000">
-              <a:solidFill>
-                <a:srgbClr val="2A6099"/>
-              </a:solidFill>
-              <a:round/>
-            </a:ln>
-          </p:spPr>
-        </p:cxnSp>
-        <p:cxnSp>
-          <p:nvCxnSpPr>
-            <p:cNvPr id="42" name=""/>
-            <p:cNvCxnSpPr>
-              <a:stCxn id="43" idx="6"/>
-              <a:endCxn id="44" idx="2"/>
-            </p:cNvCxnSpPr>
-            <p:nvPr/>
-          </p:nvCxnSpPr>
-          <p:spPr>
-            <a:xfrm>
-              <a:off x="850680" y="2934000"/>
-              <a:ext cx="98640" cy="360"/>
-            </a:xfrm>
-            <a:prstGeom prst="bentConnector2">
-              <a:avLst/>
-            </a:prstGeom>
-            <a:ln w="18000">
-              <a:solidFill>
-                <a:srgbClr val="2A6099"/>
-              </a:solidFill>
-              <a:round/>
-            </a:ln>
-          </p:spPr>
-        </p:cxnSp>
-        <p:cxnSp>
-          <p:nvCxnSpPr>
-            <p:cNvPr id="45" name=""/>
-            <p:cNvCxnSpPr>
-              <a:stCxn id="46" idx="6"/>
-              <a:endCxn id="47" idx="2"/>
-            </p:cNvCxnSpPr>
-            <p:nvPr/>
-          </p:nvCxnSpPr>
-          <p:spPr>
-            <a:xfrm>
-              <a:off x="850680" y="3150000"/>
-              <a:ext cx="98640" cy="360"/>
-            </a:xfrm>
-            <a:prstGeom prst="bentConnector2">
-              <a:avLst/>
-            </a:prstGeom>
-            <a:ln w="18000">
-              <a:solidFill>
-                <a:srgbClr val="2A6099"/>
-              </a:solidFill>
-              <a:round/>
-            </a:ln>
-          </p:spPr>
-        </p:cxnSp>
-        <p:cxnSp>
-          <p:nvCxnSpPr>
-            <p:cNvPr id="48" name=""/>
-            <p:cNvCxnSpPr>
-              <a:stCxn id="49" idx="6"/>
-              <a:endCxn id="50" idx="2"/>
-            </p:cNvCxnSpPr>
-            <p:nvPr/>
-          </p:nvCxnSpPr>
-          <p:spPr>
-            <a:xfrm rot="10800000">
-              <a:off x="624240" y="3366000"/>
-              <a:ext cx="548640" cy="360"/>
-            </a:xfrm>
-            <a:prstGeom prst="bentConnector2">
-              <a:avLst/>
-            </a:prstGeom>
-            <a:ln w="18000">
-              <a:solidFill>
-                <a:srgbClr val="2A6099"/>
-              </a:solidFill>
-              <a:round/>
-            </a:ln>
-          </p:spPr>
-        </p:cxnSp>
-        <p:cxnSp>
-          <p:nvCxnSpPr>
-            <p:cNvPr id="51" name=""/>
-            <p:cNvCxnSpPr>
-              <a:stCxn id="52" idx="6"/>
-              <a:endCxn id="53" idx="2"/>
-            </p:cNvCxnSpPr>
-            <p:nvPr/>
-          </p:nvCxnSpPr>
-          <p:spPr>
-            <a:xfrm rot="10800000">
-              <a:off x="538200" y="3582000"/>
-              <a:ext cx="720720" cy="360"/>
-            </a:xfrm>
-            <a:prstGeom prst="bentConnector2">
-              <a:avLst/>
-            </a:prstGeom>
-            <a:ln w="18000">
-              <a:solidFill>
-                <a:srgbClr val="2A6099"/>
-              </a:solidFill>
-              <a:round/>
-            </a:ln>
-          </p:spPr>
-        </p:cxnSp>
-        <p:cxnSp>
-          <p:nvCxnSpPr>
-            <p:cNvPr id="54" name=""/>
-            <p:cNvCxnSpPr>
-              <a:stCxn id="55" idx="6"/>
-              <a:endCxn id="56" idx="2"/>
-            </p:cNvCxnSpPr>
-            <p:nvPr/>
-          </p:nvCxnSpPr>
-          <p:spPr>
-            <a:xfrm rot="10800000">
-              <a:off x="624240" y="3798000"/>
-              <a:ext cx="548640" cy="360"/>
-            </a:xfrm>
-            <a:prstGeom prst="bentConnector2">
-              <a:avLst/>
-            </a:prstGeom>
-            <a:ln w="18000">
-              <a:solidFill>
-                <a:srgbClr val="2A6099"/>
-              </a:solidFill>
-              <a:round/>
-            </a:ln>
-          </p:spPr>
-        </p:cxnSp>
-        <p:cxnSp>
-          <p:nvCxnSpPr>
-            <p:cNvPr id="57" name=""/>
-            <p:cNvCxnSpPr>
-              <a:stCxn id="58" idx="6"/>
-              <a:endCxn id="59" idx="2"/>
-            </p:cNvCxnSpPr>
-            <p:nvPr/>
-          </p:nvCxnSpPr>
-          <p:spPr>
-            <a:xfrm rot="10800000">
-              <a:off x="849240" y="4014000"/>
-              <a:ext cx="98640" cy="360"/>
-            </a:xfrm>
-            <a:prstGeom prst="bentConnector2">
-              <a:avLst/>
-            </a:prstGeom>
-            <a:ln w="18000">
-              <a:solidFill>
-                <a:srgbClr val="2A6099"/>
-              </a:solidFill>
-              <a:round/>
-            </a:ln>
-          </p:spPr>
-        </p:cxnSp>
-        <p:cxnSp>
-          <p:nvCxnSpPr>
-            <p:cNvPr id="60" name=""/>
-            <p:cNvCxnSpPr>
-              <a:stCxn id="61" idx="6"/>
-              <a:endCxn id="62" idx="2"/>
-            </p:cNvCxnSpPr>
-            <p:nvPr/>
-          </p:nvCxnSpPr>
-          <p:spPr>
-            <a:xfrm rot="10800000">
-              <a:off x="849240" y="4230000"/>
-              <a:ext cx="98640" cy="360"/>
-            </a:xfrm>
-            <a:prstGeom prst="bentConnector2">
-              <a:avLst/>
-            </a:prstGeom>
-            <a:ln w="18000">
-              <a:solidFill>
-                <a:srgbClr val="2A6099"/>
-              </a:solidFill>
-              <a:round/>
-            </a:ln>
-          </p:spPr>
-        </p:cxnSp>
-        <p:cxnSp>
-          <p:nvCxnSpPr>
-            <p:cNvPr id="63" name=""/>
-            <p:cNvCxnSpPr>
-              <a:stCxn id="64" idx="6"/>
-              <a:endCxn id="65" idx="2"/>
-            </p:cNvCxnSpPr>
-            <p:nvPr/>
-          </p:nvCxnSpPr>
-          <p:spPr>
-            <a:xfrm>
-              <a:off x="625680" y="4446000"/>
-              <a:ext cx="548640" cy="360"/>
-            </a:xfrm>
-            <a:prstGeom prst="bentConnector2">
-              <a:avLst/>
-            </a:prstGeom>
-            <a:ln w="18000">
-              <a:solidFill>
-                <a:srgbClr val="2A6099"/>
-              </a:solidFill>
-              <a:round/>
-            </a:ln>
-          </p:spPr>
-        </p:cxnSp>
-        <p:cxnSp>
-          <p:nvCxnSpPr>
-            <p:cNvPr id="66" name=""/>
-            <p:cNvCxnSpPr>
-              <a:stCxn id="67" idx="6"/>
-              <a:endCxn id="68" idx="2"/>
-            </p:cNvCxnSpPr>
-            <p:nvPr/>
-          </p:nvCxnSpPr>
-          <p:spPr>
-            <a:xfrm>
-              <a:off x="539640" y="4662000"/>
-              <a:ext cx="720720" cy="360"/>
-            </a:xfrm>
-            <a:prstGeom prst="bentConnector2">
-              <a:avLst/>
-            </a:prstGeom>
-            <a:ln w="18000">
-              <a:solidFill>
-                <a:srgbClr val="2A6099"/>
-              </a:solidFill>
-              <a:round/>
-            </a:ln>
-          </p:spPr>
-        </p:cxnSp>
-        <p:cxnSp>
-          <p:nvCxnSpPr>
-            <p:cNvPr id="69" name=""/>
-            <p:cNvCxnSpPr>
-              <a:stCxn id="70" idx="6"/>
-              <a:endCxn id="71" idx="2"/>
-            </p:cNvCxnSpPr>
-            <p:nvPr/>
-          </p:nvCxnSpPr>
-          <p:spPr>
-            <a:xfrm>
-              <a:off x="625680" y="4878000"/>
-              <a:ext cx="548640" cy="360"/>
-            </a:xfrm>
-            <a:prstGeom prst="bentConnector2">
-              <a:avLst/>
-            </a:prstGeom>
-            <a:ln w="18000">
-              <a:solidFill>
-                <a:srgbClr val="2A6099"/>
-              </a:solidFill>
-              <a:round/>
-            </a:ln>
-          </p:spPr>
-        </p:cxnSp>
-        <p:cxnSp>
-          <p:nvCxnSpPr>
-            <p:cNvPr id="72" name=""/>
-            <p:cNvCxnSpPr>
-              <a:stCxn id="73" idx="6"/>
-              <a:endCxn id="74" idx="2"/>
-            </p:cNvCxnSpPr>
-            <p:nvPr/>
-          </p:nvCxnSpPr>
-          <p:spPr>
-            <a:xfrm>
-              <a:off x="850680" y="5094000"/>
-              <a:ext cx="98640" cy="360"/>
-            </a:xfrm>
-            <a:prstGeom prst="bentConnector2">
-              <a:avLst/>
-            </a:prstGeom>
-            <a:ln w="18000">
-              <a:solidFill>
-                <a:srgbClr val="2A6099"/>
-              </a:solidFill>
-              <a:round/>
-            </a:ln>
-          </p:spPr>
-        </p:cxnSp>
-        <p:cxnSp>
-          <p:nvCxnSpPr>
-            <p:cNvPr id="75" name=""/>
-            <p:cNvCxnSpPr>
-              <a:stCxn id="76" idx="6"/>
-              <a:endCxn id="77" idx="2"/>
-            </p:cNvCxnSpPr>
-            <p:nvPr/>
-          </p:nvCxnSpPr>
-          <p:spPr>
-            <a:xfrm>
-              <a:off x="850680" y="5310000"/>
-              <a:ext cx="98640" cy="360"/>
-            </a:xfrm>
-            <a:prstGeom prst="bentConnector2">
-              <a:avLst/>
-            </a:prstGeom>
-            <a:ln w="18000">
-              <a:solidFill>
-                <a:srgbClr val="2A6099"/>
-              </a:solidFill>
-              <a:round/>
-            </a:ln>
-          </p:spPr>
-        </p:cxnSp>
-        <p:cxnSp>
-          <p:nvCxnSpPr>
-            <p:cNvPr id="78" name=""/>
-            <p:cNvCxnSpPr>
-              <a:stCxn id="79" idx="6"/>
-              <a:endCxn id="80" idx="2"/>
-            </p:cNvCxnSpPr>
-            <p:nvPr/>
-          </p:nvCxnSpPr>
-          <p:spPr>
-            <a:xfrm rot="10800000">
-              <a:off x="624240" y="5526000"/>
-              <a:ext cx="548640" cy="360"/>
-            </a:xfrm>
-            <a:prstGeom prst="bentConnector2">
-              <a:avLst/>
-            </a:prstGeom>
-            <a:ln w="18000">
-              <a:solidFill>
-                <a:srgbClr val="2A6099"/>
-              </a:solidFill>
-              <a:round/>
-            </a:ln>
-          </p:spPr>
-        </p:cxnSp>
-        <p:cxnSp>
-          <p:nvCxnSpPr>
-            <p:cNvPr id="81" name=""/>
-            <p:cNvCxnSpPr>
-              <a:stCxn id="82" idx="6"/>
-              <a:endCxn id="83" idx="2"/>
-            </p:cNvCxnSpPr>
-            <p:nvPr/>
-          </p:nvCxnSpPr>
-          <p:spPr>
-            <a:xfrm rot="10800000">
-              <a:off x="538200" y="5742000"/>
-              <a:ext cx="720720" cy="360"/>
-            </a:xfrm>
-            <a:prstGeom prst="bentConnector2">
-              <a:avLst/>
-            </a:prstGeom>
-            <a:ln w="18000">
-              <a:solidFill>
-                <a:srgbClr val="2A6099"/>
-              </a:solidFill>
-              <a:round/>
-            </a:ln>
-          </p:spPr>
-        </p:cxnSp>
-        <p:sp>
-          <p:nvSpPr>
-            <p:cNvPr id="4" name=""/>
-            <p:cNvSpPr/>
-            <p:nvPr/>
-          </p:nvSpPr>
-          <p:spPr>
-            <a:xfrm>
-              <a:off x="446040" y="36000"/>
-              <a:ext cx="179640" cy="179640"/>
-            </a:xfrm>
-            <a:prstGeom prst="ellipse">
-              <a:avLst/>
-            </a:prstGeom>
+            <a:off x="539280" y="341640"/>
+            <a:ext cx="721080" cy="360"/>
+          </a:xfrm>
+          <a:prstGeom prst="bentConnector2">
+            <a:avLst/>
+          </a:prstGeom>
+          <a:ln w="18000">
             <a:solidFill>
-              <a:srgbClr val="BCC2C9"/>
+              <a:srgbClr val="2A6099"/>
             </a:solidFill>
-            <a:ln w="16200">
-              <a:solidFill>
-                <a:srgbClr val="2A6099"/>
-              </a:solidFill>
-              <a:round/>
-            </a:ln>
-          </p:spPr>
-          <p:style>
-            <a:lnRef idx="0"/>
-            <a:fillRef idx="0"/>
-            <a:effectRef idx="0"/>
-            <a:fontRef idx="minor"/>
-          </p:style>
-          <p:txBody>
-            <a:bodyPr wrap="none" lIns="89280" tIns="44280" rIns="89280" bIns="44280" anchor="t">
-              <a:noAutofit/>
-            </a:bodyPr>
-            <a:p>
-              <a:endParaRPr lang="en-US" sz="1800" b="0" u="none" strike="noStrike">
-                <a:solidFill>
-                  <a:srgbClr val="000000"/>
-                </a:solidFill>
-                <a:effectLst/>
-                <a:uFillTx/>
-                <a:latin typeface="Times New Roman"/>
-              </a:endParaRPr>
-            </a:p>
-          </p:txBody>
-        </p:sp>
-        <p:sp>
-          <p:nvSpPr>
-            <p:cNvPr id="5" name=""/>
-            <p:cNvSpPr/>
-            <p:nvPr/>
-          </p:nvSpPr>
-          <p:spPr>
-            <a:xfrm>
-              <a:off x="1173960" y="36000"/>
-              <a:ext cx="179640" cy="179640"/>
-            </a:xfrm>
-            <a:prstGeom prst="ellipse">
-              <a:avLst/>
-            </a:prstGeom>
+            <a:round/>
+          </a:ln>
+        </p:spPr>
+      </p:cxnSp>
+      <p:cxnSp>
+        <p:nvCxnSpPr>
+          <p:cNvPr id="5" name=""/>
+          <p:cNvCxnSpPr>
+            <a:stCxn id="6" idx="6"/>
+            <a:endCxn id="7" idx="2"/>
+          </p:cNvCxnSpPr>
+          <p:nvPr/>
+        </p:nvCxnSpPr>
+        <p:spPr>
+          <a:xfrm>
+            <a:off x="625320" y="557640"/>
+            <a:ext cx="549000" cy="360"/>
+          </a:xfrm>
+          <a:prstGeom prst="bentConnector2">
+            <a:avLst/>
+          </a:prstGeom>
+          <a:ln w="18000">
             <a:solidFill>
-              <a:srgbClr val="F2CDC4"/>
+              <a:srgbClr val="2A6099"/>
             </a:solidFill>
-            <a:ln w="19800">
-              <a:solidFill>
-                <a:srgbClr val="FF4000"/>
-              </a:solidFill>
-              <a:round/>
-            </a:ln>
-          </p:spPr>
-          <p:style>
-            <a:lnRef idx="0"/>
-            <a:fillRef idx="0"/>
-            <a:effectRef idx="0"/>
-            <a:fontRef idx="minor"/>
-          </p:style>
-          <p:txBody>
-            <a:bodyPr wrap="none" lIns="90000" tIns="45000" rIns="90000" bIns="45000" anchor="t">
-              <a:noAutofit/>
-            </a:bodyPr>
-            <a:p>
-              <a:endParaRPr lang="en-US" sz="1800" b="0" u="none" strike="noStrike">
-                <a:solidFill>
-                  <a:srgbClr val="000000"/>
-                </a:solidFill>
-                <a:effectLst/>
-                <a:uFillTx/>
-                <a:latin typeface="Times New Roman"/>
-              </a:endParaRPr>
-            </a:p>
-          </p:txBody>
-        </p:sp>
-        <p:sp>
-          <p:nvSpPr>
-            <p:cNvPr id="7" name=""/>
-            <p:cNvSpPr/>
-            <p:nvPr/>
-          </p:nvSpPr>
-          <p:spPr>
-            <a:xfrm>
-              <a:off x="360000" y="252000"/>
-              <a:ext cx="179640" cy="179640"/>
-            </a:xfrm>
-            <a:prstGeom prst="ellipse">
-              <a:avLst/>
-            </a:prstGeom>
+            <a:round/>
+          </a:ln>
+        </p:spPr>
+      </p:cxnSp>
+      <p:cxnSp>
+        <p:nvCxnSpPr>
+          <p:cNvPr id="8" name=""/>
+          <p:cNvCxnSpPr>
+            <a:stCxn id="9" idx="6"/>
+            <a:endCxn id="10" idx="2"/>
+          </p:cNvCxnSpPr>
+          <p:nvPr/>
+        </p:nvCxnSpPr>
+        <p:spPr>
+          <a:xfrm>
+            <a:off x="850320" y="773640"/>
+            <a:ext cx="99000" cy="360"/>
+          </a:xfrm>
+          <a:prstGeom prst="bentConnector2">
+            <a:avLst/>
+          </a:prstGeom>
+          <a:ln w="18000">
             <a:solidFill>
-              <a:srgbClr val="C7CED6"/>
+              <a:srgbClr val="2A6099"/>
             </a:solidFill>
-            <a:ln w="18000">
-              <a:solidFill>
-                <a:srgbClr val="2A6099"/>
-              </a:solidFill>
-              <a:round/>
-            </a:ln>
-          </p:spPr>
-          <p:style>
-            <a:lnRef idx="0"/>
-            <a:fillRef idx="0"/>
-            <a:effectRef idx="0"/>
-            <a:fontRef idx="minor"/>
-          </p:style>
-          <p:txBody>
-            <a:bodyPr wrap="none" lIns="90000" tIns="45000" rIns="90000" bIns="45000" anchor="t">
-              <a:noAutofit/>
-            </a:bodyPr>
-            <a:p>
-              <a:endParaRPr lang="en-US" sz="1800" b="0" u="none" strike="noStrike">
-                <a:solidFill>
-                  <a:srgbClr val="000000"/>
-                </a:solidFill>
-                <a:effectLst/>
-                <a:uFillTx/>
-                <a:latin typeface="Times New Roman"/>
-              </a:endParaRPr>
-            </a:p>
-          </p:txBody>
-        </p:sp>
-        <p:sp>
-          <p:nvSpPr>
-            <p:cNvPr id="8" name=""/>
-            <p:cNvSpPr/>
-            <p:nvPr/>
-          </p:nvSpPr>
-          <p:spPr>
-            <a:xfrm>
-              <a:off x="1260000" y="252000"/>
-              <a:ext cx="179640" cy="179640"/>
-            </a:xfrm>
-            <a:prstGeom prst="ellipse">
-              <a:avLst/>
-            </a:prstGeom>
+            <a:round/>
+          </a:ln>
+        </p:spPr>
+      </p:cxnSp>
+      <p:cxnSp>
+        <p:nvCxnSpPr>
+          <p:cNvPr id="11" name=""/>
+          <p:cNvCxnSpPr>
+            <a:stCxn id="12" idx="6"/>
+            <a:endCxn id="13" idx="2"/>
+          </p:cNvCxnSpPr>
+          <p:nvPr/>
+        </p:nvCxnSpPr>
+        <p:spPr>
+          <a:xfrm>
+            <a:off x="850320" y="989640"/>
+            <a:ext cx="99000" cy="360"/>
+          </a:xfrm>
+          <a:prstGeom prst="bentConnector2">
+            <a:avLst/>
+          </a:prstGeom>
+          <a:ln w="18000">
             <a:solidFill>
-              <a:srgbClr val="E6C2B9"/>
+              <a:srgbClr val="2A6099"/>
             </a:solidFill>
-            <a:ln w="18000">
-              <a:solidFill>
-                <a:srgbClr val="FF4000"/>
-              </a:solidFill>
-              <a:round/>
-            </a:ln>
-          </p:spPr>
-          <p:style>
-            <a:lnRef idx="0"/>
-            <a:fillRef idx="0"/>
-            <a:effectRef idx="0"/>
-            <a:fontRef idx="minor"/>
-          </p:style>
-          <p:txBody>
-            <a:bodyPr wrap="none" lIns="90000" tIns="45000" rIns="90000" bIns="45000" anchor="t">
-              <a:noAutofit/>
-            </a:bodyPr>
-            <a:p>
-              <a:endParaRPr lang="en-US" sz="1800" b="0" u="none" strike="noStrike">
-                <a:solidFill>
-                  <a:srgbClr val="000000"/>
-                </a:solidFill>
-                <a:effectLst/>
-                <a:uFillTx/>
-                <a:latin typeface="Times New Roman"/>
-              </a:endParaRPr>
-            </a:p>
-          </p:txBody>
-        </p:sp>
-        <p:sp>
-          <p:nvSpPr>
-            <p:cNvPr id="10" name=""/>
-            <p:cNvSpPr/>
-            <p:nvPr/>
-          </p:nvSpPr>
-          <p:spPr>
-            <a:xfrm>
-              <a:off x="446040" y="468000"/>
-              <a:ext cx="179640" cy="179640"/>
-            </a:xfrm>
-            <a:prstGeom prst="ellipse">
-              <a:avLst/>
-            </a:prstGeom>
+            <a:round/>
+          </a:ln>
+        </p:spPr>
+      </p:cxnSp>
+      <p:cxnSp>
+        <p:nvCxnSpPr>
+          <p:cNvPr id="14" name=""/>
+          <p:cNvCxnSpPr>
+            <a:stCxn id="15" idx="6"/>
+            <a:endCxn id="16" idx="2"/>
+          </p:cNvCxnSpPr>
+          <p:nvPr/>
+        </p:nvCxnSpPr>
+        <p:spPr>
+          <a:xfrm rot="10800000">
+            <a:off x="623880" y="1205640"/>
+            <a:ext cx="549000" cy="360"/>
+          </a:xfrm>
+          <a:prstGeom prst="bentConnector5">
+            <a:avLst>
+              <a:gd name="adj1" fmla="val 17322"/>
+              <a:gd name="adj2" fmla="val -24900000"/>
+              <a:gd name="adj3" fmla="val 132677"/>
+            </a:avLst>
+          </a:prstGeom>
+          <a:ln w="18000">
             <a:solidFill>
-              <a:srgbClr val="D3DAE3"/>
+              <a:srgbClr val="2A6099"/>
             </a:solidFill>
-            <a:ln w="19800">
-              <a:solidFill>
-                <a:srgbClr val="2A6099"/>
-              </a:solidFill>
-              <a:round/>
-            </a:ln>
-          </p:spPr>
-          <p:style>
-            <a:lnRef idx="0"/>
-            <a:fillRef idx="0"/>
-            <a:effectRef idx="0"/>
-            <a:fontRef idx="minor"/>
-          </p:style>
-          <p:txBody>
-            <a:bodyPr wrap="none" lIns="90000" tIns="45000" rIns="90000" bIns="45000" anchor="t">
-              <a:noAutofit/>
-            </a:bodyPr>
-            <a:p>
-              <a:endParaRPr lang="en-US" sz="1800" b="0" u="none" strike="noStrike">
-                <a:solidFill>
-                  <a:srgbClr val="000000"/>
-                </a:solidFill>
-                <a:effectLst/>
-                <a:uFillTx/>
-                <a:latin typeface="Times New Roman"/>
-              </a:endParaRPr>
-            </a:p>
-          </p:txBody>
-        </p:sp>
-        <p:sp>
-          <p:nvSpPr>
-            <p:cNvPr id="11" name=""/>
-            <p:cNvSpPr/>
-            <p:nvPr/>
-          </p:nvSpPr>
-          <p:spPr>
-            <a:xfrm>
-              <a:off x="1173960" y="468000"/>
-              <a:ext cx="179640" cy="179640"/>
-            </a:xfrm>
-            <a:prstGeom prst="ellipse">
-              <a:avLst/>
-            </a:prstGeom>
+            <a:round/>
+          </a:ln>
+        </p:spPr>
+      </p:cxnSp>
+      <p:cxnSp>
+        <p:nvCxnSpPr>
+          <p:cNvPr id="17" name=""/>
+          <p:cNvCxnSpPr>
+            <a:stCxn id="18" idx="6"/>
+            <a:endCxn id="19" idx="2"/>
+          </p:cNvCxnSpPr>
+          <p:nvPr/>
+        </p:nvCxnSpPr>
+        <p:spPr>
+          <a:xfrm rot="10800000">
+            <a:off x="537840" y="1421640"/>
+            <a:ext cx="721080" cy="360"/>
+          </a:xfrm>
+          <a:prstGeom prst="bentConnector5">
+            <a:avLst>
+              <a:gd name="adj1" fmla="val 25124"/>
+              <a:gd name="adj2" fmla="val -24900000"/>
+              <a:gd name="adj3" fmla="val 124875"/>
+            </a:avLst>
+          </a:prstGeom>
+          <a:ln w="18000">
             <a:solidFill>
-              <a:srgbClr val="D9B8AF"/>
+              <a:srgbClr val="2A6099"/>
             </a:solidFill>
-            <a:ln w="16200">
-              <a:solidFill>
-                <a:srgbClr val="FF4000"/>
-              </a:solidFill>
-              <a:round/>
-            </a:ln>
-          </p:spPr>
-          <p:style>
-            <a:lnRef idx="0"/>
-            <a:fillRef idx="0"/>
-            <a:effectRef idx="0"/>
-            <a:fontRef idx="minor"/>
-          </p:style>
-          <p:txBody>
-            <a:bodyPr wrap="none" lIns="89280" tIns="44280" rIns="89280" bIns="44280" anchor="t">
-              <a:noAutofit/>
-            </a:bodyPr>
-            <a:p>
-              <a:endParaRPr lang="en-US" sz="1800" b="0" u="none" strike="noStrike">
-                <a:solidFill>
-                  <a:srgbClr val="000000"/>
-                </a:solidFill>
-                <a:effectLst/>
-                <a:uFillTx/>
-                <a:latin typeface="Times New Roman"/>
-              </a:endParaRPr>
-            </a:p>
-          </p:txBody>
-        </p:sp>
-        <p:sp>
-          <p:nvSpPr>
-            <p:cNvPr id="13" name=""/>
-            <p:cNvSpPr/>
-            <p:nvPr/>
-          </p:nvSpPr>
-          <p:spPr>
-            <a:xfrm>
-              <a:off x="671040" y="684000"/>
-              <a:ext cx="179640" cy="179640"/>
-            </a:xfrm>
-            <a:prstGeom prst="ellipse">
-              <a:avLst/>
-            </a:prstGeom>
+            <a:round/>
+          </a:ln>
+        </p:spPr>
+      </p:cxnSp>
+      <p:cxnSp>
+        <p:nvCxnSpPr>
+          <p:cNvPr id="20" name=""/>
+          <p:cNvCxnSpPr>
+            <a:stCxn id="21" idx="6"/>
+            <a:endCxn id="22" idx="2"/>
+          </p:cNvCxnSpPr>
+          <p:nvPr/>
+        </p:nvCxnSpPr>
+        <p:spPr>
+          <a:xfrm rot="10800000">
+            <a:off x="623880" y="1637640"/>
+            <a:ext cx="549000" cy="360"/>
+          </a:xfrm>
+          <a:prstGeom prst="bentConnector5">
+            <a:avLst>
+              <a:gd name="adj1" fmla="val 17322"/>
+              <a:gd name="adj2" fmla="val -24900000"/>
+              <a:gd name="adj3" fmla="val 132677"/>
+            </a:avLst>
+          </a:prstGeom>
+          <a:ln w="18000">
             <a:solidFill>
-              <a:srgbClr val="DEE6EF"/>
+              <a:srgbClr val="2A6099"/>
             </a:solidFill>
-            <a:ln w="21600">
-              <a:solidFill>
-                <a:srgbClr val="2A6099"/>
-              </a:solidFill>
-              <a:round/>
-            </a:ln>
-          </p:spPr>
-          <p:style>
-            <a:lnRef idx="0"/>
-            <a:fillRef idx="0"/>
-            <a:effectRef idx="0"/>
-            <a:fontRef idx="minor"/>
-          </p:style>
-          <p:txBody>
-            <a:bodyPr wrap="none" lIns="90000" tIns="46800" rIns="90000" bIns="46800" anchor="t">
-              <a:noAutofit/>
-            </a:bodyPr>
-            <a:p>
-              <a:endParaRPr lang="en-US" sz="1800" b="0" u="none" strike="noStrike">
-                <a:solidFill>
-                  <a:srgbClr val="000000"/>
-                </a:solidFill>
-                <a:effectLst/>
-                <a:uFillTx/>
-                <a:latin typeface="Times New Roman"/>
-              </a:endParaRPr>
-            </a:p>
-          </p:txBody>
-        </p:sp>
-        <p:sp>
-          <p:nvSpPr>
-            <p:cNvPr id="14" name=""/>
-            <p:cNvSpPr/>
-            <p:nvPr/>
-          </p:nvSpPr>
-          <p:spPr>
-            <a:xfrm>
-              <a:off x="948960" y="684000"/>
-              <a:ext cx="179640" cy="179640"/>
-            </a:xfrm>
-            <a:prstGeom prst="ellipse">
-              <a:avLst/>
-            </a:prstGeom>
+            <a:round/>
+          </a:ln>
+        </p:spPr>
+      </p:cxnSp>
+      <p:cxnSp>
+        <p:nvCxnSpPr>
+          <p:cNvPr id="23" name=""/>
+          <p:cNvCxnSpPr>
+            <a:stCxn id="24" idx="6"/>
+            <a:endCxn id="25" idx="2"/>
+          </p:cNvCxnSpPr>
+          <p:nvPr/>
+        </p:nvCxnSpPr>
+        <p:spPr>
+          <a:xfrm>
+            <a:off x="848880" y="1853640"/>
+            <a:ext cx="99000" cy="360"/>
+          </a:xfrm>
+          <a:prstGeom prst="bentConnector5">
+            <a:avLst>
+              <a:gd name="adj1" fmla="val -131751"/>
+              <a:gd name="adj2" fmla="val -24900000"/>
+              <a:gd name="adj3" fmla="val 281751"/>
+            </a:avLst>
+          </a:prstGeom>
+          <a:ln w="18000">
             <a:solidFill>
-              <a:srgbClr val="CCADA5"/>
+              <a:srgbClr val="2A6099"/>
             </a:solidFill>
-            <a:ln w="14400">
-              <a:solidFill>
-                <a:srgbClr val="FF4000"/>
-              </a:solidFill>
-              <a:round/>
-            </a:ln>
-          </p:spPr>
-          <p:style>
-            <a:lnRef idx="0"/>
-            <a:fillRef idx="0"/>
-            <a:effectRef idx="0"/>
-            <a:fontRef idx="minor"/>
-          </p:style>
-          <p:txBody>
-            <a:bodyPr wrap="none" lIns="88200" tIns="43200" rIns="88200" bIns="43200" anchor="t">
-              <a:noAutofit/>
-            </a:bodyPr>
-            <a:p>
-              <a:endParaRPr lang="en-US" sz="1800" b="0" u="none" strike="noStrike">
-                <a:solidFill>
-                  <a:srgbClr val="000000"/>
-                </a:solidFill>
-                <a:effectLst/>
-                <a:uFillTx/>
-                <a:latin typeface="Times New Roman"/>
-              </a:endParaRPr>
-            </a:p>
-          </p:txBody>
-        </p:sp>
-        <p:sp>
-          <p:nvSpPr>
-            <p:cNvPr id="17" name=""/>
-            <p:cNvSpPr/>
-            <p:nvPr/>
-          </p:nvSpPr>
-          <p:spPr>
-            <a:xfrm>
-              <a:off x="948960" y="900000"/>
-              <a:ext cx="179640" cy="179640"/>
-            </a:xfrm>
-            <a:prstGeom prst="ellipse">
-              <a:avLst/>
-            </a:prstGeom>
+            <a:round/>
+          </a:ln>
+        </p:spPr>
+      </p:cxnSp>
+      <p:cxnSp>
+        <p:nvCxnSpPr>
+          <p:cNvPr id="26" name=""/>
+          <p:cNvCxnSpPr>
+            <a:stCxn id="27" idx="6"/>
+            <a:endCxn id="28" idx="2"/>
+          </p:cNvCxnSpPr>
+          <p:nvPr/>
+        </p:nvCxnSpPr>
+        <p:spPr>
+          <a:xfrm>
+            <a:off x="848880" y="2069640"/>
+            <a:ext cx="99000" cy="360"/>
+          </a:xfrm>
+          <a:prstGeom prst="bentConnector5">
+            <a:avLst>
+              <a:gd name="adj1" fmla="val -131751"/>
+              <a:gd name="adj2" fmla="val -24900000"/>
+              <a:gd name="adj3" fmla="val 281751"/>
+            </a:avLst>
+          </a:prstGeom>
+          <a:ln w="18000">
             <a:solidFill>
-              <a:srgbClr val="DEE6EF"/>
+              <a:srgbClr val="2A6099"/>
             </a:solidFill>
-            <a:ln w="21600">
-              <a:solidFill>
-                <a:srgbClr val="2A6099"/>
-              </a:solidFill>
-              <a:round/>
-            </a:ln>
-          </p:spPr>
-          <p:style>
-            <a:lnRef idx="0"/>
-            <a:fillRef idx="0"/>
-            <a:effectRef idx="0"/>
-            <a:fontRef idx="minor"/>
-          </p:style>
-          <p:txBody>
-            <a:bodyPr wrap="none" lIns="90000" tIns="46800" rIns="90000" bIns="46800" anchor="t">
-              <a:noAutofit/>
-            </a:bodyPr>
-            <a:p>
-              <a:endParaRPr lang="en-US" sz="1800" b="0" u="none" strike="noStrike">
-                <a:solidFill>
-                  <a:srgbClr val="000000"/>
-                </a:solidFill>
-                <a:effectLst/>
-                <a:uFillTx/>
-                <a:latin typeface="Times New Roman"/>
-              </a:endParaRPr>
-            </a:p>
-          </p:txBody>
-        </p:sp>
-        <p:sp>
-          <p:nvSpPr>
-            <p:cNvPr id="16" name=""/>
-            <p:cNvSpPr/>
-            <p:nvPr/>
-          </p:nvSpPr>
-          <p:spPr>
-            <a:xfrm>
-              <a:off x="671040" y="900000"/>
-              <a:ext cx="179640" cy="179640"/>
-            </a:xfrm>
-            <a:prstGeom prst="ellipse">
-              <a:avLst/>
-            </a:prstGeom>
+            <a:round/>
+          </a:ln>
+        </p:spPr>
+      </p:cxnSp>
+      <p:cxnSp>
+        <p:nvCxnSpPr>
+          <p:cNvPr id="29" name=""/>
+          <p:cNvCxnSpPr>
+            <a:stCxn id="30" idx="6"/>
+            <a:endCxn id="31" idx="2"/>
+          </p:cNvCxnSpPr>
+          <p:nvPr/>
+        </p:nvCxnSpPr>
+        <p:spPr>
+          <a:xfrm>
+            <a:off x="625320" y="2285640"/>
+            <a:ext cx="549000" cy="360"/>
+          </a:xfrm>
+          <a:prstGeom prst="bentConnector2">
+            <a:avLst/>
+          </a:prstGeom>
+          <a:ln w="18000">
             <a:solidFill>
-              <a:srgbClr val="CCADA5"/>
+              <a:srgbClr val="2A6099"/>
             </a:solidFill>
-            <a:ln w="14400">
-              <a:solidFill>
-                <a:srgbClr val="FF4000"/>
-              </a:solidFill>
-              <a:round/>
-            </a:ln>
-          </p:spPr>
-          <p:style>
-            <a:lnRef idx="0"/>
-            <a:fillRef idx="0"/>
-            <a:effectRef idx="0"/>
-            <a:fontRef idx="minor"/>
-          </p:style>
-          <p:txBody>
-            <a:bodyPr wrap="none" lIns="88200" tIns="43200" rIns="88200" bIns="43200" anchor="t">
-              <a:noAutofit/>
-            </a:bodyPr>
-            <a:p>
-              <a:endParaRPr lang="en-US" sz="1800" b="0" u="none" strike="noStrike">
-                <a:solidFill>
-                  <a:srgbClr val="000000"/>
-                </a:solidFill>
-                <a:effectLst/>
-                <a:uFillTx/>
-                <a:latin typeface="Times New Roman"/>
-              </a:endParaRPr>
-            </a:p>
-          </p:txBody>
-        </p:sp>
-        <p:sp>
-          <p:nvSpPr>
-            <p:cNvPr id="19" name=""/>
-            <p:cNvSpPr/>
-            <p:nvPr/>
-          </p:nvSpPr>
-          <p:spPr>
-            <a:xfrm flipH="1">
-              <a:off x="1172520" y="1116000"/>
-              <a:ext cx="179640" cy="179640"/>
-            </a:xfrm>
-            <a:prstGeom prst="ellipse">
-              <a:avLst/>
-            </a:prstGeom>
+            <a:round/>
+          </a:ln>
+        </p:spPr>
+      </p:cxnSp>
+      <p:cxnSp>
+        <p:nvCxnSpPr>
+          <p:cNvPr id="32" name=""/>
+          <p:cNvCxnSpPr>
+            <a:stCxn id="33" idx="6"/>
+            <a:endCxn id="34" idx="2"/>
+          </p:cNvCxnSpPr>
+          <p:nvPr/>
+        </p:nvCxnSpPr>
+        <p:spPr>
+          <a:xfrm>
+            <a:off x="539280" y="2501640"/>
+            <a:ext cx="721080" cy="360"/>
+          </a:xfrm>
+          <a:prstGeom prst="bentConnector2">
+            <a:avLst/>
+          </a:prstGeom>
+          <a:ln w="18000">
             <a:solidFill>
-              <a:srgbClr val="D3DAE3"/>
+              <a:srgbClr val="2A6099"/>
             </a:solidFill>
-            <a:ln w="19800">
-              <a:solidFill>
-                <a:srgbClr val="2A6099"/>
-              </a:solidFill>
-              <a:round/>
-            </a:ln>
-          </p:spPr>
-          <p:style>
-            <a:lnRef idx="0"/>
-            <a:fillRef idx="0"/>
-            <a:effectRef idx="0"/>
-            <a:fontRef idx="minor"/>
-          </p:style>
-          <p:txBody>
-            <a:bodyPr wrap="none" lIns="90000" tIns="45000" rIns="90000" bIns="45000" anchor="t">
-              <a:noAutofit/>
-            </a:bodyPr>
-            <a:p>
-              <a:endParaRPr lang="en-US" sz="1800" b="0" u="none" strike="noStrike">
-                <a:solidFill>
-                  <a:srgbClr val="000000"/>
-                </a:solidFill>
-                <a:effectLst/>
-                <a:uFillTx/>
-                <a:latin typeface="Times New Roman"/>
-              </a:endParaRPr>
-            </a:p>
-          </p:txBody>
-        </p:sp>
-        <p:sp>
-          <p:nvSpPr>
-            <p:cNvPr id="20" name=""/>
-            <p:cNvSpPr/>
-            <p:nvPr/>
-          </p:nvSpPr>
-          <p:spPr>
-            <a:xfrm flipH="1">
-              <a:off x="444600" y="1116000"/>
-              <a:ext cx="179640" cy="179640"/>
-            </a:xfrm>
-            <a:prstGeom prst="ellipse">
-              <a:avLst/>
-            </a:prstGeom>
+            <a:round/>
+          </a:ln>
+        </p:spPr>
+      </p:cxnSp>
+      <p:cxnSp>
+        <p:nvCxnSpPr>
+          <p:cNvPr id="35" name=""/>
+          <p:cNvCxnSpPr>
+            <a:stCxn id="36" idx="6"/>
+            <a:endCxn id="37" idx="2"/>
+          </p:cNvCxnSpPr>
+          <p:nvPr/>
+        </p:nvCxnSpPr>
+        <p:spPr>
+          <a:xfrm>
+            <a:off x="625320" y="2717640"/>
+            <a:ext cx="549000" cy="360"/>
+          </a:xfrm>
+          <a:prstGeom prst="bentConnector2">
+            <a:avLst/>
+          </a:prstGeom>
+          <a:ln w="18000">
             <a:solidFill>
-              <a:srgbClr val="D9B8AF"/>
+              <a:srgbClr val="2A6099"/>
             </a:solidFill>
-            <a:ln w="16200">
-              <a:solidFill>
-                <a:srgbClr val="FF4000"/>
-              </a:solidFill>
-              <a:round/>
-            </a:ln>
-          </p:spPr>
-          <p:style>
-            <a:lnRef idx="0"/>
-            <a:fillRef idx="0"/>
-            <a:effectRef idx="0"/>
-            <a:fontRef idx="minor"/>
-          </p:style>
-          <p:txBody>
-            <a:bodyPr wrap="none" lIns="89280" tIns="44280" rIns="89280" bIns="44280" anchor="t">
-              <a:noAutofit/>
-            </a:bodyPr>
-            <a:p>
-              <a:endParaRPr lang="en-US" sz="1800" b="0" u="none" strike="noStrike">
-                <a:solidFill>
-                  <a:srgbClr val="000000"/>
-                </a:solidFill>
-                <a:effectLst/>
-                <a:uFillTx/>
-                <a:latin typeface="Times New Roman"/>
-              </a:endParaRPr>
-            </a:p>
-          </p:txBody>
-        </p:sp>
-        <p:sp>
-          <p:nvSpPr>
-            <p:cNvPr id="22" name=""/>
-            <p:cNvSpPr/>
-            <p:nvPr/>
-          </p:nvSpPr>
-          <p:spPr>
-            <a:xfrm flipH="1">
-              <a:off x="1258560" y="1332000"/>
-              <a:ext cx="179640" cy="179640"/>
-            </a:xfrm>
-            <a:prstGeom prst="ellipse">
-              <a:avLst/>
-            </a:prstGeom>
+            <a:round/>
+          </a:ln>
+        </p:spPr>
+      </p:cxnSp>
+      <p:cxnSp>
+        <p:nvCxnSpPr>
+          <p:cNvPr id="38" name=""/>
+          <p:cNvCxnSpPr>
+            <a:stCxn id="39" idx="6"/>
+            <a:endCxn id="40" idx="2"/>
+          </p:cNvCxnSpPr>
+          <p:nvPr/>
+        </p:nvCxnSpPr>
+        <p:spPr>
+          <a:xfrm>
+            <a:off x="850320" y="2933640"/>
+            <a:ext cx="99000" cy="360"/>
+          </a:xfrm>
+          <a:prstGeom prst="bentConnector2">
+            <a:avLst/>
+          </a:prstGeom>
+          <a:ln w="18000">
             <a:solidFill>
-              <a:srgbClr val="C7CED6"/>
+              <a:srgbClr val="2A6099"/>
             </a:solidFill>
-            <a:ln w="18000">
-              <a:solidFill>
-                <a:srgbClr val="2A6099"/>
-              </a:solidFill>
-              <a:round/>
-            </a:ln>
-          </p:spPr>
-          <p:style>
-            <a:lnRef idx="0"/>
-            <a:fillRef idx="0"/>
-            <a:effectRef idx="0"/>
-            <a:fontRef idx="minor"/>
-          </p:style>
-          <p:txBody>
-            <a:bodyPr wrap="none" lIns="90000" tIns="45000" rIns="90000" bIns="45000" anchor="t">
-              <a:noAutofit/>
-            </a:bodyPr>
-            <a:p>
-              <a:endParaRPr lang="en-US" sz="1800" b="0" u="none" strike="noStrike">
-                <a:solidFill>
-                  <a:srgbClr val="000000"/>
-                </a:solidFill>
-                <a:effectLst/>
-                <a:uFillTx/>
-                <a:latin typeface="Times New Roman"/>
-              </a:endParaRPr>
-            </a:p>
-          </p:txBody>
-        </p:sp>
-        <p:sp>
-          <p:nvSpPr>
-            <p:cNvPr id="23" name=""/>
-            <p:cNvSpPr/>
-            <p:nvPr/>
-          </p:nvSpPr>
-          <p:spPr>
-            <a:xfrm flipH="1">
-              <a:off x="358560" y="1332000"/>
-              <a:ext cx="179640" cy="179640"/>
-            </a:xfrm>
-            <a:prstGeom prst="ellipse">
-              <a:avLst/>
-            </a:prstGeom>
+            <a:round/>
+          </a:ln>
+        </p:spPr>
+      </p:cxnSp>
+      <p:cxnSp>
+        <p:nvCxnSpPr>
+          <p:cNvPr id="41" name=""/>
+          <p:cNvCxnSpPr>
+            <a:stCxn id="42" idx="6"/>
+            <a:endCxn id="43" idx="2"/>
+          </p:cNvCxnSpPr>
+          <p:nvPr/>
+        </p:nvCxnSpPr>
+        <p:spPr>
+          <a:xfrm>
+            <a:off x="850320" y="3149640"/>
+            <a:ext cx="99000" cy="360"/>
+          </a:xfrm>
+          <a:prstGeom prst="bentConnector2">
+            <a:avLst/>
+          </a:prstGeom>
+          <a:ln w="18000">
             <a:solidFill>
-              <a:srgbClr val="E6C2B9"/>
+              <a:srgbClr val="2A6099"/>
             </a:solidFill>
-            <a:ln w="18000">
-              <a:solidFill>
-                <a:srgbClr val="FF4000"/>
-              </a:solidFill>
-              <a:round/>
-            </a:ln>
-          </p:spPr>
-          <p:style>
-            <a:lnRef idx="0"/>
-            <a:fillRef idx="0"/>
-            <a:effectRef idx="0"/>
-            <a:fontRef idx="minor"/>
-          </p:style>
-          <p:txBody>
-            <a:bodyPr wrap="none" lIns="90000" tIns="45000" rIns="90000" bIns="45000" anchor="t">
-              <a:noAutofit/>
-            </a:bodyPr>
-            <a:p>
-              <a:endParaRPr lang="en-US" sz="1800" b="0" u="none" strike="noStrike">
-                <a:solidFill>
-                  <a:srgbClr val="000000"/>
-                </a:solidFill>
-                <a:effectLst/>
-                <a:uFillTx/>
-                <a:latin typeface="Times New Roman"/>
-              </a:endParaRPr>
-            </a:p>
-          </p:txBody>
-        </p:sp>
-        <p:sp>
-          <p:nvSpPr>
-            <p:cNvPr id="25" name=""/>
-            <p:cNvSpPr/>
-            <p:nvPr/>
-          </p:nvSpPr>
-          <p:spPr>
-            <a:xfrm flipH="1">
-              <a:off x="1172520" y="1548000"/>
-              <a:ext cx="179640" cy="179640"/>
-            </a:xfrm>
-            <a:prstGeom prst="ellipse">
-              <a:avLst/>
-            </a:prstGeom>
+            <a:round/>
+          </a:ln>
+        </p:spPr>
+      </p:cxnSp>
+      <p:cxnSp>
+        <p:nvCxnSpPr>
+          <p:cNvPr id="44" name=""/>
+          <p:cNvCxnSpPr>
+            <a:stCxn id="45" idx="6"/>
+            <a:endCxn id="46" idx="2"/>
+          </p:cNvCxnSpPr>
+          <p:nvPr/>
+        </p:nvCxnSpPr>
+        <p:spPr>
+          <a:xfrm rot="10800000">
+            <a:off x="623880" y="3365640"/>
+            <a:ext cx="549000" cy="360"/>
+          </a:xfrm>
+          <a:prstGeom prst="bentConnector5">
+            <a:avLst>
+              <a:gd name="adj1" fmla="val 17322"/>
+              <a:gd name="adj2" fmla="val -24900000"/>
+              <a:gd name="adj3" fmla="val 132677"/>
+            </a:avLst>
+          </a:prstGeom>
+          <a:ln w="18000">
             <a:solidFill>
-              <a:srgbClr val="BCC2C9"/>
+              <a:srgbClr val="2A6099"/>
             </a:solidFill>
-            <a:ln w="16200">
-              <a:solidFill>
-                <a:srgbClr val="2A6099"/>
-              </a:solidFill>
-              <a:round/>
-            </a:ln>
-          </p:spPr>
-          <p:style>
-            <a:lnRef idx="0"/>
-            <a:fillRef idx="0"/>
-            <a:effectRef idx="0"/>
-            <a:fontRef idx="minor"/>
-          </p:style>
-          <p:txBody>
-            <a:bodyPr wrap="none" lIns="89280" tIns="44280" rIns="89280" bIns="44280" anchor="t">
-              <a:noAutofit/>
-            </a:bodyPr>
-            <a:p>
-              <a:endParaRPr lang="en-US" sz="1800" b="0" u="none" strike="noStrike">
-                <a:solidFill>
-                  <a:srgbClr val="000000"/>
-                </a:solidFill>
-                <a:effectLst/>
-                <a:uFillTx/>
-                <a:latin typeface="Times New Roman"/>
-              </a:endParaRPr>
-            </a:p>
-          </p:txBody>
-        </p:sp>
-        <p:sp>
-          <p:nvSpPr>
-            <p:cNvPr id="26" name=""/>
-            <p:cNvSpPr/>
-            <p:nvPr/>
-          </p:nvSpPr>
-          <p:spPr>
-            <a:xfrm flipH="1">
-              <a:off x="444600" y="1548000"/>
-              <a:ext cx="179640" cy="179640"/>
-            </a:xfrm>
-            <a:prstGeom prst="ellipse">
-              <a:avLst/>
-            </a:prstGeom>
+            <a:round/>
+          </a:ln>
+        </p:spPr>
+      </p:cxnSp>
+      <p:cxnSp>
+        <p:nvCxnSpPr>
+          <p:cNvPr id="47" name=""/>
+          <p:cNvCxnSpPr>
+            <a:stCxn id="48" idx="6"/>
+            <a:endCxn id="49" idx="2"/>
+          </p:cNvCxnSpPr>
+          <p:nvPr/>
+        </p:nvCxnSpPr>
+        <p:spPr>
+          <a:xfrm rot="10800000">
+            <a:off x="537840" y="3581640"/>
+            <a:ext cx="721080" cy="360"/>
+          </a:xfrm>
+          <a:prstGeom prst="bentConnector5">
+            <a:avLst>
+              <a:gd name="adj1" fmla="val 25124"/>
+              <a:gd name="adj2" fmla="val -24900000"/>
+              <a:gd name="adj3" fmla="val 124875"/>
+            </a:avLst>
+          </a:prstGeom>
+          <a:ln w="18000">
             <a:solidFill>
-              <a:srgbClr val="F2CDC4"/>
+              <a:srgbClr val="2A6099"/>
             </a:solidFill>
-            <a:ln w="19800">
-              <a:solidFill>
-                <a:srgbClr val="FF4000"/>
-              </a:solidFill>
-              <a:round/>
-            </a:ln>
-          </p:spPr>
-          <p:style>
-            <a:lnRef idx="0"/>
-            <a:fillRef idx="0"/>
-            <a:effectRef idx="0"/>
-            <a:fontRef idx="minor"/>
-          </p:style>
-          <p:txBody>
-            <a:bodyPr wrap="none" lIns="90000" tIns="45000" rIns="90000" bIns="45000" anchor="t">
-              <a:noAutofit/>
-            </a:bodyPr>
-            <a:p>
-              <a:endParaRPr lang="en-US" sz="1800" b="0" u="none" strike="noStrike">
-                <a:solidFill>
-                  <a:srgbClr val="000000"/>
-                </a:solidFill>
-                <a:effectLst/>
-                <a:uFillTx/>
-                <a:latin typeface="Times New Roman"/>
-              </a:endParaRPr>
-            </a:p>
-          </p:txBody>
-        </p:sp>
-        <p:sp>
-          <p:nvSpPr>
-            <p:cNvPr id="28" name=""/>
-            <p:cNvSpPr/>
-            <p:nvPr/>
-          </p:nvSpPr>
-          <p:spPr>
-            <a:xfrm flipH="1">
-              <a:off x="947520" y="1764000"/>
-              <a:ext cx="179640" cy="179640"/>
-            </a:xfrm>
-            <a:prstGeom prst="ellipse">
-              <a:avLst/>
-            </a:prstGeom>
+            <a:round/>
+          </a:ln>
+        </p:spPr>
+      </p:cxnSp>
+      <p:cxnSp>
+        <p:nvCxnSpPr>
+          <p:cNvPr id="50" name=""/>
+          <p:cNvCxnSpPr>
+            <a:stCxn id="51" idx="6"/>
+            <a:endCxn id="52" idx="2"/>
+          </p:cNvCxnSpPr>
+          <p:nvPr/>
+        </p:nvCxnSpPr>
+        <p:spPr>
+          <a:xfrm rot="10800000">
+            <a:off x="623880" y="3797640"/>
+            <a:ext cx="549000" cy="360"/>
+          </a:xfrm>
+          <a:prstGeom prst="bentConnector5">
+            <a:avLst>
+              <a:gd name="adj1" fmla="val 17322"/>
+              <a:gd name="adj2" fmla="val -24900000"/>
+              <a:gd name="adj3" fmla="val 132677"/>
+            </a:avLst>
+          </a:prstGeom>
+          <a:ln w="18000">
             <a:solidFill>
-              <a:srgbClr val="AFB6BD"/>
+              <a:srgbClr val="2A6099"/>
             </a:solidFill>
-            <a:ln w="14400">
-              <a:solidFill>
-                <a:srgbClr val="2A6099"/>
-              </a:solidFill>
-              <a:round/>
-            </a:ln>
-          </p:spPr>
-          <p:style>
-            <a:lnRef idx="0"/>
-            <a:fillRef idx="0"/>
-            <a:effectRef idx="0"/>
-            <a:fontRef idx="minor"/>
-          </p:style>
-          <p:txBody>
-            <a:bodyPr wrap="none" lIns="88200" tIns="43200" rIns="88200" bIns="43200" anchor="t">
-              <a:noAutofit/>
-            </a:bodyPr>
-            <a:p>
-              <a:endParaRPr lang="en-US" sz="1800" b="0" u="none" strike="noStrike">
-                <a:solidFill>
-                  <a:srgbClr val="000000"/>
-                </a:solidFill>
-                <a:effectLst/>
-                <a:uFillTx/>
-                <a:latin typeface="Times New Roman"/>
-              </a:endParaRPr>
-            </a:p>
-          </p:txBody>
-        </p:sp>
-        <p:sp>
-          <p:nvSpPr>
-            <p:cNvPr id="29" name=""/>
-            <p:cNvSpPr/>
-            <p:nvPr/>
-          </p:nvSpPr>
-          <p:spPr>
-            <a:xfrm flipH="1">
-              <a:off x="669600" y="1764000"/>
-              <a:ext cx="179640" cy="179640"/>
-            </a:xfrm>
-            <a:prstGeom prst="ellipse">
-              <a:avLst/>
-            </a:prstGeom>
+            <a:round/>
+          </a:ln>
+        </p:spPr>
+      </p:cxnSp>
+      <p:cxnSp>
+        <p:nvCxnSpPr>
+          <p:cNvPr id="53" name=""/>
+          <p:cNvCxnSpPr>
+            <a:stCxn id="54" idx="6"/>
+            <a:endCxn id="55" idx="2"/>
+          </p:cNvCxnSpPr>
+          <p:nvPr/>
+        </p:nvCxnSpPr>
+        <p:spPr>
+          <a:xfrm>
+            <a:off x="848880" y="4013640"/>
+            <a:ext cx="99000" cy="360"/>
+          </a:xfrm>
+          <a:prstGeom prst="bentConnector5">
+            <a:avLst>
+              <a:gd name="adj1" fmla="val -131751"/>
+              <a:gd name="adj2" fmla="val -24900000"/>
+              <a:gd name="adj3" fmla="val 281751"/>
+            </a:avLst>
+          </a:prstGeom>
+          <a:ln w="18000">
             <a:solidFill>
-              <a:srgbClr val="FFD8CE"/>
+              <a:srgbClr val="2A6099"/>
             </a:solidFill>
-            <a:ln w="21600">
-              <a:solidFill>
-                <a:srgbClr val="FF4000"/>
-              </a:solidFill>
-              <a:round/>
-            </a:ln>
-          </p:spPr>
-          <p:style>
-            <a:lnRef idx="0"/>
-            <a:fillRef idx="0"/>
-            <a:effectRef idx="0"/>
-            <a:fontRef idx="minor"/>
-          </p:style>
-          <p:txBody>
-            <a:bodyPr wrap="none" lIns="90000" tIns="46800" rIns="90000" bIns="46800" anchor="t">
-              <a:noAutofit/>
-            </a:bodyPr>
-            <a:p>
-              <a:endParaRPr lang="en-US" sz="1800" b="0" u="none" strike="noStrike">
-                <a:solidFill>
-                  <a:srgbClr val="000000"/>
-                </a:solidFill>
-                <a:effectLst/>
-                <a:uFillTx/>
-                <a:latin typeface="Times New Roman"/>
-              </a:endParaRPr>
-            </a:p>
-          </p:txBody>
-        </p:sp>
-        <p:sp>
-          <p:nvSpPr>
-            <p:cNvPr id="32" name=""/>
-            <p:cNvSpPr/>
-            <p:nvPr/>
-          </p:nvSpPr>
-          <p:spPr>
-            <a:xfrm flipH="1">
-              <a:off x="669600" y="1980000"/>
-              <a:ext cx="179640" cy="179640"/>
-            </a:xfrm>
-            <a:prstGeom prst="ellipse">
-              <a:avLst/>
-            </a:prstGeom>
+            <a:round/>
+          </a:ln>
+        </p:spPr>
+      </p:cxnSp>
+      <p:cxnSp>
+        <p:nvCxnSpPr>
+          <p:cNvPr id="56" name=""/>
+          <p:cNvCxnSpPr>
+            <a:stCxn id="57" idx="6"/>
+            <a:endCxn id="58" idx="2"/>
+          </p:cNvCxnSpPr>
+          <p:nvPr/>
+        </p:nvCxnSpPr>
+        <p:spPr>
+          <a:xfrm>
+            <a:off x="848880" y="4229640"/>
+            <a:ext cx="99000" cy="360"/>
+          </a:xfrm>
+          <a:prstGeom prst="bentConnector5">
+            <a:avLst>
+              <a:gd name="adj1" fmla="val -131751"/>
+              <a:gd name="adj2" fmla="val -24900000"/>
+              <a:gd name="adj3" fmla="val 281751"/>
+            </a:avLst>
+          </a:prstGeom>
+          <a:ln w="18000">
             <a:solidFill>
-              <a:srgbClr val="AFB6BD"/>
+              <a:srgbClr val="2A6099"/>
             </a:solidFill>
-            <a:ln w="14400">
-              <a:solidFill>
-                <a:srgbClr val="2A6099"/>
-              </a:solidFill>
-              <a:round/>
-            </a:ln>
-          </p:spPr>
-          <p:style>
-            <a:lnRef idx="0"/>
-            <a:fillRef idx="0"/>
-            <a:effectRef idx="0"/>
-            <a:fontRef idx="minor"/>
-          </p:style>
-          <p:txBody>
-            <a:bodyPr wrap="none" lIns="88200" tIns="43200" rIns="88200" bIns="43200" anchor="t">
-              <a:noAutofit/>
-            </a:bodyPr>
-            <a:p>
-              <a:endParaRPr lang="en-US" sz="1800" b="0" u="none" strike="noStrike">
-                <a:solidFill>
-                  <a:srgbClr val="000000"/>
-                </a:solidFill>
-                <a:effectLst/>
-                <a:uFillTx/>
-                <a:latin typeface="Times New Roman"/>
-              </a:endParaRPr>
-            </a:p>
-          </p:txBody>
-        </p:sp>
-        <p:sp>
-          <p:nvSpPr>
-            <p:cNvPr id="31" name=""/>
-            <p:cNvSpPr/>
-            <p:nvPr/>
-          </p:nvSpPr>
-          <p:spPr>
-            <a:xfrm flipH="1">
-              <a:off x="947520" y="1980000"/>
-              <a:ext cx="179640" cy="179640"/>
-            </a:xfrm>
-            <a:prstGeom prst="ellipse">
-              <a:avLst/>
-            </a:prstGeom>
+            <a:round/>
+          </a:ln>
+        </p:spPr>
+      </p:cxnSp>
+      <p:cxnSp>
+        <p:nvCxnSpPr>
+          <p:cNvPr id="59" name=""/>
+          <p:cNvCxnSpPr>
+            <a:stCxn id="60" idx="6"/>
+            <a:endCxn id="61" idx="2"/>
+          </p:cNvCxnSpPr>
+          <p:nvPr/>
+        </p:nvCxnSpPr>
+        <p:spPr>
+          <a:xfrm>
+            <a:off x="625320" y="4445640"/>
+            <a:ext cx="549000" cy="360"/>
+          </a:xfrm>
+          <a:prstGeom prst="bentConnector2">
+            <a:avLst/>
+          </a:prstGeom>
+          <a:ln w="18000">
             <a:solidFill>
-              <a:srgbClr val="FFD8CE"/>
+              <a:srgbClr val="2A6099"/>
             </a:solidFill>
-            <a:ln w="21600">
-              <a:solidFill>
-                <a:srgbClr val="FF4000"/>
-              </a:solidFill>
-              <a:round/>
-            </a:ln>
-          </p:spPr>
-          <p:style>
-            <a:lnRef idx="0"/>
-            <a:fillRef idx="0"/>
-            <a:effectRef idx="0"/>
-            <a:fontRef idx="minor"/>
-          </p:style>
-          <p:txBody>
-            <a:bodyPr wrap="none" lIns="90000" tIns="46800" rIns="90000" bIns="46800" anchor="t">
-              <a:noAutofit/>
-            </a:bodyPr>
-            <a:p>
-              <a:endParaRPr lang="en-US" sz="1800" b="0" u="none" strike="noStrike">
-                <a:solidFill>
-                  <a:srgbClr val="000000"/>
-                </a:solidFill>
-                <a:effectLst/>
-                <a:uFillTx/>
-                <a:latin typeface="Times New Roman"/>
-              </a:endParaRPr>
-            </a:p>
-          </p:txBody>
-        </p:sp>
-        <p:sp>
-          <p:nvSpPr>
-            <p:cNvPr id="34" name=""/>
-            <p:cNvSpPr/>
-            <p:nvPr/>
-          </p:nvSpPr>
-          <p:spPr>
-            <a:xfrm>
-              <a:off x="446040" y="2196000"/>
-              <a:ext cx="179640" cy="179640"/>
-            </a:xfrm>
-            <a:prstGeom prst="ellipse">
-              <a:avLst/>
-            </a:prstGeom>
+            <a:round/>
+          </a:ln>
+        </p:spPr>
+      </p:cxnSp>
+      <p:cxnSp>
+        <p:nvCxnSpPr>
+          <p:cNvPr id="62" name=""/>
+          <p:cNvCxnSpPr>
+            <a:stCxn id="63" idx="6"/>
+            <a:endCxn id="64" idx="2"/>
+          </p:cNvCxnSpPr>
+          <p:nvPr/>
+        </p:nvCxnSpPr>
+        <p:spPr>
+          <a:xfrm>
+            <a:off x="539280" y="4661640"/>
+            <a:ext cx="721080" cy="360"/>
+          </a:xfrm>
+          <a:prstGeom prst="bentConnector2">
+            <a:avLst/>
+          </a:prstGeom>
+          <a:ln w="18000">
             <a:solidFill>
-              <a:srgbClr val="BCC2C9"/>
+              <a:srgbClr val="2A6099"/>
             </a:solidFill>
-            <a:ln w="16200">
-              <a:solidFill>
-                <a:srgbClr val="2A6099"/>
-              </a:solidFill>
-              <a:round/>
-            </a:ln>
-          </p:spPr>
-          <p:style>
-            <a:lnRef idx="0"/>
-            <a:fillRef idx="0"/>
-            <a:effectRef idx="0"/>
-            <a:fontRef idx="minor"/>
-          </p:style>
-          <p:txBody>
-            <a:bodyPr wrap="none" lIns="89280" tIns="44280" rIns="89280" bIns="44280" anchor="t">
-              <a:noAutofit/>
-            </a:bodyPr>
-            <a:p>
-              <a:endParaRPr lang="en-US" sz="1800" b="0" u="none" strike="noStrike">
-                <a:solidFill>
-                  <a:srgbClr val="000000"/>
-                </a:solidFill>
-                <a:effectLst/>
-                <a:uFillTx/>
-                <a:latin typeface="Times New Roman"/>
-              </a:endParaRPr>
-            </a:p>
-          </p:txBody>
-        </p:sp>
-        <p:sp>
-          <p:nvSpPr>
-            <p:cNvPr id="35" name=""/>
-            <p:cNvSpPr/>
-            <p:nvPr/>
-          </p:nvSpPr>
-          <p:spPr>
-            <a:xfrm>
-              <a:off x="1173960" y="2196000"/>
-              <a:ext cx="179640" cy="179640"/>
-            </a:xfrm>
-            <a:prstGeom prst="ellipse">
-              <a:avLst/>
-            </a:prstGeom>
+            <a:round/>
+          </a:ln>
+        </p:spPr>
+      </p:cxnSp>
+      <p:cxnSp>
+        <p:nvCxnSpPr>
+          <p:cNvPr id="65" name=""/>
+          <p:cNvCxnSpPr>
+            <a:stCxn id="66" idx="6"/>
+            <a:endCxn id="67" idx="2"/>
+          </p:cNvCxnSpPr>
+          <p:nvPr/>
+        </p:nvCxnSpPr>
+        <p:spPr>
+          <a:xfrm>
+            <a:off x="625320" y="4877640"/>
+            <a:ext cx="549000" cy="360"/>
+          </a:xfrm>
+          <a:prstGeom prst="bentConnector2">
+            <a:avLst/>
+          </a:prstGeom>
+          <a:ln w="18000">
             <a:solidFill>
-              <a:srgbClr val="F2CDC4"/>
+              <a:srgbClr val="2A6099"/>
             </a:solidFill>
-            <a:ln w="19800">
-              <a:solidFill>
-                <a:srgbClr val="FF4000"/>
-              </a:solidFill>
-              <a:round/>
-            </a:ln>
-          </p:spPr>
-          <p:style>
-            <a:lnRef idx="0"/>
-            <a:fillRef idx="0"/>
-            <a:effectRef idx="0"/>
-            <a:fontRef idx="minor"/>
-          </p:style>
-          <p:txBody>
-            <a:bodyPr wrap="none" lIns="90000" tIns="45000" rIns="90000" bIns="45000" anchor="t">
-              <a:noAutofit/>
-            </a:bodyPr>
-            <a:p>
-              <a:endParaRPr lang="en-US" sz="1800" b="0" u="none" strike="noStrike">
-                <a:solidFill>
-                  <a:srgbClr val="000000"/>
-                </a:solidFill>
-                <a:effectLst/>
-                <a:uFillTx/>
-                <a:latin typeface="Times New Roman"/>
-              </a:endParaRPr>
-            </a:p>
-          </p:txBody>
-        </p:sp>
-        <p:sp>
-          <p:nvSpPr>
-            <p:cNvPr id="37" name=""/>
-            <p:cNvSpPr/>
-            <p:nvPr/>
-          </p:nvSpPr>
-          <p:spPr>
-            <a:xfrm>
-              <a:off x="360000" y="2412000"/>
-              <a:ext cx="179640" cy="179640"/>
-            </a:xfrm>
-            <a:prstGeom prst="ellipse">
-              <a:avLst/>
-            </a:prstGeom>
+            <a:round/>
+          </a:ln>
+        </p:spPr>
+      </p:cxnSp>
+      <p:cxnSp>
+        <p:nvCxnSpPr>
+          <p:cNvPr id="68" name=""/>
+          <p:cNvCxnSpPr>
+            <a:stCxn id="69" idx="6"/>
+            <a:endCxn id="70" idx="2"/>
+          </p:cNvCxnSpPr>
+          <p:nvPr/>
+        </p:nvCxnSpPr>
+        <p:spPr>
+          <a:xfrm>
+            <a:off x="850320" y="5093640"/>
+            <a:ext cx="99000" cy="360"/>
+          </a:xfrm>
+          <a:prstGeom prst="bentConnector2">
+            <a:avLst/>
+          </a:prstGeom>
+          <a:ln w="18000">
             <a:solidFill>
-              <a:srgbClr val="C7CED6"/>
+              <a:srgbClr val="2A6099"/>
             </a:solidFill>
-            <a:ln w="18000">
-              <a:solidFill>
-                <a:srgbClr val="2A6099"/>
-              </a:solidFill>
-              <a:round/>
-            </a:ln>
-          </p:spPr>
-          <p:style>
-            <a:lnRef idx="0"/>
-            <a:fillRef idx="0"/>
-            <a:effectRef idx="0"/>
-            <a:fontRef idx="minor"/>
-          </p:style>
-          <p:txBody>
-            <a:bodyPr wrap="none" lIns="90000" tIns="45000" rIns="90000" bIns="45000" anchor="t">
-              <a:noAutofit/>
-            </a:bodyPr>
-            <a:p>
-              <a:endParaRPr lang="en-US" sz="1800" b="0" u="none" strike="noStrike">
-                <a:solidFill>
-                  <a:srgbClr val="000000"/>
-                </a:solidFill>
-                <a:effectLst/>
-                <a:uFillTx/>
-                <a:latin typeface="Times New Roman"/>
-              </a:endParaRPr>
-            </a:p>
-          </p:txBody>
-        </p:sp>
-        <p:sp>
-          <p:nvSpPr>
-            <p:cNvPr id="38" name=""/>
-            <p:cNvSpPr/>
-            <p:nvPr/>
-          </p:nvSpPr>
-          <p:spPr>
-            <a:xfrm>
-              <a:off x="1260000" y="2412000"/>
-              <a:ext cx="179640" cy="179640"/>
-            </a:xfrm>
-            <a:prstGeom prst="ellipse">
-              <a:avLst/>
-            </a:prstGeom>
+            <a:round/>
+          </a:ln>
+        </p:spPr>
+      </p:cxnSp>
+      <p:cxnSp>
+        <p:nvCxnSpPr>
+          <p:cNvPr id="71" name=""/>
+          <p:cNvCxnSpPr>
+            <a:stCxn id="72" idx="6"/>
+            <a:endCxn id="73" idx="2"/>
+          </p:cNvCxnSpPr>
+          <p:nvPr/>
+        </p:nvCxnSpPr>
+        <p:spPr>
+          <a:xfrm>
+            <a:off x="850320" y="5309640"/>
+            <a:ext cx="99000" cy="360"/>
+          </a:xfrm>
+          <a:prstGeom prst="bentConnector2">
+            <a:avLst/>
+          </a:prstGeom>
+          <a:ln w="18000">
             <a:solidFill>
-              <a:srgbClr val="E6C2B9"/>
+              <a:srgbClr val="2A6099"/>
             </a:solidFill>
-            <a:ln w="18000">
-              <a:solidFill>
-                <a:srgbClr val="FF4000"/>
-              </a:solidFill>
-              <a:round/>
-            </a:ln>
-          </p:spPr>
-          <p:style>
-            <a:lnRef idx="0"/>
-            <a:fillRef idx="0"/>
-            <a:effectRef idx="0"/>
-            <a:fontRef idx="minor"/>
-          </p:style>
-          <p:txBody>
-            <a:bodyPr wrap="none" lIns="90000" tIns="45000" rIns="90000" bIns="45000" anchor="t">
-              <a:noAutofit/>
-            </a:bodyPr>
-            <a:p>
-              <a:endParaRPr lang="en-US" sz="1800" b="0" u="none" strike="noStrike">
-                <a:solidFill>
-                  <a:srgbClr val="000000"/>
-                </a:solidFill>
-                <a:effectLst/>
-                <a:uFillTx/>
-                <a:latin typeface="Times New Roman"/>
-              </a:endParaRPr>
-            </a:p>
-          </p:txBody>
-        </p:sp>
-        <p:sp>
-          <p:nvSpPr>
-            <p:cNvPr id="40" name=""/>
-            <p:cNvSpPr/>
-            <p:nvPr/>
-          </p:nvSpPr>
-          <p:spPr>
-            <a:xfrm>
-              <a:off x="446040" y="2628000"/>
-              <a:ext cx="179640" cy="179640"/>
-            </a:xfrm>
-            <a:prstGeom prst="ellipse">
-              <a:avLst/>
-            </a:prstGeom>
+            <a:round/>
+          </a:ln>
+        </p:spPr>
+      </p:cxnSp>
+      <p:cxnSp>
+        <p:nvCxnSpPr>
+          <p:cNvPr id="74" name=""/>
+          <p:cNvCxnSpPr>
+            <a:stCxn id="75" idx="6"/>
+            <a:endCxn id="76" idx="2"/>
+          </p:cNvCxnSpPr>
+          <p:nvPr/>
+        </p:nvCxnSpPr>
+        <p:spPr>
+          <a:xfrm rot="10800000">
+            <a:off x="623880" y="5525640"/>
+            <a:ext cx="549000" cy="360"/>
+          </a:xfrm>
+          <a:prstGeom prst="bentConnector5">
+            <a:avLst>
+              <a:gd name="adj1" fmla="val 17322"/>
+              <a:gd name="adj2" fmla="val -24900000"/>
+              <a:gd name="adj3" fmla="val 132677"/>
+            </a:avLst>
+          </a:prstGeom>
+          <a:ln w="18000">
             <a:solidFill>
-              <a:srgbClr val="D3DAE3"/>
+              <a:srgbClr val="2A6099"/>
             </a:solidFill>
-            <a:ln w="19800">
-              <a:solidFill>
-                <a:srgbClr val="2A6099"/>
-              </a:solidFill>
-              <a:round/>
-            </a:ln>
-          </p:spPr>
-          <p:style>
-            <a:lnRef idx="0"/>
-            <a:fillRef idx="0"/>
-            <a:effectRef idx="0"/>
-            <a:fontRef idx="minor"/>
-          </p:style>
-          <p:txBody>
-            <a:bodyPr wrap="none" lIns="90000" tIns="45000" rIns="90000" bIns="45000" anchor="t">
-              <a:noAutofit/>
-            </a:bodyPr>
-            <a:p>
-              <a:endParaRPr lang="en-US" sz="1800" b="0" u="none" strike="noStrike">
-                <a:solidFill>
-                  <a:srgbClr val="000000"/>
-                </a:solidFill>
-                <a:effectLst/>
-                <a:uFillTx/>
-                <a:latin typeface="Times New Roman"/>
-              </a:endParaRPr>
-            </a:p>
-          </p:txBody>
-        </p:sp>
-        <p:sp>
-          <p:nvSpPr>
-            <p:cNvPr id="41" name=""/>
-            <p:cNvSpPr/>
-            <p:nvPr/>
-          </p:nvSpPr>
-          <p:spPr>
-            <a:xfrm>
-              <a:off x="1173960" y="2628000"/>
-              <a:ext cx="179640" cy="179640"/>
-            </a:xfrm>
-            <a:prstGeom prst="ellipse">
-              <a:avLst/>
-            </a:prstGeom>
+            <a:round/>
+          </a:ln>
+        </p:spPr>
+      </p:cxnSp>
+      <p:cxnSp>
+        <p:nvCxnSpPr>
+          <p:cNvPr id="77" name=""/>
+          <p:cNvCxnSpPr>
+            <a:stCxn id="78" idx="6"/>
+            <a:endCxn id="79" idx="2"/>
+          </p:cNvCxnSpPr>
+          <p:nvPr/>
+        </p:nvCxnSpPr>
+        <p:spPr>
+          <a:xfrm rot="10800000">
+            <a:off x="537840" y="5741640"/>
+            <a:ext cx="721080" cy="360"/>
+          </a:xfrm>
+          <a:prstGeom prst="bentConnector5">
+            <a:avLst>
+              <a:gd name="adj1" fmla="val 25124"/>
+              <a:gd name="adj2" fmla="val -24900000"/>
+              <a:gd name="adj3" fmla="val 124875"/>
+            </a:avLst>
+          </a:prstGeom>
+          <a:ln w="18000">
             <a:solidFill>
-              <a:srgbClr val="D9B8AF"/>
+              <a:srgbClr val="2A6099"/>
             </a:solidFill>
-            <a:ln w="16200">
-              <a:solidFill>
-                <a:srgbClr val="FF4000"/>
-              </a:solidFill>
-              <a:round/>
-            </a:ln>
-          </p:spPr>
-          <p:style>
-            <a:lnRef idx="0"/>
-            <a:fillRef idx="0"/>
-            <a:effectRef idx="0"/>
-            <a:fontRef idx="minor"/>
-          </p:style>
-          <p:txBody>
-            <a:bodyPr wrap="none" lIns="89280" tIns="44280" rIns="89280" bIns="44280" anchor="t">
-              <a:noAutofit/>
-            </a:bodyPr>
-            <a:p>
-              <a:endParaRPr lang="en-US" sz="1800" b="0" u="none" strike="noStrike">
-                <a:solidFill>
-                  <a:srgbClr val="000000"/>
-                </a:solidFill>
-                <a:effectLst/>
-                <a:uFillTx/>
-                <a:latin typeface="Times New Roman"/>
-              </a:endParaRPr>
-            </a:p>
-          </p:txBody>
-        </p:sp>
-        <p:sp>
-          <p:nvSpPr>
-            <p:cNvPr id="43" name=""/>
-            <p:cNvSpPr/>
-            <p:nvPr/>
-          </p:nvSpPr>
-          <p:spPr>
-            <a:xfrm>
-              <a:off x="671040" y="2844000"/>
-              <a:ext cx="179640" cy="179640"/>
-            </a:xfrm>
-            <a:prstGeom prst="ellipse">
-              <a:avLst/>
-            </a:prstGeom>
-            <a:solidFill>
-              <a:srgbClr val="DEE6EF"/>
-            </a:solidFill>
-            <a:ln w="21600">
-              <a:solidFill>
-                <a:srgbClr val="2A6099"/>
-              </a:solidFill>
-              <a:round/>
-            </a:ln>
-          </p:spPr>
-          <p:style>
-            <a:lnRef idx="0"/>
-            <a:fillRef idx="0"/>
-            <a:effectRef idx="0"/>
-            <a:fontRef idx="minor"/>
-          </p:style>
-          <p:txBody>
-            <a:bodyPr wrap="none" lIns="90000" tIns="46800" rIns="90000" bIns="46800" anchor="t">
-              <a:noAutofit/>
-            </a:bodyPr>
-            <a:p>
-              <a:endParaRPr lang="en-US" sz="1800" b="0" u="none" strike="noStrike">
-                <a:solidFill>
-                  <a:srgbClr val="000000"/>
-                </a:solidFill>
-                <a:effectLst/>
-                <a:uFillTx/>
-                <a:latin typeface="Times New Roman"/>
-              </a:endParaRPr>
-            </a:p>
-          </p:txBody>
-        </p:sp>
-        <p:sp>
-          <p:nvSpPr>
-            <p:cNvPr id="44" name=""/>
-            <p:cNvSpPr/>
-            <p:nvPr/>
-          </p:nvSpPr>
-          <p:spPr>
-            <a:xfrm>
-              <a:off x="948960" y="2844000"/>
-              <a:ext cx="179640" cy="179640"/>
-            </a:xfrm>
-            <a:prstGeom prst="ellipse">
-              <a:avLst/>
-            </a:prstGeom>
-            <a:solidFill>
-              <a:srgbClr val="CCADA5"/>
-            </a:solidFill>
-            <a:ln w="14400">
-              <a:solidFill>
-                <a:srgbClr val="FF4000"/>
-              </a:solidFill>
-              <a:round/>
-            </a:ln>
-          </p:spPr>
-          <p:style>
-            <a:lnRef idx="0"/>
-            <a:fillRef idx="0"/>
-            <a:effectRef idx="0"/>
-            <a:fontRef idx="minor"/>
-          </p:style>
-          <p:txBody>
-            <a:bodyPr wrap="none" lIns="88200" tIns="43200" rIns="88200" bIns="43200" anchor="t">
-              <a:noAutofit/>
-            </a:bodyPr>
-            <a:p>
-              <a:endParaRPr lang="en-US" sz="1800" b="0" u="none" strike="noStrike">
-                <a:solidFill>
-                  <a:srgbClr val="000000"/>
-                </a:solidFill>
-                <a:effectLst/>
-                <a:uFillTx/>
-                <a:latin typeface="Times New Roman"/>
-              </a:endParaRPr>
-            </a:p>
-          </p:txBody>
-        </p:sp>
-        <p:sp>
-          <p:nvSpPr>
-            <p:cNvPr id="47" name=""/>
-            <p:cNvSpPr/>
-            <p:nvPr/>
-          </p:nvSpPr>
-          <p:spPr>
-            <a:xfrm>
-              <a:off x="948960" y="3060000"/>
-              <a:ext cx="179640" cy="179640"/>
-            </a:xfrm>
-            <a:prstGeom prst="ellipse">
-              <a:avLst/>
-            </a:prstGeom>
-            <a:solidFill>
-              <a:srgbClr val="DEE6EF"/>
-            </a:solidFill>
-            <a:ln w="21600">
-              <a:solidFill>
-                <a:srgbClr val="2A6099"/>
-              </a:solidFill>
-              <a:round/>
-            </a:ln>
-          </p:spPr>
-          <p:style>
-            <a:lnRef idx="0"/>
-            <a:fillRef idx="0"/>
-            <a:effectRef idx="0"/>
-            <a:fontRef idx="minor"/>
-          </p:style>
-          <p:txBody>
-            <a:bodyPr wrap="none" lIns="90000" tIns="46800" rIns="90000" bIns="46800" anchor="t">
-              <a:noAutofit/>
-            </a:bodyPr>
-            <a:p>
-              <a:endParaRPr lang="en-US" sz="1800" b="0" u="none" strike="noStrike">
-                <a:solidFill>
-                  <a:srgbClr val="000000"/>
-                </a:solidFill>
-                <a:effectLst/>
-                <a:uFillTx/>
-                <a:latin typeface="Times New Roman"/>
-              </a:endParaRPr>
-            </a:p>
-          </p:txBody>
-        </p:sp>
-        <p:sp>
-          <p:nvSpPr>
-            <p:cNvPr id="46" name=""/>
-            <p:cNvSpPr/>
-            <p:nvPr/>
-          </p:nvSpPr>
-          <p:spPr>
-            <a:xfrm>
-              <a:off x="671040" y="3060000"/>
-              <a:ext cx="179640" cy="179640"/>
-            </a:xfrm>
-            <a:prstGeom prst="ellipse">
-              <a:avLst/>
-            </a:prstGeom>
-            <a:solidFill>
-              <a:srgbClr val="CCADA5"/>
-            </a:solidFill>
-            <a:ln w="14400">
-              <a:solidFill>
-                <a:srgbClr val="FF4000"/>
-              </a:solidFill>
-              <a:round/>
-            </a:ln>
-          </p:spPr>
-          <p:style>
-            <a:lnRef idx="0"/>
-            <a:fillRef idx="0"/>
-            <a:effectRef idx="0"/>
-            <a:fontRef idx="minor"/>
-          </p:style>
-          <p:txBody>
-            <a:bodyPr wrap="none" lIns="88200" tIns="43200" rIns="88200" bIns="43200" anchor="t">
-              <a:noAutofit/>
-            </a:bodyPr>
-            <a:p>
-              <a:endParaRPr lang="en-US" sz="1800" b="0" u="none" strike="noStrike">
-                <a:solidFill>
-                  <a:srgbClr val="000000"/>
-                </a:solidFill>
-                <a:effectLst/>
-                <a:uFillTx/>
-                <a:latin typeface="Times New Roman"/>
-              </a:endParaRPr>
-            </a:p>
-          </p:txBody>
-        </p:sp>
-        <p:sp>
-          <p:nvSpPr>
-            <p:cNvPr id="49" name=""/>
-            <p:cNvSpPr/>
-            <p:nvPr/>
-          </p:nvSpPr>
-          <p:spPr>
-            <a:xfrm flipH="1">
-              <a:off x="1172520" y="3276000"/>
-              <a:ext cx="179640" cy="179640"/>
-            </a:xfrm>
-            <a:prstGeom prst="ellipse">
-              <a:avLst/>
-            </a:prstGeom>
-            <a:solidFill>
-              <a:srgbClr val="D3DAE3"/>
-            </a:solidFill>
-            <a:ln w="19800">
-              <a:solidFill>
-                <a:srgbClr val="2A6099"/>
-              </a:solidFill>
-              <a:round/>
-            </a:ln>
-          </p:spPr>
-          <p:style>
-            <a:lnRef idx="0"/>
-            <a:fillRef idx="0"/>
-            <a:effectRef idx="0"/>
-            <a:fontRef idx="minor"/>
-          </p:style>
-          <p:txBody>
-            <a:bodyPr wrap="none" lIns="90000" tIns="45000" rIns="90000" bIns="45000" anchor="t">
-              <a:noAutofit/>
-            </a:bodyPr>
-            <a:p>
-              <a:endParaRPr lang="en-US" sz="1800" b="0" u="none" strike="noStrike">
-                <a:solidFill>
-                  <a:srgbClr val="000000"/>
-                </a:solidFill>
-                <a:effectLst/>
-                <a:uFillTx/>
-                <a:latin typeface="Times New Roman"/>
-              </a:endParaRPr>
-            </a:p>
-          </p:txBody>
-        </p:sp>
-        <p:sp>
-          <p:nvSpPr>
-            <p:cNvPr id="50" name=""/>
-            <p:cNvSpPr/>
-            <p:nvPr/>
-          </p:nvSpPr>
-          <p:spPr>
-            <a:xfrm flipH="1">
-              <a:off x="444600" y="3276000"/>
-              <a:ext cx="179640" cy="179640"/>
-            </a:xfrm>
-            <a:prstGeom prst="ellipse">
-              <a:avLst/>
-            </a:prstGeom>
-            <a:solidFill>
-              <a:srgbClr val="D9B8AF"/>
-            </a:solidFill>
-            <a:ln w="16200">
-              <a:solidFill>
-                <a:srgbClr val="FF4000"/>
-              </a:solidFill>
-              <a:round/>
-            </a:ln>
-          </p:spPr>
-          <p:style>
-            <a:lnRef idx="0"/>
-            <a:fillRef idx="0"/>
-            <a:effectRef idx="0"/>
-            <a:fontRef idx="minor"/>
-          </p:style>
-          <p:txBody>
-            <a:bodyPr wrap="none" lIns="89280" tIns="44280" rIns="89280" bIns="44280" anchor="t">
-              <a:noAutofit/>
-            </a:bodyPr>
-            <a:p>
-              <a:endParaRPr lang="en-US" sz="1800" b="0" u="none" strike="noStrike">
-                <a:solidFill>
-                  <a:srgbClr val="000000"/>
-                </a:solidFill>
-                <a:effectLst/>
-                <a:uFillTx/>
-                <a:latin typeface="Times New Roman"/>
-              </a:endParaRPr>
-            </a:p>
-          </p:txBody>
-        </p:sp>
-        <p:sp>
-          <p:nvSpPr>
-            <p:cNvPr id="52" name=""/>
-            <p:cNvSpPr/>
-            <p:nvPr/>
-          </p:nvSpPr>
-          <p:spPr>
-            <a:xfrm flipH="1">
-              <a:off x="1258560" y="3492000"/>
-              <a:ext cx="179640" cy="179640"/>
-            </a:xfrm>
-            <a:prstGeom prst="ellipse">
-              <a:avLst/>
-            </a:prstGeom>
-            <a:solidFill>
-              <a:srgbClr val="C7CED6"/>
-            </a:solidFill>
-            <a:ln w="18000">
-              <a:solidFill>
-                <a:srgbClr val="2A6099"/>
-              </a:solidFill>
-              <a:round/>
-            </a:ln>
-          </p:spPr>
-          <p:style>
-            <a:lnRef idx="0"/>
-            <a:fillRef idx="0"/>
-            <a:effectRef idx="0"/>
-            <a:fontRef idx="minor"/>
-          </p:style>
-          <p:txBody>
-            <a:bodyPr wrap="none" lIns="90000" tIns="45000" rIns="90000" bIns="45000" anchor="t">
-              <a:noAutofit/>
-            </a:bodyPr>
-            <a:p>
-              <a:endParaRPr lang="en-US" sz="1800" b="0" u="none" strike="noStrike">
-                <a:solidFill>
-                  <a:srgbClr val="000000"/>
-                </a:solidFill>
-                <a:effectLst/>
-                <a:uFillTx/>
-                <a:latin typeface="Times New Roman"/>
-              </a:endParaRPr>
-            </a:p>
-          </p:txBody>
-        </p:sp>
-        <p:sp>
-          <p:nvSpPr>
-            <p:cNvPr id="53" name=""/>
-            <p:cNvSpPr/>
-            <p:nvPr/>
-          </p:nvSpPr>
-          <p:spPr>
-            <a:xfrm flipH="1">
-              <a:off x="358560" y="3492000"/>
-              <a:ext cx="179640" cy="179640"/>
-            </a:xfrm>
-            <a:prstGeom prst="ellipse">
-              <a:avLst/>
-            </a:prstGeom>
-            <a:solidFill>
-              <a:srgbClr val="E6C2B9"/>
-            </a:solidFill>
-            <a:ln w="18000">
-              <a:solidFill>
-                <a:srgbClr val="FF4000"/>
-              </a:solidFill>
-              <a:round/>
-            </a:ln>
-          </p:spPr>
-          <p:style>
-            <a:lnRef idx="0"/>
-            <a:fillRef idx="0"/>
-            <a:effectRef idx="0"/>
-            <a:fontRef idx="minor"/>
-          </p:style>
-          <p:txBody>
-            <a:bodyPr wrap="none" lIns="90000" tIns="45000" rIns="90000" bIns="45000" anchor="t">
-              <a:noAutofit/>
-            </a:bodyPr>
-            <a:p>
-              <a:endParaRPr lang="en-US" sz="1800" b="0" u="none" strike="noStrike">
-                <a:solidFill>
-                  <a:srgbClr val="000000"/>
-                </a:solidFill>
-                <a:effectLst/>
-                <a:uFillTx/>
-                <a:latin typeface="Times New Roman"/>
-              </a:endParaRPr>
-            </a:p>
-          </p:txBody>
-        </p:sp>
-        <p:sp>
-          <p:nvSpPr>
-            <p:cNvPr id="55" name=""/>
-            <p:cNvSpPr/>
-            <p:nvPr/>
-          </p:nvSpPr>
-          <p:spPr>
-            <a:xfrm flipH="1">
-              <a:off x="1172520" y="3708000"/>
-              <a:ext cx="179640" cy="179640"/>
-            </a:xfrm>
-            <a:prstGeom prst="ellipse">
-              <a:avLst/>
-            </a:prstGeom>
-            <a:solidFill>
-              <a:srgbClr val="BCC2C9"/>
-            </a:solidFill>
-            <a:ln w="16200">
-              <a:solidFill>
-                <a:srgbClr val="2A6099"/>
-              </a:solidFill>
-              <a:round/>
-            </a:ln>
-          </p:spPr>
-          <p:style>
-            <a:lnRef idx="0"/>
-            <a:fillRef idx="0"/>
-            <a:effectRef idx="0"/>
-            <a:fontRef idx="minor"/>
-          </p:style>
-          <p:txBody>
-            <a:bodyPr wrap="none" lIns="89280" tIns="44280" rIns="89280" bIns="44280" anchor="t">
-              <a:noAutofit/>
-            </a:bodyPr>
-            <a:p>
-              <a:endParaRPr lang="en-US" sz="1800" b="0" u="none" strike="noStrike">
-                <a:solidFill>
-                  <a:srgbClr val="000000"/>
-                </a:solidFill>
-                <a:effectLst/>
-                <a:uFillTx/>
-                <a:latin typeface="Times New Roman"/>
-              </a:endParaRPr>
-            </a:p>
-          </p:txBody>
-        </p:sp>
-        <p:sp>
-          <p:nvSpPr>
-            <p:cNvPr id="56" name=""/>
-            <p:cNvSpPr/>
-            <p:nvPr/>
-          </p:nvSpPr>
-          <p:spPr>
-            <a:xfrm flipH="1">
-              <a:off x="444600" y="3708000"/>
-              <a:ext cx="179640" cy="179640"/>
-            </a:xfrm>
-            <a:prstGeom prst="ellipse">
-              <a:avLst/>
-            </a:prstGeom>
-            <a:solidFill>
-              <a:srgbClr val="F2CDC4"/>
-            </a:solidFill>
-            <a:ln w="19800">
-              <a:solidFill>
-                <a:srgbClr val="FF4000"/>
-              </a:solidFill>
-              <a:round/>
-            </a:ln>
-          </p:spPr>
-          <p:style>
-            <a:lnRef idx="0"/>
-            <a:fillRef idx="0"/>
-            <a:effectRef idx="0"/>
-            <a:fontRef idx="minor"/>
-          </p:style>
-          <p:txBody>
-            <a:bodyPr wrap="none" lIns="90000" tIns="45000" rIns="90000" bIns="45000" anchor="t">
-              <a:noAutofit/>
-            </a:bodyPr>
-            <a:p>
-              <a:endParaRPr lang="en-US" sz="1800" b="0" u="none" strike="noStrike">
-                <a:solidFill>
-                  <a:srgbClr val="000000"/>
-                </a:solidFill>
-                <a:effectLst/>
-                <a:uFillTx/>
-                <a:latin typeface="Times New Roman"/>
-              </a:endParaRPr>
-            </a:p>
-          </p:txBody>
-        </p:sp>
-        <p:sp>
-          <p:nvSpPr>
-            <p:cNvPr id="58" name=""/>
-            <p:cNvSpPr/>
-            <p:nvPr/>
-          </p:nvSpPr>
-          <p:spPr>
-            <a:xfrm flipH="1">
-              <a:off x="947520" y="3924000"/>
-              <a:ext cx="179640" cy="179640"/>
-            </a:xfrm>
-            <a:prstGeom prst="ellipse">
-              <a:avLst/>
-            </a:prstGeom>
-            <a:solidFill>
-              <a:srgbClr val="AFB6BD"/>
-            </a:solidFill>
-            <a:ln w="14400">
-              <a:solidFill>
-                <a:srgbClr val="2A6099"/>
-              </a:solidFill>
-              <a:round/>
-            </a:ln>
-          </p:spPr>
-          <p:style>
-            <a:lnRef idx="0"/>
-            <a:fillRef idx="0"/>
-            <a:effectRef idx="0"/>
-            <a:fontRef idx="minor"/>
-          </p:style>
-          <p:txBody>
-            <a:bodyPr wrap="none" lIns="88200" tIns="43200" rIns="88200" bIns="43200" anchor="t">
-              <a:noAutofit/>
-            </a:bodyPr>
-            <a:p>
-              <a:endParaRPr lang="en-US" sz="1800" b="0" u="none" strike="noStrike">
-                <a:solidFill>
-                  <a:srgbClr val="000000"/>
-                </a:solidFill>
-                <a:effectLst/>
-                <a:uFillTx/>
-                <a:latin typeface="Times New Roman"/>
-              </a:endParaRPr>
-            </a:p>
-          </p:txBody>
-        </p:sp>
-        <p:sp>
-          <p:nvSpPr>
-            <p:cNvPr id="59" name=""/>
-            <p:cNvSpPr/>
-            <p:nvPr/>
-          </p:nvSpPr>
-          <p:spPr>
-            <a:xfrm flipH="1">
-              <a:off x="669600" y="3924000"/>
-              <a:ext cx="179640" cy="179640"/>
-            </a:xfrm>
-            <a:prstGeom prst="ellipse">
-              <a:avLst/>
-            </a:prstGeom>
-            <a:solidFill>
-              <a:srgbClr val="FFD8CE"/>
-            </a:solidFill>
-            <a:ln w="21600">
-              <a:solidFill>
-                <a:srgbClr val="FF4000"/>
-              </a:solidFill>
-              <a:round/>
-            </a:ln>
-          </p:spPr>
-          <p:style>
-            <a:lnRef idx="0"/>
-            <a:fillRef idx="0"/>
-            <a:effectRef idx="0"/>
-            <a:fontRef idx="minor"/>
-          </p:style>
-          <p:txBody>
-            <a:bodyPr wrap="none" lIns="90000" tIns="46800" rIns="90000" bIns="46800" anchor="t">
-              <a:noAutofit/>
-            </a:bodyPr>
-            <a:p>
-              <a:endParaRPr lang="en-US" sz="1800" b="0" u="none" strike="noStrike">
-                <a:solidFill>
-                  <a:srgbClr val="000000"/>
-                </a:solidFill>
-                <a:effectLst/>
-                <a:uFillTx/>
-                <a:latin typeface="Times New Roman"/>
-              </a:endParaRPr>
-            </a:p>
-          </p:txBody>
-        </p:sp>
-        <p:sp>
-          <p:nvSpPr>
-            <p:cNvPr id="62" name=""/>
-            <p:cNvSpPr/>
-            <p:nvPr/>
-          </p:nvSpPr>
-          <p:spPr>
-            <a:xfrm flipH="1">
-              <a:off x="669600" y="4140000"/>
-              <a:ext cx="179640" cy="179640"/>
-            </a:xfrm>
-            <a:prstGeom prst="ellipse">
-              <a:avLst/>
-            </a:prstGeom>
-            <a:solidFill>
-              <a:srgbClr val="AFB6BD"/>
-            </a:solidFill>
-            <a:ln w="14400">
-              <a:solidFill>
-                <a:srgbClr val="2A6099"/>
-              </a:solidFill>
-              <a:round/>
-            </a:ln>
-          </p:spPr>
-          <p:style>
-            <a:lnRef idx="0"/>
-            <a:fillRef idx="0"/>
-            <a:effectRef idx="0"/>
-            <a:fontRef idx="minor"/>
-          </p:style>
-          <p:txBody>
-            <a:bodyPr wrap="none" lIns="88200" tIns="43200" rIns="88200" bIns="43200" anchor="t">
-              <a:noAutofit/>
-            </a:bodyPr>
-            <a:p>
-              <a:endParaRPr lang="en-US" sz="1800" b="0" u="none" strike="noStrike">
-                <a:solidFill>
-                  <a:srgbClr val="000000"/>
-                </a:solidFill>
-                <a:effectLst/>
-                <a:uFillTx/>
-                <a:latin typeface="Times New Roman"/>
-              </a:endParaRPr>
-            </a:p>
-          </p:txBody>
-        </p:sp>
-        <p:sp>
-          <p:nvSpPr>
-            <p:cNvPr id="61" name=""/>
-            <p:cNvSpPr/>
-            <p:nvPr/>
-          </p:nvSpPr>
-          <p:spPr>
-            <a:xfrm flipH="1">
-              <a:off x="947520" y="4140000"/>
-              <a:ext cx="179640" cy="179640"/>
-            </a:xfrm>
-            <a:prstGeom prst="ellipse">
-              <a:avLst/>
-            </a:prstGeom>
-            <a:solidFill>
-              <a:srgbClr val="FFD8CE"/>
-            </a:solidFill>
-            <a:ln w="21600">
-              <a:solidFill>
-                <a:srgbClr val="FF4000"/>
-              </a:solidFill>
-              <a:round/>
-            </a:ln>
-          </p:spPr>
-          <p:style>
-            <a:lnRef idx="0"/>
-            <a:fillRef idx="0"/>
-            <a:effectRef idx="0"/>
-            <a:fontRef idx="minor"/>
-          </p:style>
-          <p:txBody>
-            <a:bodyPr wrap="none" lIns="90000" tIns="46800" rIns="90000" bIns="46800" anchor="t">
-              <a:noAutofit/>
-            </a:bodyPr>
-            <a:p>
-              <a:endParaRPr lang="en-US" sz="1800" b="0" u="none" strike="noStrike">
-                <a:solidFill>
-                  <a:srgbClr val="000000"/>
-                </a:solidFill>
-                <a:effectLst/>
-                <a:uFillTx/>
-                <a:latin typeface="Times New Roman"/>
-              </a:endParaRPr>
-            </a:p>
-          </p:txBody>
-        </p:sp>
-        <p:sp>
-          <p:nvSpPr>
-            <p:cNvPr id="64" name=""/>
-            <p:cNvSpPr/>
-            <p:nvPr/>
-          </p:nvSpPr>
-          <p:spPr>
-            <a:xfrm>
-              <a:off x="446040" y="4356000"/>
-              <a:ext cx="179640" cy="179640"/>
-            </a:xfrm>
-            <a:prstGeom prst="ellipse">
-              <a:avLst/>
-            </a:prstGeom>
-            <a:solidFill>
-              <a:srgbClr val="BCC2C9"/>
-            </a:solidFill>
-            <a:ln w="16200">
-              <a:solidFill>
-                <a:srgbClr val="2A6099"/>
-              </a:solidFill>
-              <a:round/>
-            </a:ln>
-          </p:spPr>
-          <p:style>
-            <a:lnRef idx="0"/>
-            <a:fillRef idx="0"/>
-            <a:effectRef idx="0"/>
-            <a:fontRef idx="minor"/>
-          </p:style>
-          <p:txBody>
-            <a:bodyPr wrap="none" lIns="89280" tIns="44280" rIns="89280" bIns="44280" anchor="t">
-              <a:noAutofit/>
-            </a:bodyPr>
-            <a:p>
-              <a:endParaRPr lang="en-US" sz="1800" b="0" u="none" strike="noStrike">
-                <a:solidFill>
-                  <a:srgbClr val="000000"/>
-                </a:solidFill>
-                <a:effectLst/>
-                <a:uFillTx/>
-                <a:latin typeface="Times New Roman"/>
-              </a:endParaRPr>
-            </a:p>
-          </p:txBody>
-        </p:sp>
-        <p:sp>
-          <p:nvSpPr>
-            <p:cNvPr id="65" name=""/>
-            <p:cNvSpPr/>
-            <p:nvPr/>
-          </p:nvSpPr>
-          <p:spPr>
-            <a:xfrm>
-              <a:off x="1173960" y="4356000"/>
-              <a:ext cx="179640" cy="179640"/>
-            </a:xfrm>
-            <a:prstGeom prst="ellipse">
-              <a:avLst/>
-            </a:prstGeom>
-            <a:solidFill>
-              <a:srgbClr val="F2CDC4"/>
-            </a:solidFill>
-            <a:ln w="19800">
-              <a:solidFill>
-                <a:srgbClr val="FF4000"/>
-              </a:solidFill>
-              <a:round/>
-            </a:ln>
-          </p:spPr>
-          <p:style>
-            <a:lnRef idx="0"/>
-            <a:fillRef idx="0"/>
-            <a:effectRef idx="0"/>
-            <a:fontRef idx="minor"/>
-          </p:style>
-          <p:txBody>
-            <a:bodyPr wrap="none" lIns="90000" tIns="45000" rIns="90000" bIns="45000" anchor="t">
-              <a:noAutofit/>
-            </a:bodyPr>
-            <a:p>
-              <a:endParaRPr lang="en-US" sz="1800" b="0" u="none" strike="noStrike">
-                <a:solidFill>
-                  <a:srgbClr val="000000"/>
-                </a:solidFill>
-                <a:effectLst/>
-                <a:uFillTx/>
-                <a:latin typeface="Times New Roman"/>
-              </a:endParaRPr>
-            </a:p>
-          </p:txBody>
-        </p:sp>
-        <p:sp>
-          <p:nvSpPr>
-            <p:cNvPr id="67" name=""/>
-            <p:cNvSpPr/>
-            <p:nvPr/>
-          </p:nvSpPr>
-          <p:spPr>
-            <a:xfrm>
-              <a:off x="360000" y="4572000"/>
-              <a:ext cx="179640" cy="179640"/>
-            </a:xfrm>
-            <a:prstGeom prst="ellipse">
-              <a:avLst/>
-            </a:prstGeom>
-            <a:solidFill>
-              <a:srgbClr val="C7CED6"/>
-            </a:solidFill>
-            <a:ln w="18000">
-              <a:solidFill>
-                <a:srgbClr val="2A6099"/>
-              </a:solidFill>
-              <a:round/>
-            </a:ln>
-          </p:spPr>
-          <p:style>
-            <a:lnRef idx="0"/>
-            <a:fillRef idx="0"/>
-            <a:effectRef idx="0"/>
-            <a:fontRef idx="minor"/>
-          </p:style>
-          <p:txBody>
-            <a:bodyPr wrap="none" lIns="90000" tIns="45000" rIns="90000" bIns="45000" anchor="t">
-              <a:noAutofit/>
-            </a:bodyPr>
-            <a:p>
-              <a:endParaRPr lang="en-US" sz="1800" b="0" u="none" strike="noStrike">
-                <a:solidFill>
-                  <a:srgbClr val="000000"/>
-                </a:solidFill>
-                <a:effectLst/>
-                <a:uFillTx/>
-                <a:latin typeface="Times New Roman"/>
-              </a:endParaRPr>
-            </a:p>
-          </p:txBody>
-        </p:sp>
-        <p:sp>
-          <p:nvSpPr>
-            <p:cNvPr id="68" name=""/>
-            <p:cNvSpPr/>
-            <p:nvPr/>
-          </p:nvSpPr>
-          <p:spPr>
-            <a:xfrm>
-              <a:off x="1260000" y="4572000"/>
-              <a:ext cx="179640" cy="179640"/>
-            </a:xfrm>
-            <a:prstGeom prst="ellipse">
-              <a:avLst/>
-            </a:prstGeom>
-            <a:solidFill>
-              <a:srgbClr val="E6C2B9"/>
-            </a:solidFill>
-            <a:ln w="18000">
-              <a:solidFill>
-                <a:srgbClr val="FF4000"/>
-              </a:solidFill>
-              <a:round/>
-            </a:ln>
-          </p:spPr>
-          <p:style>
-            <a:lnRef idx="0"/>
-            <a:fillRef idx="0"/>
-            <a:effectRef idx="0"/>
-            <a:fontRef idx="minor"/>
-          </p:style>
-          <p:txBody>
-            <a:bodyPr wrap="none" lIns="90000" tIns="45000" rIns="90000" bIns="45000" anchor="t">
-              <a:noAutofit/>
-            </a:bodyPr>
-            <a:p>
-              <a:endParaRPr lang="en-US" sz="1800" b="0" u="none" strike="noStrike">
-                <a:solidFill>
-                  <a:srgbClr val="000000"/>
-                </a:solidFill>
-                <a:effectLst/>
-                <a:uFillTx/>
-                <a:latin typeface="Times New Roman"/>
-              </a:endParaRPr>
-            </a:p>
-          </p:txBody>
-        </p:sp>
-        <p:sp>
-          <p:nvSpPr>
-            <p:cNvPr id="70" name=""/>
-            <p:cNvSpPr/>
-            <p:nvPr/>
-          </p:nvSpPr>
-          <p:spPr>
-            <a:xfrm>
-              <a:off x="446040" y="4788000"/>
-              <a:ext cx="179640" cy="179640"/>
-            </a:xfrm>
-            <a:prstGeom prst="ellipse">
-              <a:avLst/>
-            </a:prstGeom>
-            <a:solidFill>
-              <a:srgbClr val="D3DAE3"/>
-            </a:solidFill>
-            <a:ln w="19800">
-              <a:solidFill>
-                <a:srgbClr val="2A6099"/>
-              </a:solidFill>
-              <a:round/>
-            </a:ln>
-          </p:spPr>
-          <p:style>
-            <a:lnRef idx="0"/>
-            <a:fillRef idx="0"/>
-            <a:effectRef idx="0"/>
-            <a:fontRef idx="minor"/>
-          </p:style>
-          <p:txBody>
-            <a:bodyPr wrap="none" lIns="90000" tIns="45000" rIns="90000" bIns="45000" anchor="t">
-              <a:noAutofit/>
-            </a:bodyPr>
-            <a:p>
-              <a:endParaRPr lang="en-US" sz="1800" b="0" u="none" strike="noStrike">
-                <a:solidFill>
-                  <a:srgbClr val="000000"/>
-                </a:solidFill>
-                <a:effectLst/>
-                <a:uFillTx/>
-                <a:latin typeface="Times New Roman"/>
-              </a:endParaRPr>
-            </a:p>
-          </p:txBody>
-        </p:sp>
-        <p:sp>
-          <p:nvSpPr>
-            <p:cNvPr id="71" name=""/>
-            <p:cNvSpPr/>
-            <p:nvPr/>
-          </p:nvSpPr>
-          <p:spPr>
-            <a:xfrm>
-              <a:off x="1173960" y="4788000"/>
-              <a:ext cx="179640" cy="179640"/>
-            </a:xfrm>
-            <a:prstGeom prst="ellipse">
-              <a:avLst/>
-            </a:prstGeom>
-            <a:solidFill>
-              <a:srgbClr val="D9B8AF"/>
-            </a:solidFill>
-            <a:ln w="16200">
-              <a:solidFill>
-                <a:srgbClr val="FF4000"/>
-              </a:solidFill>
-              <a:round/>
-            </a:ln>
-          </p:spPr>
-          <p:style>
-            <a:lnRef idx="0"/>
-            <a:fillRef idx="0"/>
-            <a:effectRef idx="0"/>
-            <a:fontRef idx="minor"/>
-          </p:style>
-          <p:txBody>
-            <a:bodyPr wrap="none" lIns="89280" tIns="44280" rIns="89280" bIns="44280" anchor="t">
-              <a:noAutofit/>
-            </a:bodyPr>
-            <a:p>
-              <a:endParaRPr lang="en-US" sz="1800" b="0" u="none" strike="noStrike">
-                <a:solidFill>
-                  <a:srgbClr val="000000"/>
-                </a:solidFill>
-                <a:effectLst/>
-                <a:uFillTx/>
-                <a:latin typeface="Times New Roman"/>
-              </a:endParaRPr>
-            </a:p>
-          </p:txBody>
-        </p:sp>
-        <p:sp>
-          <p:nvSpPr>
-            <p:cNvPr id="73" name=""/>
-            <p:cNvSpPr/>
-            <p:nvPr/>
-          </p:nvSpPr>
-          <p:spPr>
-            <a:xfrm>
-              <a:off x="671040" y="5004000"/>
-              <a:ext cx="179640" cy="179640"/>
-            </a:xfrm>
-            <a:prstGeom prst="ellipse">
-              <a:avLst/>
-            </a:prstGeom>
-            <a:solidFill>
-              <a:srgbClr val="DEE6EF"/>
-            </a:solidFill>
-            <a:ln w="21600">
-              <a:solidFill>
-                <a:srgbClr val="2A6099"/>
-              </a:solidFill>
-              <a:round/>
-            </a:ln>
-          </p:spPr>
-          <p:style>
-            <a:lnRef idx="0"/>
-            <a:fillRef idx="0"/>
-            <a:effectRef idx="0"/>
-            <a:fontRef idx="minor"/>
-          </p:style>
-          <p:txBody>
-            <a:bodyPr wrap="none" lIns="90000" tIns="46800" rIns="90000" bIns="46800" anchor="t">
-              <a:noAutofit/>
-            </a:bodyPr>
-            <a:p>
-              <a:endParaRPr lang="en-US" sz="1800" b="0" u="none" strike="noStrike">
-                <a:solidFill>
-                  <a:srgbClr val="000000"/>
-                </a:solidFill>
-                <a:effectLst/>
-                <a:uFillTx/>
-                <a:latin typeface="Times New Roman"/>
-              </a:endParaRPr>
-            </a:p>
-          </p:txBody>
-        </p:sp>
-        <p:sp>
-          <p:nvSpPr>
-            <p:cNvPr id="74" name=""/>
-            <p:cNvSpPr/>
-            <p:nvPr/>
-          </p:nvSpPr>
-          <p:spPr>
-            <a:xfrm>
-              <a:off x="948960" y="5004000"/>
-              <a:ext cx="179640" cy="179640"/>
-            </a:xfrm>
-            <a:prstGeom prst="ellipse">
-              <a:avLst/>
-            </a:prstGeom>
-            <a:solidFill>
-              <a:srgbClr val="CCADA5"/>
-            </a:solidFill>
-            <a:ln w="14400">
-              <a:solidFill>
-                <a:srgbClr val="FF4000"/>
-              </a:solidFill>
-              <a:round/>
-            </a:ln>
-          </p:spPr>
-          <p:style>
-            <a:lnRef idx="0"/>
-            <a:fillRef idx="0"/>
-            <a:effectRef idx="0"/>
-            <a:fontRef idx="minor"/>
-          </p:style>
-          <p:txBody>
-            <a:bodyPr wrap="none" lIns="88200" tIns="43200" rIns="88200" bIns="43200" anchor="t">
-              <a:noAutofit/>
-            </a:bodyPr>
-            <a:p>
-              <a:endParaRPr lang="en-US" sz="1800" b="0" u="none" strike="noStrike">
-                <a:solidFill>
-                  <a:srgbClr val="000000"/>
-                </a:solidFill>
-                <a:effectLst/>
-                <a:uFillTx/>
-                <a:latin typeface="Times New Roman"/>
-              </a:endParaRPr>
-            </a:p>
-          </p:txBody>
-        </p:sp>
-        <p:sp>
-          <p:nvSpPr>
-            <p:cNvPr id="77" name=""/>
-            <p:cNvSpPr/>
-            <p:nvPr/>
-          </p:nvSpPr>
-          <p:spPr>
-            <a:xfrm>
-              <a:off x="948960" y="5220000"/>
-              <a:ext cx="179640" cy="179640"/>
-            </a:xfrm>
-            <a:prstGeom prst="ellipse">
-              <a:avLst/>
-            </a:prstGeom>
-            <a:solidFill>
-              <a:srgbClr val="DEE6EF"/>
-            </a:solidFill>
-            <a:ln w="21600">
-              <a:solidFill>
-                <a:srgbClr val="2A6099"/>
-              </a:solidFill>
-              <a:round/>
-            </a:ln>
-          </p:spPr>
-          <p:style>
-            <a:lnRef idx="0"/>
-            <a:fillRef idx="0"/>
-            <a:effectRef idx="0"/>
-            <a:fontRef idx="minor"/>
-          </p:style>
-          <p:txBody>
-            <a:bodyPr wrap="none" lIns="90000" tIns="46800" rIns="90000" bIns="46800" anchor="t">
-              <a:noAutofit/>
-            </a:bodyPr>
-            <a:p>
-              <a:endParaRPr lang="en-US" sz="1800" b="0" u="none" strike="noStrike">
-                <a:solidFill>
-                  <a:srgbClr val="000000"/>
-                </a:solidFill>
-                <a:effectLst/>
-                <a:uFillTx/>
-                <a:latin typeface="Times New Roman"/>
-              </a:endParaRPr>
-            </a:p>
-          </p:txBody>
-        </p:sp>
-        <p:sp>
-          <p:nvSpPr>
-            <p:cNvPr id="76" name=""/>
-            <p:cNvSpPr/>
-            <p:nvPr/>
-          </p:nvSpPr>
-          <p:spPr>
-            <a:xfrm>
-              <a:off x="671040" y="5220000"/>
-              <a:ext cx="179640" cy="179640"/>
-            </a:xfrm>
-            <a:prstGeom prst="ellipse">
-              <a:avLst/>
-            </a:prstGeom>
-            <a:solidFill>
-              <a:srgbClr val="CCADA5"/>
-            </a:solidFill>
-            <a:ln w="14400">
-              <a:solidFill>
-                <a:srgbClr val="FF4000"/>
-              </a:solidFill>
-              <a:round/>
-            </a:ln>
-          </p:spPr>
-          <p:style>
-            <a:lnRef idx="0"/>
-            <a:fillRef idx="0"/>
-            <a:effectRef idx="0"/>
-            <a:fontRef idx="minor"/>
-          </p:style>
-          <p:txBody>
-            <a:bodyPr wrap="none" lIns="88200" tIns="43200" rIns="88200" bIns="43200" anchor="t">
-              <a:noAutofit/>
-            </a:bodyPr>
-            <a:p>
-              <a:endParaRPr lang="en-US" sz="1800" b="0" u="none" strike="noStrike">
-                <a:solidFill>
-                  <a:srgbClr val="000000"/>
-                </a:solidFill>
-                <a:effectLst/>
-                <a:uFillTx/>
-                <a:latin typeface="Times New Roman"/>
-              </a:endParaRPr>
-            </a:p>
-          </p:txBody>
-        </p:sp>
-        <p:sp>
-          <p:nvSpPr>
-            <p:cNvPr id="79" name=""/>
-            <p:cNvSpPr/>
-            <p:nvPr/>
-          </p:nvSpPr>
-          <p:spPr>
-            <a:xfrm flipH="1">
-              <a:off x="1172520" y="5436000"/>
-              <a:ext cx="179640" cy="179640"/>
-            </a:xfrm>
-            <a:prstGeom prst="ellipse">
-              <a:avLst/>
-            </a:prstGeom>
-            <a:solidFill>
-              <a:srgbClr val="D3DAE3"/>
-            </a:solidFill>
-            <a:ln w="19800">
-              <a:solidFill>
-                <a:srgbClr val="2A6099"/>
-              </a:solidFill>
-              <a:round/>
-            </a:ln>
-          </p:spPr>
-          <p:style>
-            <a:lnRef idx="0"/>
-            <a:fillRef idx="0"/>
-            <a:effectRef idx="0"/>
-            <a:fontRef idx="minor"/>
-          </p:style>
-          <p:txBody>
-            <a:bodyPr wrap="none" lIns="90000" tIns="45000" rIns="90000" bIns="45000" anchor="t">
-              <a:noAutofit/>
-            </a:bodyPr>
-            <a:p>
-              <a:endParaRPr lang="en-US" sz="1800" b="0" u="none" strike="noStrike">
-                <a:solidFill>
-                  <a:srgbClr val="000000"/>
-                </a:solidFill>
-                <a:effectLst/>
-                <a:uFillTx/>
-                <a:latin typeface="Times New Roman"/>
-              </a:endParaRPr>
-            </a:p>
-          </p:txBody>
-        </p:sp>
-        <p:sp>
-          <p:nvSpPr>
-            <p:cNvPr id="80" name=""/>
-            <p:cNvSpPr/>
-            <p:nvPr/>
-          </p:nvSpPr>
-          <p:spPr>
-            <a:xfrm flipH="1">
-              <a:off x="444600" y="5436000"/>
-              <a:ext cx="179640" cy="179640"/>
-            </a:xfrm>
-            <a:prstGeom prst="ellipse">
-              <a:avLst/>
-            </a:prstGeom>
-            <a:solidFill>
-              <a:srgbClr val="D9B8AF"/>
-            </a:solidFill>
-            <a:ln w="16200">
-              <a:solidFill>
-                <a:srgbClr val="FF4000"/>
-              </a:solidFill>
-              <a:round/>
-            </a:ln>
-          </p:spPr>
-          <p:style>
-            <a:lnRef idx="0"/>
-            <a:fillRef idx="0"/>
-            <a:effectRef idx="0"/>
-            <a:fontRef idx="minor"/>
-          </p:style>
-          <p:txBody>
-            <a:bodyPr wrap="none" lIns="89280" tIns="44280" rIns="89280" bIns="44280" anchor="t">
-              <a:noAutofit/>
-            </a:bodyPr>
-            <a:p>
-              <a:endParaRPr lang="en-US" sz="1800" b="0" u="none" strike="noStrike">
-                <a:solidFill>
-                  <a:srgbClr val="000000"/>
-                </a:solidFill>
-                <a:effectLst/>
-                <a:uFillTx/>
-                <a:latin typeface="Times New Roman"/>
-              </a:endParaRPr>
-            </a:p>
-          </p:txBody>
-        </p:sp>
-        <p:sp>
-          <p:nvSpPr>
-            <p:cNvPr id="82" name=""/>
-            <p:cNvSpPr/>
-            <p:nvPr/>
-          </p:nvSpPr>
-          <p:spPr>
-            <a:xfrm flipH="1">
-              <a:off x="1258560" y="5652000"/>
-              <a:ext cx="179640" cy="179640"/>
-            </a:xfrm>
-            <a:prstGeom prst="ellipse">
-              <a:avLst/>
-            </a:prstGeom>
-            <a:solidFill>
-              <a:srgbClr val="C7CED6"/>
-            </a:solidFill>
-            <a:ln w="18000">
-              <a:solidFill>
-                <a:srgbClr val="2A6099"/>
-              </a:solidFill>
-              <a:round/>
-            </a:ln>
-          </p:spPr>
-          <p:style>
-            <a:lnRef idx="0"/>
-            <a:fillRef idx="0"/>
-            <a:effectRef idx="0"/>
-            <a:fontRef idx="minor"/>
-          </p:style>
-          <p:txBody>
-            <a:bodyPr wrap="none" lIns="90000" tIns="45000" rIns="90000" bIns="45000" anchor="t">
-              <a:noAutofit/>
-            </a:bodyPr>
-            <a:p>
-              <a:endParaRPr lang="en-US" sz="1800" b="0" u="none" strike="noStrike">
-                <a:solidFill>
-                  <a:srgbClr val="000000"/>
-                </a:solidFill>
-                <a:effectLst/>
-                <a:uFillTx/>
-                <a:latin typeface="Times New Roman"/>
-              </a:endParaRPr>
-            </a:p>
-          </p:txBody>
-        </p:sp>
-        <p:sp>
-          <p:nvSpPr>
-            <p:cNvPr id="83" name=""/>
-            <p:cNvSpPr/>
-            <p:nvPr/>
-          </p:nvSpPr>
-          <p:spPr>
-            <a:xfrm flipH="1">
-              <a:off x="358560" y="5652000"/>
-              <a:ext cx="179640" cy="179640"/>
-            </a:xfrm>
-            <a:prstGeom prst="ellipse">
-              <a:avLst/>
-            </a:prstGeom>
-            <a:solidFill>
-              <a:srgbClr val="E6C2B9"/>
-            </a:solidFill>
-            <a:ln w="18000">
-              <a:solidFill>
-                <a:srgbClr val="FF4000"/>
-              </a:solidFill>
-              <a:round/>
-            </a:ln>
-          </p:spPr>
-          <p:style>
-            <a:lnRef idx="0"/>
-            <a:fillRef idx="0"/>
-            <a:effectRef idx="0"/>
-            <a:fontRef idx="minor"/>
-          </p:style>
-          <p:txBody>
-            <a:bodyPr wrap="none" lIns="90000" tIns="45000" rIns="90000" bIns="45000" anchor="t">
-              <a:noAutofit/>
-            </a:bodyPr>
-            <a:p>
-              <a:endParaRPr lang="en-US" sz="1800" b="0" u="none" strike="noStrike">
-                <a:solidFill>
-                  <a:srgbClr val="000000"/>
-                </a:solidFill>
-                <a:effectLst/>
-                <a:uFillTx/>
-                <a:latin typeface="Times New Roman"/>
-              </a:endParaRPr>
-            </a:p>
-          </p:txBody>
-        </p:sp>
-      </p:grpSp>
+            <a:round/>
+          </a:ln>
+        </p:spPr>
+      </p:cxnSp>
       <p:sp>
         <p:nvSpPr>
-          <p:cNvPr id="84" name="PlaceHolder 1"/>
+          <p:cNvPr id="80" name=""/>
+          <p:cNvSpPr/>
+          <p:nvPr/>
+        </p:nvSpPr>
+        <p:spPr>
+          <a:xfrm>
+            <a:off x="446040" y="36000"/>
+            <a:ext cx="179280" cy="179280"/>
+          </a:xfrm>
+          <a:prstGeom prst="ellipse">
+            <a:avLst/>
+          </a:prstGeom>
+          <a:solidFill>
+            <a:srgbClr val="BCC2C9"/>
+          </a:solidFill>
+          <a:ln w="16200">
+            <a:solidFill>
+              <a:srgbClr val="2A6099"/>
+            </a:solidFill>
+            <a:round/>
+          </a:ln>
+        </p:spPr>
+        <p:style>
+          <a:lnRef idx="0"/>
+          <a:fillRef idx="0"/>
+          <a:effectRef idx="0"/>
+          <a:fontRef idx="minor"/>
+        </p:style>
+        <p:txBody>
+          <a:bodyPr wrap="none" lIns="89280" tIns="44280" rIns="89280" bIns="44280" anchor="t">
+            <a:noAutofit/>
+          </a:bodyPr>
+          <a:p>
+            <a:endParaRPr lang="en-US" sz="1800" b="0" u="none" strike="noStrike">
+              <a:solidFill>
+                <a:srgbClr val="000000"/>
+              </a:solidFill>
+              <a:effectLst/>
+              <a:uFillTx/>
+              <a:latin typeface="Times New Roman"/>
+            </a:endParaRPr>
+          </a:p>
+        </p:txBody>
+      </p:sp>
+      <p:sp>
+        <p:nvSpPr>
+          <p:cNvPr id="81" name=""/>
+          <p:cNvSpPr/>
+          <p:nvPr/>
+        </p:nvSpPr>
+        <p:spPr>
+          <a:xfrm>
+            <a:off x="1173960" y="36000"/>
+            <a:ext cx="179280" cy="179280"/>
+          </a:xfrm>
+          <a:prstGeom prst="ellipse">
+            <a:avLst/>
+          </a:prstGeom>
+          <a:solidFill>
+            <a:srgbClr val="F2CDC4"/>
+          </a:solidFill>
+          <a:ln w="19800">
+            <a:solidFill>
+              <a:srgbClr val="FF4000"/>
+            </a:solidFill>
+            <a:round/>
+          </a:ln>
+        </p:spPr>
+        <p:style>
+          <a:lnRef idx="0"/>
+          <a:fillRef idx="0"/>
+          <a:effectRef idx="0"/>
+          <a:fontRef idx="minor"/>
+        </p:style>
+        <p:txBody>
+          <a:bodyPr wrap="none" lIns="89640" tIns="45000" rIns="89640" bIns="45000" anchor="t">
+            <a:noAutofit/>
+          </a:bodyPr>
+          <a:p>
+            <a:endParaRPr lang="en-US" sz="1800" b="0" u="none" strike="noStrike">
+              <a:solidFill>
+                <a:srgbClr val="000000"/>
+              </a:solidFill>
+              <a:effectLst/>
+              <a:uFillTx/>
+              <a:latin typeface="Times New Roman"/>
+            </a:endParaRPr>
+          </a:p>
+        </p:txBody>
+      </p:sp>
+      <p:sp>
+        <p:nvSpPr>
+          <p:cNvPr id="3" name=""/>
+          <p:cNvSpPr/>
+          <p:nvPr/>
+        </p:nvSpPr>
+        <p:spPr>
+          <a:xfrm>
+            <a:off x="360000" y="252000"/>
+            <a:ext cx="179280" cy="179280"/>
+          </a:xfrm>
+          <a:prstGeom prst="ellipse">
+            <a:avLst/>
+          </a:prstGeom>
+          <a:solidFill>
+            <a:srgbClr val="C7CED6"/>
+          </a:solidFill>
+          <a:ln w="18000">
+            <a:solidFill>
+              <a:srgbClr val="2A6099"/>
+            </a:solidFill>
+            <a:round/>
+          </a:ln>
+        </p:spPr>
+        <p:style>
+          <a:lnRef idx="0"/>
+          <a:fillRef idx="0"/>
+          <a:effectRef idx="0"/>
+          <a:fontRef idx="minor"/>
+        </p:style>
+        <p:txBody>
+          <a:bodyPr wrap="none" lIns="89640" tIns="45000" rIns="89640" bIns="45000" anchor="t">
+            <a:noAutofit/>
+          </a:bodyPr>
+          <a:p>
+            <a:endParaRPr lang="en-US" sz="1800" b="0" u="none" strike="noStrike">
+              <a:solidFill>
+                <a:srgbClr val="000000"/>
+              </a:solidFill>
+              <a:effectLst/>
+              <a:uFillTx/>
+              <a:latin typeface="Times New Roman"/>
+            </a:endParaRPr>
+          </a:p>
+        </p:txBody>
+      </p:sp>
+      <p:sp>
+        <p:nvSpPr>
+          <p:cNvPr id="4" name=""/>
+          <p:cNvSpPr/>
+          <p:nvPr/>
+        </p:nvSpPr>
+        <p:spPr>
+          <a:xfrm>
+            <a:off x="1260000" y="252000"/>
+            <a:ext cx="179280" cy="179280"/>
+          </a:xfrm>
+          <a:prstGeom prst="ellipse">
+            <a:avLst/>
+          </a:prstGeom>
+          <a:solidFill>
+            <a:srgbClr val="E6C2B9"/>
+          </a:solidFill>
+          <a:ln w="18000">
+            <a:solidFill>
+              <a:srgbClr val="FF4000"/>
+            </a:solidFill>
+            <a:round/>
+          </a:ln>
+        </p:spPr>
+        <p:style>
+          <a:lnRef idx="0"/>
+          <a:fillRef idx="0"/>
+          <a:effectRef idx="0"/>
+          <a:fontRef idx="minor"/>
+        </p:style>
+        <p:txBody>
+          <a:bodyPr wrap="none" lIns="89640" tIns="45000" rIns="89640" bIns="45000" anchor="t">
+            <a:noAutofit/>
+          </a:bodyPr>
+          <a:p>
+            <a:endParaRPr lang="en-US" sz="1800" b="0" u="none" strike="noStrike">
+              <a:solidFill>
+                <a:srgbClr val="000000"/>
+              </a:solidFill>
+              <a:effectLst/>
+              <a:uFillTx/>
+              <a:latin typeface="Times New Roman"/>
+            </a:endParaRPr>
+          </a:p>
+        </p:txBody>
+      </p:sp>
+      <p:sp>
+        <p:nvSpPr>
+          <p:cNvPr id="6" name=""/>
+          <p:cNvSpPr/>
+          <p:nvPr/>
+        </p:nvSpPr>
+        <p:spPr>
+          <a:xfrm>
+            <a:off x="446040" y="468000"/>
+            <a:ext cx="179280" cy="179280"/>
+          </a:xfrm>
+          <a:prstGeom prst="ellipse">
+            <a:avLst/>
+          </a:prstGeom>
+          <a:solidFill>
+            <a:srgbClr val="D3DAE3"/>
+          </a:solidFill>
+          <a:ln w="19800">
+            <a:solidFill>
+              <a:srgbClr val="2A6099"/>
+            </a:solidFill>
+            <a:round/>
+          </a:ln>
+        </p:spPr>
+        <p:style>
+          <a:lnRef idx="0"/>
+          <a:fillRef idx="0"/>
+          <a:effectRef idx="0"/>
+          <a:fontRef idx="minor"/>
+        </p:style>
+        <p:txBody>
+          <a:bodyPr wrap="none" lIns="89640" tIns="45000" rIns="89640" bIns="45000" anchor="t">
+            <a:noAutofit/>
+          </a:bodyPr>
+          <a:p>
+            <a:endParaRPr lang="en-US" sz="1800" b="0" u="none" strike="noStrike">
+              <a:solidFill>
+                <a:srgbClr val="000000"/>
+              </a:solidFill>
+              <a:effectLst/>
+              <a:uFillTx/>
+              <a:latin typeface="Times New Roman"/>
+            </a:endParaRPr>
+          </a:p>
+        </p:txBody>
+      </p:sp>
+      <p:sp>
+        <p:nvSpPr>
+          <p:cNvPr id="7" name=""/>
+          <p:cNvSpPr/>
+          <p:nvPr/>
+        </p:nvSpPr>
+        <p:spPr>
+          <a:xfrm>
+            <a:off x="1173960" y="468000"/>
+            <a:ext cx="179280" cy="179280"/>
+          </a:xfrm>
+          <a:prstGeom prst="ellipse">
+            <a:avLst/>
+          </a:prstGeom>
+          <a:solidFill>
+            <a:srgbClr val="D9B8AF"/>
+          </a:solidFill>
+          <a:ln w="16200">
+            <a:solidFill>
+              <a:srgbClr val="FF4000"/>
+            </a:solidFill>
+            <a:round/>
+          </a:ln>
+        </p:spPr>
+        <p:style>
+          <a:lnRef idx="0"/>
+          <a:fillRef idx="0"/>
+          <a:effectRef idx="0"/>
+          <a:fontRef idx="minor"/>
+        </p:style>
+        <p:txBody>
+          <a:bodyPr wrap="none" lIns="89280" tIns="44280" rIns="89280" bIns="44280" anchor="t">
+            <a:noAutofit/>
+          </a:bodyPr>
+          <a:p>
+            <a:endParaRPr lang="en-US" sz="1800" b="0" u="none" strike="noStrike">
+              <a:solidFill>
+                <a:srgbClr val="000000"/>
+              </a:solidFill>
+              <a:effectLst/>
+              <a:uFillTx/>
+              <a:latin typeface="Times New Roman"/>
+            </a:endParaRPr>
+          </a:p>
+        </p:txBody>
+      </p:sp>
+      <p:sp>
+        <p:nvSpPr>
+          <p:cNvPr id="9" name=""/>
+          <p:cNvSpPr/>
+          <p:nvPr/>
+        </p:nvSpPr>
+        <p:spPr>
+          <a:xfrm>
+            <a:off x="671040" y="684000"/>
+            <a:ext cx="179280" cy="179280"/>
+          </a:xfrm>
+          <a:prstGeom prst="ellipse">
+            <a:avLst/>
+          </a:prstGeom>
+          <a:solidFill>
+            <a:srgbClr val="DEE6EF"/>
+          </a:solidFill>
+          <a:ln w="21600">
+            <a:solidFill>
+              <a:srgbClr val="2A6099"/>
+            </a:solidFill>
+            <a:round/>
+          </a:ln>
+        </p:spPr>
+        <p:style>
+          <a:lnRef idx="0"/>
+          <a:fillRef idx="0"/>
+          <a:effectRef idx="0"/>
+          <a:fontRef idx="minor"/>
+        </p:style>
+        <p:txBody>
+          <a:bodyPr wrap="none" lIns="89640" tIns="46800" rIns="89640" bIns="46800" anchor="t">
+            <a:noAutofit/>
+          </a:bodyPr>
+          <a:p>
+            <a:endParaRPr lang="en-US" sz="1800" b="0" u="none" strike="noStrike">
+              <a:solidFill>
+                <a:srgbClr val="000000"/>
+              </a:solidFill>
+              <a:effectLst/>
+              <a:uFillTx/>
+              <a:latin typeface="Times New Roman"/>
+            </a:endParaRPr>
+          </a:p>
+        </p:txBody>
+      </p:sp>
+      <p:sp>
+        <p:nvSpPr>
+          <p:cNvPr id="10" name=""/>
+          <p:cNvSpPr/>
+          <p:nvPr/>
+        </p:nvSpPr>
+        <p:spPr>
+          <a:xfrm>
+            <a:off x="948960" y="684000"/>
+            <a:ext cx="179280" cy="179280"/>
+          </a:xfrm>
+          <a:prstGeom prst="ellipse">
+            <a:avLst/>
+          </a:prstGeom>
+          <a:solidFill>
+            <a:srgbClr val="CCADA5"/>
+          </a:solidFill>
+          <a:ln w="14400">
+            <a:solidFill>
+              <a:srgbClr val="FF4000"/>
+            </a:solidFill>
+            <a:round/>
+          </a:ln>
+        </p:spPr>
+        <p:style>
+          <a:lnRef idx="0"/>
+          <a:fillRef idx="0"/>
+          <a:effectRef idx="0"/>
+          <a:fontRef idx="minor"/>
+        </p:style>
+        <p:txBody>
+          <a:bodyPr wrap="none" lIns="88200" tIns="43200" rIns="88200" bIns="43200" anchor="t">
+            <a:noAutofit/>
+          </a:bodyPr>
+          <a:p>
+            <a:endParaRPr lang="en-US" sz="1800" b="0" u="none" strike="noStrike">
+              <a:solidFill>
+                <a:srgbClr val="000000"/>
+              </a:solidFill>
+              <a:effectLst/>
+              <a:uFillTx/>
+              <a:latin typeface="Times New Roman"/>
+            </a:endParaRPr>
+          </a:p>
+        </p:txBody>
+      </p:sp>
+      <p:sp>
+        <p:nvSpPr>
+          <p:cNvPr id="13" name=""/>
+          <p:cNvSpPr/>
+          <p:nvPr/>
+        </p:nvSpPr>
+        <p:spPr>
+          <a:xfrm>
+            <a:off x="948960" y="900000"/>
+            <a:ext cx="179280" cy="179280"/>
+          </a:xfrm>
+          <a:prstGeom prst="ellipse">
+            <a:avLst/>
+          </a:prstGeom>
+          <a:solidFill>
+            <a:srgbClr val="DEE6EF"/>
+          </a:solidFill>
+          <a:ln w="21600">
+            <a:solidFill>
+              <a:srgbClr val="2A6099"/>
+            </a:solidFill>
+            <a:round/>
+          </a:ln>
+        </p:spPr>
+        <p:style>
+          <a:lnRef idx="0"/>
+          <a:fillRef idx="0"/>
+          <a:effectRef idx="0"/>
+          <a:fontRef idx="minor"/>
+        </p:style>
+        <p:txBody>
+          <a:bodyPr wrap="none" lIns="89640" tIns="46800" rIns="89640" bIns="46800" anchor="t">
+            <a:noAutofit/>
+          </a:bodyPr>
+          <a:p>
+            <a:endParaRPr lang="en-US" sz="1800" b="0" u="none" strike="noStrike">
+              <a:solidFill>
+                <a:srgbClr val="000000"/>
+              </a:solidFill>
+              <a:effectLst/>
+              <a:uFillTx/>
+              <a:latin typeface="Times New Roman"/>
+            </a:endParaRPr>
+          </a:p>
+        </p:txBody>
+      </p:sp>
+      <p:sp>
+        <p:nvSpPr>
+          <p:cNvPr id="12" name=""/>
+          <p:cNvSpPr/>
+          <p:nvPr/>
+        </p:nvSpPr>
+        <p:spPr>
+          <a:xfrm>
+            <a:off x="671040" y="900000"/>
+            <a:ext cx="179280" cy="179280"/>
+          </a:xfrm>
+          <a:prstGeom prst="ellipse">
+            <a:avLst/>
+          </a:prstGeom>
+          <a:solidFill>
+            <a:srgbClr val="CCADA5"/>
+          </a:solidFill>
+          <a:ln w="14400">
+            <a:solidFill>
+              <a:srgbClr val="FF4000"/>
+            </a:solidFill>
+            <a:round/>
+          </a:ln>
+        </p:spPr>
+        <p:style>
+          <a:lnRef idx="0"/>
+          <a:fillRef idx="0"/>
+          <a:effectRef idx="0"/>
+          <a:fontRef idx="minor"/>
+        </p:style>
+        <p:txBody>
+          <a:bodyPr wrap="none" lIns="88200" tIns="43200" rIns="88200" bIns="43200" anchor="t">
+            <a:noAutofit/>
+          </a:bodyPr>
+          <a:p>
+            <a:endParaRPr lang="en-US" sz="1800" b="0" u="none" strike="noStrike">
+              <a:solidFill>
+                <a:srgbClr val="000000"/>
+              </a:solidFill>
+              <a:effectLst/>
+              <a:uFillTx/>
+              <a:latin typeface="Times New Roman"/>
+            </a:endParaRPr>
+          </a:p>
+        </p:txBody>
+      </p:sp>
+      <p:sp>
+        <p:nvSpPr>
+          <p:cNvPr id="15" name=""/>
+          <p:cNvSpPr/>
+          <p:nvPr/>
+        </p:nvSpPr>
+        <p:spPr>
+          <a:xfrm flipH="1">
+            <a:off x="1172520" y="1116000"/>
+            <a:ext cx="179280" cy="179280"/>
+          </a:xfrm>
+          <a:prstGeom prst="ellipse">
+            <a:avLst/>
+          </a:prstGeom>
+          <a:solidFill>
+            <a:srgbClr val="D3DAE3"/>
+          </a:solidFill>
+          <a:ln w="19800">
+            <a:solidFill>
+              <a:srgbClr val="2A6099"/>
+            </a:solidFill>
+            <a:round/>
+          </a:ln>
+        </p:spPr>
+        <p:style>
+          <a:lnRef idx="0"/>
+          <a:fillRef idx="0"/>
+          <a:effectRef idx="0"/>
+          <a:fontRef idx="minor"/>
+        </p:style>
+        <p:txBody>
+          <a:bodyPr wrap="none" lIns="89640" tIns="45000" rIns="89640" bIns="45000" anchor="t">
+            <a:noAutofit/>
+          </a:bodyPr>
+          <a:p>
+            <a:endParaRPr lang="en-US" sz="1800" b="0" u="none" strike="noStrike">
+              <a:solidFill>
+                <a:srgbClr val="000000"/>
+              </a:solidFill>
+              <a:effectLst/>
+              <a:uFillTx/>
+              <a:latin typeface="Times New Roman"/>
+            </a:endParaRPr>
+          </a:p>
+        </p:txBody>
+      </p:sp>
+      <p:sp>
+        <p:nvSpPr>
+          <p:cNvPr id="16" name=""/>
+          <p:cNvSpPr/>
+          <p:nvPr/>
+        </p:nvSpPr>
+        <p:spPr>
+          <a:xfrm flipH="1">
+            <a:off x="444600" y="1116000"/>
+            <a:ext cx="179280" cy="179280"/>
+          </a:xfrm>
+          <a:prstGeom prst="ellipse">
+            <a:avLst/>
+          </a:prstGeom>
+          <a:solidFill>
+            <a:srgbClr val="D9B8AF"/>
+          </a:solidFill>
+          <a:ln w="16200">
+            <a:solidFill>
+              <a:srgbClr val="FF4000"/>
+            </a:solidFill>
+            <a:round/>
+          </a:ln>
+        </p:spPr>
+        <p:style>
+          <a:lnRef idx="0"/>
+          <a:fillRef idx="0"/>
+          <a:effectRef idx="0"/>
+          <a:fontRef idx="minor"/>
+        </p:style>
+        <p:txBody>
+          <a:bodyPr wrap="none" lIns="89280" tIns="44280" rIns="89280" bIns="44280" anchor="t">
+            <a:noAutofit/>
+          </a:bodyPr>
+          <a:p>
+            <a:endParaRPr lang="en-US" sz="1800" b="0" u="none" strike="noStrike">
+              <a:solidFill>
+                <a:srgbClr val="000000"/>
+              </a:solidFill>
+              <a:effectLst/>
+              <a:uFillTx/>
+              <a:latin typeface="Times New Roman"/>
+            </a:endParaRPr>
+          </a:p>
+        </p:txBody>
+      </p:sp>
+      <p:sp>
+        <p:nvSpPr>
+          <p:cNvPr id="18" name=""/>
+          <p:cNvSpPr/>
+          <p:nvPr/>
+        </p:nvSpPr>
+        <p:spPr>
+          <a:xfrm flipH="1">
+            <a:off x="1258560" y="1332000"/>
+            <a:ext cx="179280" cy="179280"/>
+          </a:xfrm>
+          <a:prstGeom prst="ellipse">
+            <a:avLst/>
+          </a:prstGeom>
+          <a:solidFill>
+            <a:srgbClr val="C7CED6"/>
+          </a:solidFill>
+          <a:ln w="18000">
+            <a:solidFill>
+              <a:srgbClr val="2A6099"/>
+            </a:solidFill>
+            <a:round/>
+          </a:ln>
+        </p:spPr>
+        <p:style>
+          <a:lnRef idx="0"/>
+          <a:fillRef idx="0"/>
+          <a:effectRef idx="0"/>
+          <a:fontRef idx="minor"/>
+        </p:style>
+        <p:txBody>
+          <a:bodyPr wrap="none" lIns="89640" tIns="45000" rIns="89640" bIns="45000" anchor="t">
+            <a:noAutofit/>
+          </a:bodyPr>
+          <a:p>
+            <a:endParaRPr lang="en-US" sz="1800" b="0" u="none" strike="noStrike">
+              <a:solidFill>
+                <a:srgbClr val="000000"/>
+              </a:solidFill>
+              <a:effectLst/>
+              <a:uFillTx/>
+              <a:latin typeface="Times New Roman"/>
+            </a:endParaRPr>
+          </a:p>
+        </p:txBody>
+      </p:sp>
+      <p:sp>
+        <p:nvSpPr>
+          <p:cNvPr id="19" name=""/>
+          <p:cNvSpPr/>
+          <p:nvPr/>
+        </p:nvSpPr>
+        <p:spPr>
+          <a:xfrm flipH="1">
+            <a:off x="358560" y="1332000"/>
+            <a:ext cx="179280" cy="179280"/>
+          </a:xfrm>
+          <a:prstGeom prst="ellipse">
+            <a:avLst/>
+          </a:prstGeom>
+          <a:solidFill>
+            <a:srgbClr val="E6C2B9"/>
+          </a:solidFill>
+          <a:ln w="18000">
+            <a:solidFill>
+              <a:srgbClr val="FF4000"/>
+            </a:solidFill>
+            <a:round/>
+          </a:ln>
+        </p:spPr>
+        <p:style>
+          <a:lnRef idx="0"/>
+          <a:fillRef idx="0"/>
+          <a:effectRef idx="0"/>
+          <a:fontRef idx="minor"/>
+        </p:style>
+        <p:txBody>
+          <a:bodyPr wrap="none" lIns="89640" tIns="45000" rIns="89640" bIns="45000" anchor="t">
+            <a:noAutofit/>
+          </a:bodyPr>
+          <a:p>
+            <a:endParaRPr lang="en-US" sz="1800" b="0" u="none" strike="noStrike">
+              <a:solidFill>
+                <a:srgbClr val="000000"/>
+              </a:solidFill>
+              <a:effectLst/>
+              <a:uFillTx/>
+              <a:latin typeface="Times New Roman"/>
+            </a:endParaRPr>
+          </a:p>
+        </p:txBody>
+      </p:sp>
+      <p:sp>
+        <p:nvSpPr>
+          <p:cNvPr id="21" name=""/>
+          <p:cNvSpPr/>
+          <p:nvPr/>
+        </p:nvSpPr>
+        <p:spPr>
+          <a:xfrm flipH="1">
+            <a:off x="1172520" y="1548000"/>
+            <a:ext cx="179280" cy="179280"/>
+          </a:xfrm>
+          <a:prstGeom prst="ellipse">
+            <a:avLst/>
+          </a:prstGeom>
+          <a:solidFill>
+            <a:srgbClr val="BCC2C9"/>
+          </a:solidFill>
+          <a:ln w="16200">
+            <a:solidFill>
+              <a:srgbClr val="2A6099"/>
+            </a:solidFill>
+            <a:round/>
+          </a:ln>
+        </p:spPr>
+        <p:style>
+          <a:lnRef idx="0"/>
+          <a:fillRef idx="0"/>
+          <a:effectRef idx="0"/>
+          <a:fontRef idx="minor"/>
+        </p:style>
+        <p:txBody>
+          <a:bodyPr wrap="none" lIns="89280" tIns="44280" rIns="89280" bIns="44280" anchor="t">
+            <a:noAutofit/>
+          </a:bodyPr>
+          <a:p>
+            <a:endParaRPr lang="en-US" sz="1800" b="0" u="none" strike="noStrike">
+              <a:solidFill>
+                <a:srgbClr val="000000"/>
+              </a:solidFill>
+              <a:effectLst/>
+              <a:uFillTx/>
+              <a:latin typeface="Times New Roman"/>
+            </a:endParaRPr>
+          </a:p>
+        </p:txBody>
+      </p:sp>
+      <p:sp>
+        <p:nvSpPr>
+          <p:cNvPr id="22" name=""/>
+          <p:cNvSpPr/>
+          <p:nvPr/>
+        </p:nvSpPr>
+        <p:spPr>
+          <a:xfrm flipH="1">
+            <a:off x="444600" y="1548000"/>
+            <a:ext cx="179280" cy="179280"/>
+          </a:xfrm>
+          <a:prstGeom prst="ellipse">
+            <a:avLst/>
+          </a:prstGeom>
+          <a:solidFill>
+            <a:srgbClr val="F2CDC4"/>
+          </a:solidFill>
+          <a:ln w="19800">
+            <a:solidFill>
+              <a:srgbClr val="FF4000"/>
+            </a:solidFill>
+            <a:round/>
+          </a:ln>
+        </p:spPr>
+        <p:style>
+          <a:lnRef idx="0"/>
+          <a:fillRef idx="0"/>
+          <a:effectRef idx="0"/>
+          <a:fontRef idx="minor"/>
+        </p:style>
+        <p:txBody>
+          <a:bodyPr wrap="none" lIns="89640" tIns="45000" rIns="89640" bIns="45000" anchor="t">
+            <a:noAutofit/>
+          </a:bodyPr>
+          <a:p>
+            <a:endParaRPr lang="en-US" sz="1800" b="0" u="none" strike="noStrike">
+              <a:solidFill>
+                <a:srgbClr val="000000"/>
+              </a:solidFill>
+              <a:effectLst/>
+              <a:uFillTx/>
+              <a:latin typeface="Times New Roman"/>
+            </a:endParaRPr>
+          </a:p>
+        </p:txBody>
+      </p:sp>
+      <p:sp>
+        <p:nvSpPr>
+          <p:cNvPr id="24" name=""/>
+          <p:cNvSpPr/>
+          <p:nvPr/>
+        </p:nvSpPr>
+        <p:spPr>
+          <a:xfrm flipH="1">
+            <a:off x="947520" y="1764000"/>
+            <a:ext cx="179280" cy="179280"/>
+          </a:xfrm>
+          <a:prstGeom prst="ellipse">
+            <a:avLst/>
+          </a:prstGeom>
+          <a:solidFill>
+            <a:srgbClr val="AFB6BD"/>
+          </a:solidFill>
+          <a:ln w="14400">
+            <a:solidFill>
+              <a:srgbClr val="2A6099"/>
+            </a:solidFill>
+            <a:round/>
+          </a:ln>
+        </p:spPr>
+        <p:style>
+          <a:lnRef idx="0"/>
+          <a:fillRef idx="0"/>
+          <a:effectRef idx="0"/>
+          <a:fontRef idx="minor"/>
+        </p:style>
+        <p:txBody>
+          <a:bodyPr wrap="none" lIns="88200" tIns="43200" rIns="88200" bIns="43200" anchor="t">
+            <a:noAutofit/>
+          </a:bodyPr>
+          <a:p>
+            <a:endParaRPr lang="en-US" sz="1800" b="0" u="none" strike="noStrike">
+              <a:solidFill>
+                <a:srgbClr val="000000"/>
+              </a:solidFill>
+              <a:effectLst/>
+              <a:uFillTx/>
+              <a:latin typeface="Times New Roman"/>
+            </a:endParaRPr>
+          </a:p>
+        </p:txBody>
+      </p:sp>
+      <p:sp>
+        <p:nvSpPr>
+          <p:cNvPr id="25" name=""/>
+          <p:cNvSpPr/>
+          <p:nvPr/>
+        </p:nvSpPr>
+        <p:spPr>
+          <a:xfrm flipH="1">
+            <a:off x="669600" y="1764000"/>
+            <a:ext cx="179280" cy="179280"/>
+          </a:xfrm>
+          <a:prstGeom prst="ellipse">
+            <a:avLst/>
+          </a:prstGeom>
+          <a:solidFill>
+            <a:srgbClr val="FFD8CE"/>
+          </a:solidFill>
+          <a:ln w="21600">
+            <a:solidFill>
+              <a:srgbClr val="FF4000"/>
+            </a:solidFill>
+            <a:round/>
+          </a:ln>
+        </p:spPr>
+        <p:style>
+          <a:lnRef idx="0"/>
+          <a:fillRef idx="0"/>
+          <a:effectRef idx="0"/>
+          <a:fontRef idx="minor"/>
+        </p:style>
+        <p:txBody>
+          <a:bodyPr wrap="none" lIns="89640" tIns="46800" rIns="89640" bIns="46800" anchor="t">
+            <a:noAutofit/>
+          </a:bodyPr>
+          <a:p>
+            <a:endParaRPr lang="en-US" sz="1800" b="0" u="none" strike="noStrike">
+              <a:solidFill>
+                <a:srgbClr val="000000"/>
+              </a:solidFill>
+              <a:effectLst/>
+              <a:uFillTx/>
+              <a:latin typeface="Times New Roman"/>
+            </a:endParaRPr>
+          </a:p>
+        </p:txBody>
+      </p:sp>
+      <p:sp>
+        <p:nvSpPr>
+          <p:cNvPr id="28" name=""/>
+          <p:cNvSpPr/>
+          <p:nvPr/>
+        </p:nvSpPr>
+        <p:spPr>
+          <a:xfrm flipH="1">
+            <a:off x="669600" y="1980000"/>
+            <a:ext cx="179280" cy="179280"/>
+          </a:xfrm>
+          <a:prstGeom prst="ellipse">
+            <a:avLst/>
+          </a:prstGeom>
+          <a:solidFill>
+            <a:srgbClr val="AFB6BD"/>
+          </a:solidFill>
+          <a:ln w="14400">
+            <a:solidFill>
+              <a:srgbClr val="2A6099"/>
+            </a:solidFill>
+            <a:round/>
+          </a:ln>
+        </p:spPr>
+        <p:style>
+          <a:lnRef idx="0"/>
+          <a:fillRef idx="0"/>
+          <a:effectRef idx="0"/>
+          <a:fontRef idx="minor"/>
+        </p:style>
+        <p:txBody>
+          <a:bodyPr wrap="none" lIns="88200" tIns="43200" rIns="88200" bIns="43200" anchor="t">
+            <a:noAutofit/>
+          </a:bodyPr>
+          <a:p>
+            <a:endParaRPr lang="en-US" sz="1800" b="0" u="none" strike="noStrike">
+              <a:solidFill>
+                <a:srgbClr val="000000"/>
+              </a:solidFill>
+              <a:effectLst/>
+              <a:uFillTx/>
+              <a:latin typeface="Times New Roman"/>
+            </a:endParaRPr>
+          </a:p>
+        </p:txBody>
+      </p:sp>
+      <p:sp>
+        <p:nvSpPr>
+          <p:cNvPr id="27" name=""/>
+          <p:cNvSpPr/>
+          <p:nvPr/>
+        </p:nvSpPr>
+        <p:spPr>
+          <a:xfrm flipH="1">
+            <a:off x="947520" y="1980000"/>
+            <a:ext cx="179280" cy="179280"/>
+          </a:xfrm>
+          <a:prstGeom prst="ellipse">
+            <a:avLst/>
+          </a:prstGeom>
+          <a:solidFill>
+            <a:srgbClr val="FFD8CE"/>
+          </a:solidFill>
+          <a:ln w="21600">
+            <a:solidFill>
+              <a:srgbClr val="FF4000"/>
+            </a:solidFill>
+            <a:round/>
+          </a:ln>
+        </p:spPr>
+        <p:style>
+          <a:lnRef idx="0"/>
+          <a:fillRef idx="0"/>
+          <a:effectRef idx="0"/>
+          <a:fontRef idx="minor"/>
+        </p:style>
+        <p:txBody>
+          <a:bodyPr wrap="none" lIns="89640" tIns="46800" rIns="89640" bIns="46800" anchor="t">
+            <a:noAutofit/>
+          </a:bodyPr>
+          <a:p>
+            <a:endParaRPr lang="en-US" sz="1800" b="0" u="none" strike="noStrike">
+              <a:solidFill>
+                <a:srgbClr val="000000"/>
+              </a:solidFill>
+              <a:effectLst/>
+              <a:uFillTx/>
+              <a:latin typeface="Times New Roman"/>
+            </a:endParaRPr>
+          </a:p>
+        </p:txBody>
+      </p:sp>
+      <p:sp>
+        <p:nvSpPr>
+          <p:cNvPr id="30" name=""/>
+          <p:cNvSpPr/>
+          <p:nvPr/>
+        </p:nvSpPr>
+        <p:spPr>
+          <a:xfrm>
+            <a:off x="446040" y="2196000"/>
+            <a:ext cx="179280" cy="179280"/>
+          </a:xfrm>
+          <a:prstGeom prst="ellipse">
+            <a:avLst/>
+          </a:prstGeom>
+          <a:solidFill>
+            <a:srgbClr val="BCC2C9"/>
+          </a:solidFill>
+          <a:ln w="16200">
+            <a:solidFill>
+              <a:srgbClr val="2A6099"/>
+            </a:solidFill>
+            <a:round/>
+          </a:ln>
+        </p:spPr>
+        <p:style>
+          <a:lnRef idx="0"/>
+          <a:fillRef idx="0"/>
+          <a:effectRef idx="0"/>
+          <a:fontRef idx="minor"/>
+        </p:style>
+        <p:txBody>
+          <a:bodyPr wrap="none" lIns="89280" tIns="44280" rIns="89280" bIns="44280" anchor="t">
+            <a:noAutofit/>
+          </a:bodyPr>
+          <a:p>
+            <a:endParaRPr lang="en-US" sz="1800" b="0" u="none" strike="noStrike">
+              <a:solidFill>
+                <a:srgbClr val="000000"/>
+              </a:solidFill>
+              <a:effectLst/>
+              <a:uFillTx/>
+              <a:latin typeface="Times New Roman"/>
+            </a:endParaRPr>
+          </a:p>
+        </p:txBody>
+      </p:sp>
+      <p:sp>
+        <p:nvSpPr>
+          <p:cNvPr id="31" name=""/>
+          <p:cNvSpPr/>
+          <p:nvPr/>
+        </p:nvSpPr>
+        <p:spPr>
+          <a:xfrm>
+            <a:off x="1173960" y="2196000"/>
+            <a:ext cx="179280" cy="179280"/>
+          </a:xfrm>
+          <a:prstGeom prst="ellipse">
+            <a:avLst/>
+          </a:prstGeom>
+          <a:solidFill>
+            <a:srgbClr val="F2CDC4"/>
+          </a:solidFill>
+          <a:ln w="19800">
+            <a:solidFill>
+              <a:srgbClr val="FF4000"/>
+            </a:solidFill>
+            <a:round/>
+          </a:ln>
+        </p:spPr>
+        <p:style>
+          <a:lnRef idx="0"/>
+          <a:fillRef idx="0"/>
+          <a:effectRef idx="0"/>
+          <a:fontRef idx="minor"/>
+        </p:style>
+        <p:txBody>
+          <a:bodyPr wrap="none" lIns="89640" tIns="45000" rIns="89640" bIns="45000" anchor="t">
+            <a:noAutofit/>
+          </a:bodyPr>
+          <a:p>
+            <a:endParaRPr lang="en-US" sz="1800" b="0" u="none" strike="noStrike">
+              <a:solidFill>
+                <a:srgbClr val="000000"/>
+              </a:solidFill>
+              <a:effectLst/>
+              <a:uFillTx/>
+              <a:latin typeface="Times New Roman"/>
+            </a:endParaRPr>
+          </a:p>
+        </p:txBody>
+      </p:sp>
+      <p:sp>
+        <p:nvSpPr>
+          <p:cNvPr id="33" name=""/>
+          <p:cNvSpPr/>
+          <p:nvPr/>
+        </p:nvSpPr>
+        <p:spPr>
+          <a:xfrm>
+            <a:off x="360000" y="2412000"/>
+            <a:ext cx="179280" cy="179280"/>
+          </a:xfrm>
+          <a:prstGeom prst="ellipse">
+            <a:avLst/>
+          </a:prstGeom>
+          <a:solidFill>
+            <a:srgbClr val="C7CED6"/>
+          </a:solidFill>
+          <a:ln w="18000">
+            <a:solidFill>
+              <a:srgbClr val="2A6099"/>
+            </a:solidFill>
+            <a:round/>
+          </a:ln>
+        </p:spPr>
+        <p:style>
+          <a:lnRef idx="0"/>
+          <a:fillRef idx="0"/>
+          <a:effectRef idx="0"/>
+          <a:fontRef idx="minor"/>
+        </p:style>
+        <p:txBody>
+          <a:bodyPr wrap="none" lIns="89640" tIns="45000" rIns="89640" bIns="45000" anchor="t">
+            <a:noAutofit/>
+          </a:bodyPr>
+          <a:p>
+            <a:endParaRPr lang="en-US" sz="1800" b="0" u="none" strike="noStrike">
+              <a:solidFill>
+                <a:srgbClr val="000000"/>
+              </a:solidFill>
+              <a:effectLst/>
+              <a:uFillTx/>
+              <a:latin typeface="Times New Roman"/>
+            </a:endParaRPr>
+          </a:p>
+        </p:txBody>
+      </p:sp>
+      <p:sp>
+        <p:nvSpPr>
+          <p:cNvPr id="34" name=""/>
+          <p:cNvSpPr/>
+          <p:nvPr/>
+        </p:nvSpPr>
+        <p:spPr>
+          <a:xfrm>
+            <a:off x="1260000" y="2412000"/>
+            <a:ext cx="179280" cy="179280"/>
+          </a:xfrm>
+          <a:prstGeom prst="ellipse">
+            <a:avLst/>
+          </a:prstGeom>
+          <a:solidFill>
+            <a:srgbClr val="E6C2B9"/>
+          </a:solidFill>
+          <a:ln w="18000">
+            <a:solidFill>
+              <a:srgbClr val="FF4000"/>
+            </a:solidFill>
+            <a:round/>
+          </a:ln>
+        </p:spPr>
+        <p:style>
+          <a:lnRef idx="0"/>
+          <a:fillRef idx="0"/>
+          <a:effectRef idx="0"/>
+          <a:fontRef idx="minor"/>
+        </p:style>
+        <p:txBody>
+          <a:bodyPr wrap="none" lIns="89640" tIns="45000" rIns="89640" bIns="45000" anchor="t">
+            <a:noAutofit/>
+          </a:bodyPr>
+          <a:p>
+            <a:endParaRPr lang="en-US" sz="1800" b="0" u="none" strike="noStrike">
+              <a:solidFill>
+                <a:srgbClr val="000000"/>
+              </a:solidFill>
+              <a:effectLst/>
+              <a:uFillTx/>
+              <a:latin typeface="Times New Roman"/>
+            </a:endParaRPr>
+          </a:p>
+        </p:txBody>
+      </p:sp>
+      <p:sp>
+        <p:nvSpPr>
+          <p:cNvPr id="36" name=""/>
+          <p:cNvSpPr/>
+          <p:nvPr/>
+        </p:nvSpPr>
+        <p:spPr>
+          <a:xfrm>
+            <a:off x="446040" y="2628000"/>
+            <a:ext cx="179280" cy="179280"/>
+          </a:xfrm>
+          <a:prstGeom prst="ellipse">
+            <a:avLst/>
+          </a:prstGeom>
+          <a:solidFill>
+            <a:srgbClr val="D3DAE3"/>
+          </a:solidFill>
+          <a:ln w="19800">
+            <a:solidFill>
+              <a:srgbClr val="2A6099"/>
+            </a:solidFill>
+            <a:round/>
+          </a:ln>
+        </p:spPr>
+        <p:style>
+          <a:lnRef idx="0"/>
+          <a:fillRef idx="0"/>
+          <a:effectRef idx="0"/>
+          <a:fontRef idx="minor"/>
+        </p:style>
+        <p:txBody>
+          <a:bodyPr wrap="none" lIns="89640" tIns="45000" rIns="89640" bIns="45000" anchor="t">
+            <a:noAutofit/>
+          </a:bodyPr>
+          <a:p>
+            <a:endParaRPr lang="en-US" sz="1800" b="0" u="none" strike="noStrike">
+              <a:solidFill>
+                <a:srgbClr val="000000"/>
+              </a:solidFill>
+              <a:effectLst/>
+              <a:uFillTx/>
+              <a:latin typeface="Times New Roman"/>
+            </a:endParaRPr>
+          </a:p>
+        </p:txBody>
+      </p:sp>
+      <p:sp>
+        <p:nvSpPr>
+          <p:cNvPr id="37" name=""/>
+          <p:cNvSpPr/>
+          <p:nvPr/>
+        </p:nvSpPr>
+        <p:spPr>
+          <a:xfrm>
+            <a:off x="1173960" y="2628000"/>
+            <a:ext cx="179280" cy="179280"/>
+          </a:xfrm>
+          <a:prstGeom prst="ellipse">
+            <a:avLst/>
+          </a:prstGeom>
+          <a:solidFill>
+            <a:srgbClr val="D9B8AF"/>
+          </a:solidFill>
+          <a:ln w="16200">
+            <a:solidFill>
+              <a:srgbClr val="FF4000"/>
+            </a:solidFill>
+            <a:round/>
+          </a:ln>
+        </p:spPr>
+        <p:style>
+          <a:lnRef idx="0"/>
+          <a:fillRef idx="0"/>
+          <a:effectRef idx="0"/>
+          <a:fontRef idx="minor"/>
+        </p:style>
+        <p:txBody>
+          <a:bodyPr wrap="none" lIns="89280" tIns="44280" rIns="89280" bIns="44280" anchor="t">
+            <a:noAutofit/>
+          </a:bodyPr>
+          <a:p>
+            <a:endParaRPr lang="en-US" sz="1800" b="0" u="none" strike="noStrike">
+              <a:solidFill>
+                <a:srgbClr val="000000"/>
+              </a:solidFill>
+              <a:effectLst/>
+              <a:uFillTx/>
+              <a:latin typeface="Times New Roman"/>
+            </a:endParaRPr>
+          </a:p>
+        </p:txBody>
+      </p:sp>
+      <p:sp>
+        <p:nvSpPr>
+          <p:cNvPr id="39" name=""/>
+          <p:cNvSpPr/>
+          <p:nvPr/>
+        </p:nvSpPr>
+        <p:spPr>
+          <a:xfrm>
+            <a:off x="671040" y="2844000"/>
+            <a:ext cx="179280" cy="179280"/>
+          </a:xfrm>
+          <a:prstGeom prst="ellipse">
+            <a:avLst/>
+          </a:prstGeom>
+          <a:solidFill>
+            <a:srgbClr val="DEE6EF"/>
+          </a:solidFill>
+          <a:ln w="21600">
+            <a:solidFill>
+              <a:srgbClr val="2A6099"/>
+            </a:solidFill>
+            <a:round/>
+          </a:ln>
+        </p:spPr>
+        <p:style>
+          <a:lnRef idx="0"/>
+          <a:fillRef idx="0"/>
+          <a:effectRef idx="0"/>
+          <a:fontRef idx="minor"/>
+        </p:style>
+        <p:txBody>
+          <a:bodyPr wrap="none" lIns="89640" tIns="46800" rIns="89640" bIns="46800" anchor="t">
+            <a:noAutofit/>
+          </a:bodyPr>
+          <a:p>
+            <a:endParaRPr lang="en-US" sz="1800" b="0" u="none" strike="noStrike">
+              <a:solidFill>
+                <a:srgbClr val="000000"/>
+              </a:solidFill>
+              <a:effectLst/>
+              <a:uFillTx/>
+              <a:latin typeface="Times New Roman"/>
+            </a:endParaRPr>
+          </a:p>
+        </p:txBody>
+      </p:sp>
+      <p:sp>
+        <p:nvSpPr>
+          <p:cNvPr id="40" name=""/>
+          <p:cNvSpPr/>
+          <p:nvPr/>
+        </p:nvSpPr>
+        <p:spPr>
+          <a:xfrm>
+            <a:off x="948960" y="2844000"/>
+            <a:ext cx="179280" cy="179280"/>
+          </a:xfrm>
+          <a:prstGeom prst="ellipse">
+            <a:avLst/>
+          </a:prstGeom>
+          <a:solidFill>
+            <a:srgbClr val="CCADA5"/>
+          </a:solidFill>
+          <a:ln w="14400">
+            <a:solidFill>
+              <a:srgbClr val="FF4000"/>
+            </a:solidFill>
+            <a:round/>
+          </a:ln>
+        </p:spPr>
+        <p:style>
+          <a:lnRef idx="0"/>
+          <a:fillRef idx="0"/>
+          <a:effectRef idx="0"/>
+          <a:fontRef idx="minor"/>
+        </p:style>
+        <p:txBody>
+          <a:bodyPr wrap="none" lIns="88200" tIns="43200" rIns="88200" bIns="43200" anchor="t">
+            <a:noAutofit/>
+          </a:bodyPr>
+          <a:p>
+            <a:endParaRPr lang="en-US" sz="1800" b="0" u="none" strike="noStrike">
+              <a:solidFill>
+                <a:srgbClr val="000000"/>
+              </a:solidFill>
+              <a:effectLst/>
+              <a:uFillTx/>
+              <a:latin typeface="Times New Roman"/>
+            </a:endParaRPr>
+          </a:p>
+        </p:txBody>
+      </p:sp>
+      <p:sp>
+        <p:nvSpPr>
+          <p:cNvPr id="43" name=""/>
+          <p:cNvSpPr/>
+          <p:nvPr/>
+        </p:nvSpPr>
+        <p:spPr>
+          <a:xfrm>
+            <a:off x="948960" y="3060000"/>
+            <a:ext cx="179280" cy="179280"/>
+          </a:xfrm>
+          <a:prstGeom prst="ellipse">
+            <a:avLst/>
+          </a:prstGeom>
+          <a:solidFill>
+            <a:srgbClr val="DEE6EF"/>
+          </a:solidFill>
+          <a:ln w="21600">
+            <a:solidFill>
+              <a:srgbClr val="2A6099"/>
+            </a:solidFill>
+            <a:round/>
+          </a:ln>
+        </p:spPr>
+        <p:style>
+          <a:lnRef idx="0"/>
+          <a:fillRef idx="0"/>
+          <a:effectRef idx="0"/>
+          <a:fontRef idx="minor"/>
+        </p:style>
+        <p:txBody>
+          <a:bodyPr wrap="none" lIns="89640" tIns="46800" rIns="89640" bIns="46800" anchor="t">
+            <a:noAutofit/>
+          </a:bodyPr>
+          <a:p>
+            <a:endParaRPr lang="en-US" sz="1800" b="0" u="none" strike="noStrike">
+              <a:solidFill>
+                <a:srgbClr val="000000"/>
+              </a:solidFill>
+              <a:effectLst/>
+              <a:uFillTx/>
+              <a:latin typeface="Times New Roman"/>
+            </a:endParaRPr>
+          </a:p>
+        </p:txBody>
+      </p:sp>
+      <p:sp>
+        <p:nvSpPr>
+          <p:cNvPr id="42" name=""/>
+          <p:cNvSpPr/>
+          <p:nvPr/>
+        </p:nvSpPr>
+        <p:spPr>
+          <a:xfrm>
+            <a:off x="671040" y="3060000"/>
+            <a:ext cx="179280" cy="179280"/>
+          </a:xfrm>
+          <a:prstGeom prst="ellipse">
+            <a:avLst/>
+          </a:prstGeom>
+          <a:solidFill>
+            <a:srgbClr val="CCADA5"/>
+          </a:solidFill>
+          <a:ln w="14400">
+            <a:solidFill>
+              <a:srgbClr val="FF4000"/>
+            </a:solidFill>
+            <a:round/>
+          </a:ln>
+        </p:spPr>
+        <p:style>
+          <a:lnRef idx="0"/>
+          <a:fillRef idx="0"/>
+          <a:effectRef idx="0"/>
+          <a:fontRef idx="minor"/>
+        </p:style>
+        <p:txBody>
+          <a:bodyPr wrap="none" lIns="88200" tIns="43200" rIns="88200" bIns="43200" anchor="t">
+            <a:noAutofit/>
+          </a:bodyPr>
+          <a:p>
+            <a:endParaRPr lang="en-US" sz="1800" b="0" u="none" strike="noStrike">
+              <a:solidFill>
+                <a:srgbClr val="000000"/>
+              </a:solidFill>
+              <a:effectLst/>
+              <a:uFillTx/>
+              <a:latin typeface="Times New Roman"/>
+            </a:endParaRPr>
+          </a:p>
+        </p:txBody>
+      </p:sp>
+      <p:sp>
+        <p:nvSpPr>
+          <p:cNvPr id="45" name=""/>
+          <p:cNvSpPr/>
+          <p:nvPr/>
+        </p:nvSpPr>
+        <p:spPr>
+          <a:xfrm flipH="1">
+            <a:off x="1172520" y="3276000"/>
+            <a:ext cx="179280" cy="179280"/>
+          </a:xfrm>
+          <a:prstGeom prst="ellipse">
+            <a:avLst/>
+          </a:prstGeom>
+          <a:solidFill>
+            <a:srgbClr val="D3DAE3"/>
+          </a:solidFill>
+          <a:ln w="19800">
+            <a:solidFill>
+              <a:srgbClr val="2A6099"/>
+            </a:solidFill>
+            <a:round/>
+          </a:ln>
+        </p:spPr>
+        <p:style>
+          <a:lnRef idx="0"/>
+          <a:fillRef idx="0"/>
+          <a:effectRef idx="0"/>
+          <a:fontRef idx="minor"/>
+        </p:style>
+        <p:txBody>
+          <a:bodyPr wrap="none" lIns="89640" tIns="45000" rIns="89640" bIns="45000" anchor="t">
+            <a:noAutofit/>
+          </a:bodyPr>
+          <a:p>
+            <a:endParaRPr lang="en-US" sz="1800" b="0" u="none" strike="noStrike">
+              <a:solidFill>
+                <a:srgbClr val="000000"/>
+              </a:solidFill>
+              <a:effectLst/>
+              <a:uFillTx/>
+              <a:latin typeface="Times New Roman"/>
+            </a:endParaRPr>
+          </a:p>
+        </p:txBody>
+      </p:sp>
+      <p:sp>
+        <p:nvSpPr>
+          <p:cNvPr id="46" name=""/>
+          <p:cNvSpPr/>
+          <p:nvPr/>
+        </p:nvSpPr>
+        <p:spPr>
+          <a:xfrm flipH="1">
+            <a:off x="444600" y="3276000"/>
+            <a:ext cx="179280" cy="179280"/>
+          </a:xfrm>
+          <a:prstGeom prst="ellipse">
+            <a:avLst/>
+          </a:prstGeom>
+          <a:solidFill>
+            <a:srgbClr val="D9B8AF"/>
+          </a:solidFill>
+          <a:ln w="16200">
+            <a:solidFill>
+              <a:srgbClr val="FF4000"/>
+            </a:solidFill>
+            <a:round/>
+          </a:ln>
+        </p:spPr>
+        <p:style>
+          <a:lnRef idx="0"/>
+          <a:fillRef idx="0"/>
+          <a:effectRef idx="0"/>
+          <a:fontRef idx="minor"/>
+        </p:style>
+        <p:txBody>
+          <a:bodyPr wrap="none" lIns="89280" tIns="44280" rIns="89280" bIns="44280" anchor="t">
+            <a:noAutofit/>
+          </a:bodyPr>
+          <a:p>
+            <a:endParaRPr lang="en-US" sz="1800" b="0" u="none" strike="noStrike">
+              <a:solidFill>
+                <a:srgbClr val="000000"/>
+              </a:solidFill>
+              <a:effectLst/>
+              <a:uFillTx/>
+              <a:latin typeface="Times New Roman"/>
+            </a:endParaRPr>
+          </a:p>
+        </p:txBody>
+      </p:sp>
+      <p:sp>
+        <p:nvSpPr>
+          <p:cNvPr id="48" name=""/>
+          <p:cNvSpPr/>
+          <p:nvPr/>
+        </p:nvSpPr>
+        <p:spPr>
+          <a:xfrm flipH="1">
+            <a:off x="1258560" y="3492000"/>
+            <a:ext cx="179280" cy="179280"/>
+          </a:xfrm>
+          <a:prstGeom prst="ellipse">
+            <a:avLst/>
+          </a:prstGeom>
+          <a:solidFill>
+            <a:srgbClr val="C7CED6"/>
+          </a:solidFill>
+          <a:ln w="18000">
+            <a:solidFill>
+              <a:srgbClr val="2A6099"/>
+            </a:solidFill>
+            <a:round/>
+          </a:ln>
+        </p:spPr>
+        <p:style>
+          <a:lnRef idx="0"/>
+          <a:fillRef idx="0"/>
+          <a:effectRef idx="0"/>
+          <a:fontRef idx="minor"/>
+        </p:style>
+        <p:txBody>
+          <a:bodyPr wrap="none" lIns="89640" tIns="45000" rIns="89640" bIns="45000" anchor="t">
+            <a:noAutofit/>
+          </a:bodyPr>
+          <a:p>
+            <a:endParaRPr lang="en-US" sz="1800" b="0" u="none" strike="noStrike">
+              <a:solidFill>
+                <a:srgbClr val="000000"/>
+              </a:solidFill>
+              <a:effectLst/>
+              <a:uFillTx/>
+              <a:latin typeface="Times New Roman"/>
+            </a:endParaRPr>
+          </a:p>
+        </p:txBody>
+      </p:sp>
+      <p:sp>
+        <p:nvSpPr>
+          <p:cNvPr id="49" name=""/>
+          <p:cNvSpPr/>
+          <p:nvPr/>
+        </p:nvSpPr>
+        <p:spPr>
+          <a:xfrm flipH="1">
+            <a:off x="358560" y="3492000"/>
+            <a:ext cx="179280" cy="179280"/>
+          </a:xfrm>
+          <a:prstGeom prst="ellipse">
+            <a:avLst/>
+          </a:prstGeom>
+          <a:solidFill>
+            <a:srgbClr val="E6C2B9"/>
+          </a:solidFill>
+          <a:ln w="18000">
+            <a:solidFill>
+              <a:srgbClr val="FF4000"/>
+            </a:solidFill>
+            <a:round/>
+          </a:ln>
+        </p:spPr>
+        <p:style>
+          <a:lnRef idx="0"/>
+          <a:fillRef idx="0"/>
+          <a:effectRef idx="0"/>
+          <a:fontRef idx="minor"/>
+        </p:style>
+        <p:txBody>
+          <a:bodyPr wrap="none" lIns="89640" tIns="45000" rIns="89640" bIns="45000" anchor="t">
+            <a:noAutofit/>
+          </a:bodyPr>
+          <a:p>
+            <a:endParaRPr lang="en-US" sz="1800" b="0" u="none" strike="noStrike">
+              <a:solidFill>
+                <a:srgbClr val="000000"/>
+              </a:solidFill>
+              <a:effectLst/>
+              <a:uFillTx/>
+              <a:latin typeface="Times New Roman"/>
+            </a:endParaRPr>
+          </a:p>
+        </p:txBody>
+      </p:sp>
+      <p:sp>
+        <p:nvSpPr>
+          <p:cNvPr id="51" name=""/>
+          <p:cNvSpPr/>
+          <p:nvPr/>
+        </p:nvSpPr>
+        <p:spPr>
+          <a:xfrm flipH="1">
+            <a:off x="1172520" y="3708000"/>
+            <a:ext cx="179280" cy="179280"/>
+          </a:xfrm>
+          <a:prstGeom prst="ellipse">
+            <a:avLst/>
+          </a:prstGeom>
+          <a:solidFill>
+            <a:srgbClr val="BCC2C9"/>
+          </a:solidFill>
+          <a:ln w="16200">
+            <a:solidFill>
+              <a:srgbClr val="2A6099"/>
+            </a:solidFill>
+            <a:round/>
+          </a:ln>
+        </p:spPr>
+        <p:style>
+          <a:lnRef idx="0"/>
+          <a:fillRef idx="0"/>
+          <a:effectRef idx="0"/>
+          <a:fontRef idx="minor"/>
+        </p:style>
+        <p:txBody>
+          <a:bodyPr wrap="none" lIns="89280" tIns="44280" rIns="89280" bIns="44280" anchor="t">
+            <a:noAutofit/>
+          </a:bodyPr>
+          <a:p>
+            <a:endParaRPr lang="en-US" sz="1800" b="0" u="none" strike="noStrike">
+              <a:solidFill>
+                <a:srgbClr val="000000"/>
+              </a:solidFill>
+              <a:effectLst/>
+              <a:uFillTx/>
+              <a:latin typeface="Times New Roman"/>
+            </a:endParaRPr>
+          </a:p>
+        </p:txBody>
+      </p:sp>
+      <p:sp>
+        <p:nvSpPr>
+          <p:cNvPr id="52" name=""/>
+          <p:cNvSpPr/>
+          <p:nvPr/>
+        </p:nvSpPr>
+        <p:spPr>
+          <a:xfrm flipH="1">
+            <a:off x="444600" y="3708000"/>
+            <a:ext cx="179280" cy="179280"/>
+          </a:xfrm>
+          <a:prstGeom prst="ellipse">
+            <a:avLst/>
+          </a:prstGeom>
+          <a:solidFill>
+            <a:srgbClr val="F2CDC4"/>
+          </a:solidFill>
+          <a:ln w="19800">
+            <a:solidFill>
+              <a:srgbClr val="FF4000"/>
+            </a:solidFill>
+            <a:round/>
+          </a:ln>
+        </p:spPr>
+        <p:style>
+          <a:lnRef idx="0"/>
+          <a:fillRef idx="0"/>
+          <a:effectRef idx="0"/>
+          <a:fontRef idx="minor"/>
+        </p:style>
+        <p:txBody>
+          <a:bodyPr wrap="none" lIns="89640" tIns="45000" rIns="89640" bIns="45000" anchor="t">
+            <a:noAutofit/>
+          </a:bodyPr>
+          <a:p>
+            <a:endParaRPr lang="en-US" sz="1800" b="0" u="none" strike="noStrike">
+              <a:solidFill>
+                <a:srgbClr val="000000"/>
+              </a:solidFill>
+              <a:effectLst/>
+              <a:uFillTx/>
+              <a:latin typeface="Times New Roman"/>
+            </a:endParaRPr>
+          </a:p>
+        </p:txBody>
+      </p:sp>
+      <p:sp>
+        <p:nvSpPr>
+          <p:cNvPr id="54" name=""/>
+          <p:cNvSpPr/>
+          <p:nvPr/>
+        </p:nvSpPr>
+        <p:spPr>
+          <a:xfrm flipH="1">
+            <a:off x="947520" y="3924000"/>
+            <a:ext cx="179280" cy="179280"/>
+          </a:xfrm>
+          <a:prstGeom prst="ellipse">
+            <a:avLst/>
+          </a:prstGeom>
+          <a:solidFill>
+            <a:srgbClr val="AFB6BD"/>
+          </a:solidFill>
+          <a:ln w="14400">
+            <a:solidFill>
+              <a:srgbClr val="2A6099"/>
+            </a:solidFill>
+            <a:round/>
+          </a:ln>
+        </p:spPr>
+        <p:style>
+          <a:lnRef idx="0"/>
+          <a:fillRef idx="0"/>
+          <a:effectRef idx="0"/>
+          <a:fontRef idx="minor"/>
+        </p:style>
+        <p:txBody>
+          <a:bodyPr wrap="none" lIns="88200" tIns="43200" rIns="88200" bIns="43200" anchor="t">
+            <a:noAutofit/>
+          </a:bodyPr>
+          <a:p>
+            <a:endParaRPr lang="en-US" sz="1800" b="0" u="none" strike="noStrike">
+              <a:solidFill>
+                <a:srgbClr val="000000"/>
+              </a:solidFill>
+              <a:effectLst/>
+              <a:uFillTx/>
+              <a:latin typeface="Times New Roman"/>
+            </a:endParaRPr>
+          </a:p>
+        </p:txBody>
+      </p:sp>
+      <p:sp>
+        <p:nvSpPr>
+          <p:cNvPr id="55" name=""/>
+          <p:cNvSpPr/>
+          <p:nvPr/>
+        </p:nvSpPr>
+        <p:spPr>
+          <a:xfrm flipH="1">
+            <a:off x="669600" y="3924000"/>
+            <a:ext cx="179280" cy="179280"/>
+          </a:xfrm>
+          <a:prstGeom prst="ellipse">
+            <a:avLst/>
+          </a:prstGeom>
+          <a:solidFill>
+            <a:srgbClr val="FFD8CE"/>
+          </a:solidFill>
+          <a:ln w="21600">
+            <a:solidFill>
+              <a:srgbClr val="FF4000"/>
+            </a:solidFill>
+            <a:round/>
+          </a:ln>
+        </p:spPr>
+        <p:style>
+          <a:lnRef idx="0"/>
+          <a:fillRef idx="0"/>
+          <a:effectRef idx="0"/>
+          <a:fontRef idx="minor"/>
+        </p:style>
+        <p:txBody>
+          <a:bodyPr wrap="none" lIns="89640" tIns="46800" rIns="89640" bIns="46800" anchor="t">
+            <a:noAutofit/>
+          </a:bodyPr>
+          <a:p>
+            <a:endParaRPr lang="en-US" sz="1800" b="0" u="none" strike="noStrike">
+              <a:solidFill>
+                <a:srgbClr val="000000"/>
+              </a:solidFill>
+              <a:effectLst/>
+              <a:uFillTx/>
+              <a:latin typeface="Times New Roman"/>
+            </a:endParaRPr>
+          </a:p>
+        </p:txBody>
+      </p:sp>
+      <p:sp>
+        <p:nvSpPr>
+          <p:cNvPr id="58" name=""/>
+          <p:cNvSpPr/>
+          <p:nvPr/>
+        </p:nvSpPr>
+        <p:spPr>
+          <a:xfrm flipH="1">
+            <a:off x="669600" y="4140000"/>
+            <a:ext cx="179280" cy="179280"/>
+          </a:xfrm>
+          <a:prstGeom prst="ellipse">
+            <a:avLst/>
+          </a:prstGeom>
+          <a:solidFill>
+            <a:srgbClr val="AFB6BD"/>
+          </a:solidFill>
+          <a:ln w="14400">
+            <a:solidFill>
+              <a:srgbClr val="2A6099"/>
+            </a:solidFill>
+            <a:round/>
+          </a:ln>
+        </p:spPr>
+        <p:style>
+          <a:lnRef idx="0"/>
+          <a:fillRef idx="0"/>
+          <a:effectRef idx="0"/>
+          <a:fontRef idx="minor"/>
+        </p:style>
+        <p:txBody>
+          <a:bodyPr wrap="none" lIns="88200" tIns="43200" rIns="88200" bIns="43200" anchor="t">
+            <a:noAutofit/>
+          </a:bodyPr>
+          <a:p>
+            <a:endParaRPr lang="en-US" sz="1800" b="0" u="none" strike="noStrike">
+              <a:solidFill>
+                <a:srgbClr val="000000"/>
+              </a:solidFill>
+              <a:effectLst/>
+              <a:uFillTx/>
+              <a:latin typeface="Times New Roman"/>
+            </a:endParaRPr>
+          </a:p>
+        </p:txBody>
+      </p:sp>
+      <p:sp>
+        <p:nvSpPr>
+          <p:cNvPr id="57" name=""/>
+          <p:cNvSpPr/>
+          <p:nvPr/>
+        </p:nvSpPr>
+        <p:spPr>
+          <a:xfrm flipH="1">
+            <a:off x="947520" y="4140000"/>
+            <a:ext cx="179280" cy="179280"/>
+          </a:xfrm>
+          <a:prstGeom prst="ellipse">
+            <a:avLst/>
+          </a:prstGeom>
+          <a:solidFill>
+            <a:srgbClr val="FFD8CE"/>
+          </a:solidFill>
+          <a:ln w="21600">
+            <a:solidFill>
+              <a:srgbClr val="FF4000"/>
+            </a:solidFill>
+            <a:round/>
+          </a:ln>
+        </p:spPr>
+        <p:style>
+          <a:lnRef idx="0"/>
+          <a:fillRef idx="0"/>
+          <a:effectRef idx="0"/>
+          <a:fontRef idx="minor"/>
+        </p:style>
+        <p:txBody>
+          <a:bodyPr wrap="none" lIns="89640" tIns="46800" rIns="89640" bIns="46800" anchor="t">
+            <a:noAutofit/>
+          </a:bodyPr>
+          <a:p>
+            <a:endParaRPr lang="en-US" sz="1800" b="0" u="none" strike="noStrike">
+              <a:solidFill>
+                <a:srgbClr val="000000"/>
+              </a:solidFill>
+              <a:effectLst/>
+              <a:uFillTx/>
+              <a:latin typeface="Times New Roman"/>
+            </a:endParaRPr>
+          </a:p>
+        </p:txBody>
+      </p:sp>
+      <p:sp>
+        <p:nvSpPr>
+          <p:cNvPr id="60" name=""/>
+          <p:cNvSpPr/>
+          <p:nvPr/>
+        </p:nvSpPr>
+        <p:spPr>
+          <a:xfrm>
+            <a:off x="446040" y="4356000"/>
+            <a:ext cx="179280" cy="179280"/>
+          </a:xfrm>
+          <a:prstGeom prst="ellipse">
+            <a:avLst/>
+          </a:prstGeom>
+          <a:solidFill>
+            <a:srgbClr val="BCC2C9"/>
+          </a:solidFill>
+          <a:ln w="16200">
+            <a:solidFill>
+              <a:srgbClr val="2A6099"/>
+            </a:solidFill>
+            <a:round/>
+          </a:ln>
+        </p:spPr>
+        <p:style>
+          <a:lnRef idx="0"/>
+          <a:fillRef idx="0"/>
+          <a:effectRef idx="0"/>
+          <a:fontRef idx="minor"/>
+        </p:style>
+        <p:txBody>
+          <a:bodyPr wrap="none" lIns="89280" tIns="44280" rIns="89280" bIns="44280" anchor="t">
+            <a:noAutofit/>
+          </a:bodyPr>
+          <a:p>
+            <a:endParaRPr lang="en-US" sz="1800" b="0" u="none" strike="noStrike">
+              <a:solidFill>
+                <a:srgbClr val="000000"/>
+              </a:solidFill>
+              <a:effectLst/>
+              <a:uFillTx/>
+              <a:latin typeface="Times New Roman"/>
+            </a:endParaRPr>
+          </a:p>
+        </p:txBody>
+      </p:sp>
+      <p:sp>
+        <p:nvSpPr>
+          <p:cNvPr id="61" name=""/>
+          <p:cNvSpPr/>
+          <p:nvPr/>
+        </p:nvSpPr>
+        <p:spPr>
+          <a:xfrm>
+            <a:off x="1173960" y="4356000"/>
+            <a:ext cx="179280" cy="179280"/>
+          </a:xfrm>
+          <a:prstGeom prst="ellipse">
+            <a:avLst/>
+          </a:prstGeom>
+          <a:solidFill>
+            <a:srgbClr val="F2CDC4"/>
+          </a:solidFill>
+          <a:ln w="19800">
+            <a:solidFill>
+              <a:srgbClr val="FF4000"/>
+            </a:solidFill>
+            <a:round/>
+          </a:ln>
+        </p:spPr>
+        <p:style>
+          <a:lnRef idx="0"/>
+          <a:fillRef idx="0"/>
+          <a:effectRef idx="0"/>
+          <a:fontRef idx="minor"/>
+        </p:style>
+        <p:txBody>
+          <a:bodyPr wrap="none" lIns="89640" tIns="45000" rIns="89640" bIns="45000" anchor="t">
+            <a:noAutofit/>
+          </a:bodyPr>
+          <a:p>
+            <a:endParaRPr lang="en-US" sz="1800" b="0" u="none" strike="noStrike">
+              <a:solidFill>
+                <a:srgbClr val="000000"/>
+              </a:solidFill>
+              <a:effectLst/>
+              <a:uFillTx/>
+              <a:latin typeface="Times New Roman"/>
+            </a:endParaRPr>
+          </a:p>
+        </p:txBody>
+      </p:sp>
+      <p:sp>
+        <p:nvSpPr>
+          <p:cNvPr id="63" name=""/>
+          <p:cNvSpPr/>
+          <p:nvPr/>
+        </p:nvSpPr>
+        <p:spPr>
+          <a:xfrm>
+            <a:off x="360000" y="4572000"/>
+            <a:ext cx="179280" cy="179280"/>
+          </a:xfrm>
+          <a:prstGeom prst="ellipse">
+            <a:avLst/>
+          </a:prstGeom>
+          <a:solidFill>
+            <a:srgbClr val="C7CED6"/>
+          </a:solidFill>
+          <a:ln w="18000">
+            <a:solidFill>
+              <a:srgbClr val="2A6099"/>
+            </a:solidFill>
+            <a:round/>
+          </a:ln>
+        </p:spPr>
+        <p:style>
+          <a:lnRef idx="0"/>
+          <a:fillRef idx="0"/>
+          <a:effectRef idx="0"/>
+          <a:fontRef idx="minor"/>
+        </p:style>
+        <p:txBody>
+          <a:bodyPr wrap="none" lIns="89640" tIns="45000" rIns="89640" bIns="45000" anchor="t">
+            <a:noAutofit/>
+          </a:bodyPr>
+          <a:p>
+            <a:endParaRPr lang="en-US" sz="1800" b="0" u="none" strike="noStrike">
+              <a:solidFill>
+                <a:srgbClr val="000000"/>
+              </a:solidFill>
+              <a:effectLst/>
+              <a:uFillTx/>
+              <a:latin typeface="Times New Roman"/>
+            </a:endParaRPr>
+          </a:p>
+        </p:txBody>
+      </p:sp>
+      <p:sp>
+        <p:nvSpPr>
+          <p:cNvPr id="64" name=""/>
+          <p:cNvSpPr/>
+          <p:nvPr/>
+        </p:nvSpPr>
+        <p:spPr>
+          <a:xfrm>
+            <a:off x="1260000" y="4572000"/>
+            <a:ext cx="179280" cy="179280"/>
+          </a:xfrm>
+          <a:prstGeom prst="ellipse">
+            <a:avLst/>
+          </a:prstGeom>
+          <a:solidFill>
+            <a:srgbClr val="E6C2B9"/>
+          </a:solidFill>
+          <a:ln w="18000">
+            <a:solidFill>
+              <a:srgbClr val="FF4000"/>
+            </a:solidFill>
+            <a:round/>
+          </a:ln>
+        </p:spPr>
+        <p:style>
+          <a:lnRef idx="0"/>
+          <a:fillRef idx="0"/>
+          <a:effectRef idx="0"/>
+          <a:fontRef idx="minor"/>
+        </p:style>
+        <p:txBody>
+          <a:bodyPr wrap="none" lIns="89640" tIns="45000" rIns="89640" bIns="45000" anchor="t">
+            <a:noAutofit/>
+          </a:bodyPr>
+          <a:p>
+            <a:endParaRPr lang="en-US" sz="1800" b="0" u="none" strike="noStrike">
+              <a:solidFill>
+                <a:srgbClr val="000000"/>
+              </a:solidFill>
+              <a:effectLst/>
+              <a:uFillTx/>
+              <a:latin typeface="Times New Roman"/>
+            </a:endParaRPr>
+          </a:p>
+        </p:txBody>
+      </p:sp>
+      <p:sp>
+        <p:nvSpPr>
+          <p:cNvPr id="66" name=""/>
+          <p:cNvSpPr/>
+          <p:nvPr/>
+        </p:nvSpPr>
+        <p:spPr>
+          <a:xfrm>
+            <a:off x="446040" y="4788000"/>
+            <a:ext cx="179280" cy="179280"/>
+          </a:xfrm>
+          <a:prstGeom prst="ellipse">
+            <a:avLst/>
+          </a:prstGeom>
+          <a:solidFill>
+            <a:srgbClr val="D3DAE3"/>
+          </a:solidFill>
+          <a:ln w="19800">
+            <a:solidFill>
+              <a:srgbClr val="2A6099"/>
+            </a:solidFill>
+            <a:round/>
+          </a:ln>
+        </p:spPr>
+        <p:style>
+          <a:lnRef idx="0"/>
+          <a:fillRef idx="0"/>
+          <a:effectRef idx="0"/>
+          <a:fontRef idx="minor"/>
+        </p:style>
+        <p:txBody>
+          <a:bodyPr wrap="none" lIns="89640" tIns="45000" rIns="89640" bIns="45000" anchor="t">
+            <a:noAutofit/>
+          </a:bodyPr>
+          <a:p>
+            <a:endParaRPr lang="en-US" sz="1800" b="0" u="none" strike="noStrike">
+              <a:solidFill>
+                <a:srgbClr val="000000"/>
+              </a:solidFill>
+              <a:effectLst/>
+              <a:uFillTx/>
+              <a:latin typeface="Times New Roman"/>
+            </a:endParaRPr>
+          </a:p>
+        </p:txBody>
+      </p:sp>
+      <p:sp>
+        <p:nvSpPr>
+          <p:cNvPr id="67" name=""/>
+          <p:cNvSpPr/>
+          <p:nvPr/>
+        </p:nvSpPr>
+        <p:spPr>
+          <a:xfrm>
+            <a:off x="1173960" y="4788000"/>
+            <a:ext cx="179280" cy="179280"/>
+          </a:xfrm>
+          <a:prstGeom prst="ellipse">
+            <a:avLst/>
+          </a:prstGeom>
+          <a:solidFill>
+            <a:srgbClr val="D9B8AF"/>
+          </a:solidFill>
+          <a:ln w="16200">
+            <a:solidFill>
+              <a:srgbClr val="FF4000"/>
+            </a:solidFill>
+            <a:round/>
+          </a:ln>
+        </p:spPr>
+        <p:style>
+          <a:lnRef idx="0"/>
+          <a:fillRef idx="0"/>
+          <a:effectRef idx="0"/>
+          <a:fontRef idx="minor"/>
+        </p:style>
+        <p:txBody>
+          <a:bodyPr wrap="none" lIns="89280" tIns="44280" rIns="89280" bIns="44280" anchor="t">
+            <a:noAutofit/>
+          </a:bodyPr>
+          <a:p>
+            <a:endParaRPr lang="en-US" sz="1800" b="0" u="none" strike="noStrike">
+              <a:solidFill>
+                <a:srgbClr val="000000"/>
+              </a:solidFill>
+              <a:effectLst/>
+              <a:uFillTx/>
+              <a:latin typeface="Times New Roman"/>
+            </a:endParaRPr>
+          </a:p>
+        </p:txBody>
+      </p:sp>
+      <p:sp>
+        <p:nvSpPr>
+          <p:cNvPr id="69" name=""/>
+          <p:cNvSpPr/>
+          <p:nvPr/>
+        </p:nvSpPr>
+        <p:spPr>
+          <a:xfrm>
+            <a:off x="671040" y="5004000"/>
+            <a:ext cx="179280" cy="179280"/>
+          </a:xfrm>
+          <a:prstGeom prst="ellipse">
+            <a:avLst/>
+          </a:prstGeom>
+          <a:solidFill>
+            <a:srgbClr val="DEE6EF"/>
+          </a:solidFill>
+          <a:ln w="21600">
+            <a:solidFill>
+              <a:srgbClr val="2A6099"/>
+            </a:solidFill>
+            <a:round/>
+          </a:ln>
+        </p:spPr>
+        <p:style>
+          <a:lnRef idx="0"/>
+          <a:fillRef idx="0"/>
+          <a:effectRef idx="0"/>
+          <a:fontRef idx="minor"/>
+        </p:style>
+        <p:txBody>
+          <a:bodyPr wrap="none" lIns="89640" tIns="46800" rIns="89640" bIns="46800" anchor="t">
+            <a:noAutofit/>
+          </a:bodyPr>
+          <a:p>
+            <a:endParaRPr lang="en-US" sz="1800" b="0" u="none" strike="noStrike">
+              <a:solidFill>
+                <a:srgbClr val="000000"/>
+              </a:solidFill>
+              <a:effectLst/>
+              <a:uFillTx/>
+              <a:latin typeface="Times New Roman"/>
+            </a:endParaRPr>
+          </a:p>
+        </p:txBody>
+      </p:sp>
+      <p:sp>
+        <p:nvSpPr>
+          <p:cNvPr id="70" name=""/>
+          <p:cNvSpPr/>
+          <p:nvPr/>
+        </p:nvSpPr>
+        <p:spPr>
+          <a:xfrm>
+            <a:off x="948960" y="5004000"/>
+            <a:ext cx="179280" cy="179280"/>
+          </a:xfrm>
+          <a:prstGeom prst="ellipse">
+            <a:avLst/>
+          </a:prstGeom>
+          <a:solidFill>
+            <a:srgbClr val="CCADA5"/>
+          </a:solidFill>
+          <a:ln w="14400">
+            <a:solidFill>
+              <a:srgbClr val="FF4000"/>
+            </a:solidFill>
+            <a:round/>
+          </a:ln>
+        </p:spPr>
+        <p:style>
+          <a:lnRef idx="0"/>
+          <a:fillRef idx="0"/>
+          <a:effectRef idx="0"/>
+          <a:fontRef idx="minor"/>
+        </p:style>
+        <p:txBody>
+          <a:bodyPr wrap="none" lIns="88200" tIns="43200" rIns="88200" bIns="43200" anchor="t">
+            <a:noAutofit/>
+          </a:bodyPr>
+          <a:p>
+            <a:endParaRPr lang="en-US" sz="1800" b="0" u="none" strike="noStrike">
+              <a:solidFill>
+                <a:srgbClr val="000000"/>
+              </a:solidFill>
+              <a:effectLst/>
+              <a:uFillTx/>
+              <a:latin typeface="Times New Roman"/>
+            </a:endParaRPr>
+          </a:p>
+        </p:txBody>
+      </p:sp>
+      <p:sp>
+        <p:nvSpPr>
+          <p:cNvPr id="73" name=""/>
+          <p:cNvSpPr/>
+          <p:nvPr/>
+        </p:nvSpPr>
+        <p:spPr>
+          <a:xfrm>
+            <a:off x="948960" y="5220000"/>
+            <a:ext cx="179280" cy="179280"/>
+          </a:xfrm>
+          <a:prstGeom prst="ellipse">
+            <a:avLst/>
+          </a:prstGeom>
+          <a:solidFill>
+            <a:srgbClr val="DEE6EF"/>
+          </a:solidFill>
+          <a:ln w="21600">
+            <a:solidFill>
+              <a:srgbClr val="2A6099"/>
+            </a:solidFill>
+            <a:round/>
+          </a:ln>
+        </p:spPr>
+        <p:style>
+          <a:lnRef idx="0"/>
+          <a:fillRef idx="0"/>
+          <a:effectRef idx="0"/>
+          <a:fontRef idx="minor"/>
+        </p:style>
+        <p:txBody>
+          <a:bodyPr wrap="none" lIns="89640" tIns="46800" rIns="89640" bIns="46800" anchor="t">
+            <a:noAutofit/>
+          </a:bodyPr>
+          <a:p>
+            <a:endParaRPr lang="en-US" sz="1800" b="0" u="none" strike="noStrike">
+              <a:solidFill>
+                <a:srgbClr val="000000"/>
+              </a:solidFill>
+              <a:effectLst/>
+              <a:uFillTx/>
+              <a:latin typeface="Times New Roman"/>
+            </a:endParaRPr>
+          </a:p>
+        </p:txBody>
+      </p:sp>
+      <p:sp>
+        <p:nvSpPr>
+          <p:cNvPr id="72" name=""/>
+          <p:cNvSpPr/>
+          <p:nvPr/>
+        </p:nvSpPr>
+        <p:spPr>
+          <a:xfrm>
+            <a:off x="671040" y="5220000"/>
+            <a:ext cx="179280" cy="179280"/>
+          </a:xfrm>
+          <a:prstGeom prst="ellipse">
+            <a:avLst/>
+          </a:prstGeom>
+          <a:solidFill>
+            <a:srgbClr val="CCADA5"/>
+          </a:solidFill>
+          <a:ln w="14400">
+            <a:solidFill>
+              <a:srgbClr val="FF4000"/>
+            </a:solidFill>
+            <a:round/>
+          </a:ln>
+        </p:spPr>
+        <p:style>
+          <a:lnRef idx="0"/>
+          <a:fillRef idx="0"/>
+          <a:effectRef idx="0"/>
+          <a:fontRef idx="minor"/>
+        </p:style>
+        <p:txBody>
+          <a:bodyPr wrap="none" lIns="88200" tIns="43200" rIns="88200" bIns="43200" anchor="t">
+            <a:noAutofit/>
+          </a:bodyPr>
+          <a:p>
+            <a:endParaRPr lang="en-US" sz="1800" b="0" u="none" strike="noStrike">
+              <a:solidFill>
+                <a:srgbClr val="000000"/>
+              </a:solidFill>
+              <a:effectLst/>
+              <a:uFillTx/>
+              <a:latin typeface="Times New Roman"/>
+            </a:endParaRPr>
+          </a:p>
+        </p:txBody>
+      </p:sp>
+      <p:sp>
+        <p:nvSpPr>
+          <p:cNvPr id="75" name=""/>
+          <p:cNvSpPr/>
+          <p:nvPr/>
+        </p:nvSpPr>
+        <p:spPr>
+          <a:xfrm flipH="1">
+            <a:off x="1172520" y="5436000"/>
+            <a:ext cx="179280" cy="179280"/>
+          </a:xfrm>
+          <a:prstGeom prst="ellipse">
+            <a:avLst/>
+          </a:prstGeom>
+          <a:solidFill>
+            <a:srgbClr val="D3DAE3"/>
+          </a:solidFill>
+          <a:ln w="19800">
+            <a:solidFill>
+              <a:srgbClr val="2A6099"/>
+            </a:solidFill>
+            <a:round/>
+          </a:ln>
+        </p:spPr>
+        <p:style>
+          <a:lnRef idx="0"/>
+          <a:fillRef idx="0"/>
+          <a:effectRef idx="0"/>
+          <a:fontRef idx="minor"/>
+        </p:style>
+        <p:txBody>
+          <a:bodyPr wrap="none" lIns="89640" tIns="45000" rIns="89640" bIns="45000" anchor="t">
+            <a:noAutofit/>
+          </a:bodyPr>
+          <a:p>
+            <a:endParaRPr lang="en-US" sz="1800" b="0" u="none" strike="noStrike">
+              <a:solidFill>
+                <a:srgbClr val="000000"/>
+              </a:solidFill>
+              <a:effectLst/>
+              <a:uFillTx/>
+              <a:latin typeface="Times New Roman"/>
+            </a:endParaRPr>
+          </a:p>
+        </p:txBody>
+      </p:sp>
+      <p:sp>
+        <p:nvSpPr>
+          <p:cNvPr id="76" name=""/>
+          <p:cNvSpPr/>
+          <p:nvPr/>
+        </p:nvSpPr>
+        <p:spPr>
+          <a:xfrm flipH="1">
+            <a:off x="444600" y="5436000"/>
+            <a:ext cx="179280" cy="179280"/>
+          </a:xfrm>
+          <a:prstGeom prst="ellipse">
+            <a:avLst/>
+          </a:prstGeom>
+          <a:solidFill>
+            <a:srgbClr val="D9B8AF"/>
+          </a:solidFill>
+          <a:ln w="16200">
+            <a:solidFill>
+              <a:srgbClr val="FF4000"/>
+            </a:solidFill>
+            <a:round/>
+          </a:ln>
+        </p:spPr>
+        <p:style>
+          <a:lnRef idx="0"/>
+          <a:fillRef idx="0"/>
+          <a:effectRef idx="0"/>
+          <a:fontRef idx="minor"/>
+        </p:style>
+        <p:txBody>
+          <a:bodyPr wrap="none" lIns="89280" tIns="44280" rIns="89280" bIns="44280" anchor="t">
+            <a:noAutofit/>
+          </a:bodyPr>
+          <a:p>
+            <a:endParaRPr lang="en-US" sz="1800" b="0" u="none" strike="noStrike">
+              <a:solidFill>
+                <a:srgbClr val="000000"/>
+              </a:solidFill>
+              <a:effectLst/>
+              <a:uFillTx/>
+              <a:latin typeface="Times New Roman"/>
+            </a:endParaRPr>
+          </a:p>
+        </p:txBody>
+      </p:sp>
+      <p:sp>
+        <p:nvSpPr>
+          <p:cNvPr id="78" name=""/>
+          <p:cNvSpPr/>
+          <p:nvPr/>
+        </p:nvSpPr>
+        <p:spPr>
+          <a:xfrm flipH="1">
+            <a:off x="1258560" y="5652000"/>
+            <a:ext cx="179280" cy="179280"/>
+          </a:xfrm>
+          <a:prstGeom prst="ellipse">
+            <a:avLst/>
+          </a:prstGeom>
+          <a:solidFill>
+            <a:srgbClr val="C7CED6"/>
+          </a:solidFill>
+          <a:ln w="18000">
+            <a:solidFill>
+              <a:srgbClr val="2A6099"/>
+            </a:solidFill>
+            <a:round/>
+          </a:ln>
+        </p:spPr>
+        <p:style>
+          <a:lnRef idx="0"/>
+          <a:fillRef idx="0"/>
+          <a:effectRef idx="0"/>
+          <a:fontRef idx="minor"/>
+        </p:style>
+        <p:txBody>
+          <a:bodyPr wrap="none" lIns="89640" tIns="45000" rIns="89640" bIns="45000" anchor="t">
+            <a:noAutofit/>
+          </a:bodyPr>
+          <a:p>
+            <a:endParaRPr lang="en-US" sz="1800" b="0" u="none" strike="noStrike">
+              <a:solidFill>
+                <a:srgbClr val="000000"/>
+              </a:solidFill>
+              <a:effectLst/>
+              <a:uFillTx/>
+              <a:latin typeface="Times New Roman"/>
+            </a:endParaRPr>
+          </a:p>
+        </p:txBody>
+      </p:sp>
+      <p:sp>
+        <p:nvSpPr>
+          <p:cNvPr id="79" name=""/>
+          <p:cNvSpPr/>
+          <p:nvPr/>
+        </p:nvSpPr>
+        <p:spPr>
+          <a:xfrm flipH="1">
+            <a:off x="358560" y="5652000"/>
+            <a:ext cx="179280" cy="179280"/>
+          </a:xfrm>
+          <a:prstGeom prst="ellipse">
+            <a:avLst/>
+          </a:prstGeom>
+          <a:solidFill>
+            <a:srgbClr val="E6C2B9"/>
+          </a:solidFill>
+          <a:ln w="18000">
+            <a:solidFill>
+              <a:srgbClr val="FF4000"/>
+            </a:solidFill>
+            <a:round/>
+          </a:ln>
+        </p:spPr>
+        <p:style>
+          <a:lnRef idx="0"/>
+          <a:fillRef idx="0"/>
+          <a:effectRef idx="0"/>
+          <a:fontRef idx="minor"/>
+        </p:style>
+        <p:txBody>
+          <a:bodyPr wrap="none" lIns="89640" tIns="45000" rIns="89640" bIns="45000" anchor="t">
+            <a:noAutofit/>
+          </a:bodyPr>
+          <a:p>
+            <a:endParaRPr lang="en-US" sz="1800" b="0" u="none" strike="noStrike">
+              <a:solidFill>
+                <a:srgbClr val="000000"/>
+              </a:solidFill>
+              <a:effectLst/>
+              <a:uFillTx/>
+              <a:latin typeface="Times New Roman"/>
+            </a:endParaRPr>
+          </a:p>
+        </p:txBody>
+      </p:sp>
+      <p:sp>
+        <p:nvSpPr>
+          <p:cNvPr id="82" name="PlaceHolder 1"/>
           <p:cNvSpPr>
             <a:spLocks noGrp="1"/>
           </p:cNvSpPr>
@@ -3570,8 +3748,8 @@
         </p:nvSpPr>
         <p:spPr>
           <a:xfrm>
-            <a:off x="1620000" y="216000"/>
-            <a:ext cx="8099640" cy="935640"/>
+            <a:off x="1620000" y="432000"/>
+            <a:ext cx="8099280" cy="503280"/>
           </a:xfrm>
           <a:prstGeom prst="rect">
             <a:avLst/>
@@ -3583,10 +3761,10 @@
         </p:spPr>
         <p:txBody>
           <a:bodyPr lIns="0" tIns="0" rIns="0" bIns="0" anchor="ctr">
-            <a:noAutofit/>
+            <a:spAutoFit/>
           </a:bodyPr>
           <a:lstStyle>
-            <a:lvl1pPr indent="0" algn="ctr">
+            <a:lvl1pPr indent="0" algn="l">
               <a:buNone/>
               <a:tabLst>
                 <a:tab pos="0" algn="l"/>
@@ -3602,7 +3780,7 @@
             </a:lvl1pPr>
           </a:lstStyle>
           <a:p>
-            <a:pPr indent="0" algn="ctr">
+            <a:pPr indent="0" algn="l">
               <a:buNone/>
               <a:tabLst>
                 <a:tab pos="0" algn="l"/>
@@ -3632,7 +3810,7 @@
       </p:sp>
       <p:sp>
         <p:nvSpPr>
-          <p:cNvPr id="85" name="PlaceHolder 2"/>
+          <p:cNvPr id="83" name="PlaceHolder 2"/>
           <p:cNvSpPr>
             <a:spLocks noGrp="1"/>
           </p:cNvSpPr>
@@ -3643,7 +3821,7 @@
         <p:spPr>
           <a:xfrm>
             <a:off x="1620000" y="1368000"/>
-            <a:ext cx="8099640" cy="3287880"/>
+            <a:ext cx="8099280" cy="3287520"/>
           </a:xfrm>
           <a:prstGeom prst="rect">
             <a:avLst/>
@@ -4020,7 +4198,7 @@
       </p:sp>
       <p:sp>
         <p:nvSpPr>
-          <p:cNvPr id="86" name="PlaceHolder 3"/>
+          <p:cNvPr id="84" name="PlaceHolder 3"/>
           <p:cNvSpPr>
             <a:spLocks noGrp="1"/>
           </p:cNvSpPr>
@@ -4031,7 +4209,7 @@
         <p:spPr>
           <a:xfrm>
             <a:off x="3987000" y="5164920"/>
-            <a:ext cx="3194640" cy="390240"/>
+            <a:ext cx="3194280" cy="389880"/>
           </a:xfrm>
           <a:prstGeom prst="rect">
             <a:avLst/>
@@ -4098,7 +4276,7 @@
       </p:sp>
       <p:sp>
         <p:nvSpPr>
-          <p:cNvPr id="87" name="PlaceHolder 4"/>
+          <p:cNvPr id="85" name="PlaceHolder 4"/>
           <p:cNvSpPr>
             <a:spLocks noGrp="1"/>
           </p:cNvSpPr>
@@ -4109,7 +4287,7 @@
         <p:spPr>
           <a:xfrm>
             <a:off x="7227000" y="5164920"/>
-            <a:ext cx="2347920" cy="390240"/>
+            <a:ext cx="2347560" cy="389880"/>
           </a:xfrm>
           <a:prstGeom prst="rect">
             <a:avLst/>
@@ -4152,7 +4330,7 @@
                 <a:tab pos="0" algn="l"/>
               </a:tabLst>
             </a:pPr>
-            <a:fld id="{C36C8871-FAA8-46A6-B74A-5D8F6BCB92BF}" type="slidenum">
+            <a:fld id="{FC34D1F8-C9AE-4646-9E28-EFD54BF58CAE}" type="slidenum">
               <a:rPr lang="en-US" sz="1400" b="0" u="none" strike="noStrike">
                 <a:solidFill>
                   <a:srgbClr val="000000"/>
@@ -4176,7 +4354,7 @@
       </p:sp>
       <p:sp>
         <p:nvSpPr>
-          <p:cNvPr id="88" name="PlaceHolder 5"/>
+          <p:cNvPr id="86" name="PlaceHolder 5"/>
           <p:cNvSpPr>
             <a:spLocks noGrp="1"/>
           </p:cNvSpPr>
@@ -4187,7 +4365,7 @@
         <p:spPr>
           <a:xfrm>
             <a:off x="1584000" y="5164920"/>
-            <a:ext cx="2347920" cy="390240"/>
+            <a:ext cx="2347560" cy="389880"/>
           </a:xfrm>
           <a:prstGeom prst="rect">
             <a:avLst/>
@@ -4245,6 +4423,7 @@
   <p:clrMap bg1="lt1" tx1="dk1" bg2="lt2" tx2="dk2" accent1="accent1" accent2="accent2" accent3="accent3" accent4="accent4" accent5="accent5" accent6="accent6" hlink="hlink" folHlink="folHlink"/>
   <p:sldLayoutIdLst>
     <p:sldLayoutId id="2147483649" r:id="rId2"/>
+    <p:sldLayoutId id="2147483650" r:id="rId3"/>
   </p:sldLayoutIdLst>
 </p:sldMaster>
 </file>
@@ -4274,10 +4453,10 @@
         </p:nvGrpSpPr>
         <p:grpSpPr>
           <a:xfrm>
-            <a:off x="358920" y="36000"/>
-            <a:ext cx="1080720" cy="5795640"/>
-            <a:chOff x="358920" y="36000"/>
-            <a:chExt cx="1080720" cy="5795640"/>
+            <a:off x="358560" y="36000"/>
+            <a:ext cx="1080720" cy="5795280"/>
+            <a:chOff x="358560" y="36000"/>
+            <a:chExt cx="1080720" cy="5795280"/>
           </a:xfrm>
         </p:grpSpPr>
         <p:cxnSp>
@@ -4291,8 +4470,8 @@
           </p:nvCxnSpPr>
           <p:spPr>
             <a:xfrm>
-              <a:off x="625680" y="126000"/>
-              <a:ext cx="548640" cy="360"/>
+              <a:off x="625320" y="125640"/>
+              <a:ext cx="549000" cy="360"/>
             </a:xfrm>
             <a:prstGeom prst="bentConnector2">
               <a:avLst/>
@@ -4316,8 +4495,8 @@
           </p:nvCxnSpPr>
           <p:spPr>
             <a:xfrm>
-              <a:off x="539640" y="342000"/>
-              <a:ext cx="720720" cy="360"/>
+              <a:off x="539280" y="341640"/>
+              <a:ext cx="721080" cy="360"/>
             </a:xfrm>
             <a:prstGeom prst="bentConnector2">
               <a:avLst/>
@@ -4341,8 +4520,8 @@
           </p:nvCxnSpPr>
           <p:spPr>
             <a:xfrm>
-              <a:off x="625680" y="558000"/>
-              <a:ext cx="548640" cy="360"/>
+              <a:off x="625320" y="557640"/>
+              <a:ext cx="549000" cy="360"/>
             </a:xfrm>
             <a:prstGeom prst="bentConnector2">
               <a:avLst/>
@@ -4366,8 +4545,8 @@
           </p:nvCxnSpPr>
           <p:spPr>
             <a:xfrm>
-              <a:off x="850680" y="774000"/>
-              <a:ext cx="98640" cy="360"/>
+              <a:off x="850320" y="773640"/>
+              <a:ext cx="99000" cy="360"/>
             </a:xfrm>
             <a:prstGeom prst="bentConnector2">
               <a:avLst/>
@@ -4391,8 +4570,8 @@
           </p:nvCxnSpPr>
           <p:spPr>
             <a:xfrm>
-              <a:off x="850680" y="990000"/>
-              <a:ext cx="98640" cy="360"/>
+              <a:off x="850320" y="989640"/>
+              <a:ext cx="99000" cy="360"/>
             </a:xfrm>
             <a:prstGeom prst="bentConnector2">
               <a:avLst/>
@@ -4416,11 +4595,15 @@
           </p:nvCxnSpPr>
           <p:spPr>
             <a:xfrm rot="10800000">
-              <a:off x="624240" y="1206000"/>
-              <a:ext cx="548640" cy="360"/>
+              <a:off x="623880" y="1205640"/>
+              <a:ext cx="549000" cy="360"/>
             </a:xfrm>
-            <a:prstGeom prst="bentConnector2">
-              <a:avLst/>
+            <a:prstGeom prst="bentConnector5">
+              <a:avLst>
+                <a:gd name="adj1" fmla="val 17322"/>
+                <a:gd name="adj2" fmla="val -24900000"/>
+                <a:gd name="adj3" fmla="val 132677"/>
+              </a:avLst>
             </a:prstGeom>
             <a:ln w="18000">
               <a:solidFill>
@@ -4441,11 +4624,15 @@
           </p:nvCxnSpPr>
           <p:spPr>
             <a:xfrm rot="10800000">
-              <a:off x="538200" y="1422000"/>
-              <a:ext cx="720720" cy="360"/>
+              <a:off x="537840" y="1421640"/>
+              <a:ext cx="721080" cy="360"/>
             </a:xfrm>
-            <a:prstGeom prst="bentConnector2">
-              <a:avLst/>
+            <a:prstGeom prst="bentConnector5">
+              <a:avLst>
+                <a:gd name="adj1" fmla="val 25124"/>
+                <a:gd name="adj2" fmla="val -24900000"/>
+                <a:gd name="adj3" fmla="val 124875"/>
+              </a:avLst>
             </a:prstGeom>
             <a:ln w="18000">
               <a:solidFill>
@@ -4466,11 +4653,15 @@
           </p:nvCxnSpPr>
           <p:spPr>
             <a:xfrm rot="10800000">
-              <a:off x="624240" y="1638000"/>
-              <a:ext cx="548640" cy="360"/>
+              <a:off x="623880" y="1637640"/>
+              <a:ext cx="549000" cy="360"/>
             </a:xfrm>
-            <a:prstGeom prst="bentConnector2">
-              <a:avLst/>
+            <a:prstGeom prst="bentConnector5">
+              <a:avLst>
+                <a:gd name="adj1" fmla="val 17322"/>
+                <a:gd name="adj2" fmla="val -24900000"/>
+                <a:gd name="adj3" fmla="val 132677"/>
+              </a:avLst>
             </a:prstGeom>
             <a:ln w="18000">
               <a:solidFill>
@@ -4490,12 +4681,16 @@
             <p:nvPr/>
           </p:nvCxnSpPr>
           <p:spPr>
-            <a:xfrm rot="10800000">
-              <a:off x="849240" y="1854000"/>
-              <a:ext cx="98640" cy="360"/>
+            <a:xfrm>
+              <a:off x="848880" y="1853640"/>
+              <a:ext cx="99000" cy="360"/>
             </a:xfrm>
-            <a:prstGeom prst="bentConnector2">
-              <a:avLst/>
+            <a:prstGeom prst="bentConnector5">
+              <a:avLst>
+                <a:gd name="adj1" fmla="val -131751"/>
+                <a:gd name="adj2" fmla="val -24900000"/>
+                <a:gd name="adj3" fmla="val 281751"/>
+              </a:avLst>
             </a:prstGeom>
             <a:ln w="18000">
               <a:solidFill>
@@ -4515,12 +4710,16 @@
             <p:nvPr/>
           </p:nvCxnSpPr>
           <p:spPr>
-            <a:xfrm rot="10800000">
-              <a:off x="849240" y="2070000"/>
-              <a:ext cx="98640" cy="360"/>
+            <a:xfrm>
+              <a:off x="848880" y="2069640"/>
+              <a:ext cx="99000" cy="360"/>
             </a:xfrm>
-            <a:prstGeom prst="bentConnector2">
-              <a:avLst/>
+            <a:prstGeom prst="bentConnector5">
+              <a:avLst>
+                <a:gd name="adj1" fmla="val -131751"/>
+                <a:gd name="adj2" fmla="val -24900000"/>
+                <a:gd name="adj3" fmla="val 281751"/>
+              </a:avLst>
             </a:prstGeom>
             <a:ln w="18000">
               <a:solidFill>
@@ -4541,8 +4740,8 @@
           </p:nvCxnSpPr>
           <p:spPr>
             <a:xfrm>
-              <a:off x="625680" y="2286000"/>
-              <a:ext cx="548640" cy="360"/>
+              <a:off x="625320" y="2285640"/>
+              <a:ext cx="549000" cy="360"/>
             </a:xfrm>
             <a:prstGeom prst="bentConnector2">
               <a:avLst/>
@@ -4566,8 +4765,8 @@
           </p:nvCxnSpPr>
           <p:spPr>
             <a:xfrm>
-              <a:off x="539640" y="2502000"/>
-              <a:ext cx="720720" cy="360"/>
+              <a:off x="539280" y="2501640"/>
+              <a:ext cx="721080" cy="360"/>
             </a:xfrm>
             <a:prstGeom prst="bentConnector2">
               <a:avLst/>
@@ -4591,8 +4790,8 @@
           </p:nvCxnSpPr>
           <p:spPr>
             <a:xfrm>
-              <a:off x="625680" y="2718000"/>
-              <a:ext cx="548640" cy="360"/>
+              <a:off x="625320" y="2717640"/>
+              <a:ext cx="549000" cy="360"/>
             </a:xfrm>
             <a:prstGeom prst="bentConnector2">
               <a:avLst/>
@@ -4616,8 +4815,8 @@
           </p:nvCxnSpPr>
           <p:spPr>
             <a:xfrm>
-              <a:off x="850680" y="2934000"/>
-              <a:ext cx="98640" cy="360"/>
+              <a:off x="850320" y="2933640"/>
+              <a:ext cx="99000" cy="360"/>
             </a:xfrm>
             <a:prstGeom prst="bentConnector2">
               <a:avLst/>
@@ -4641,8 +4840,8 @@
           </p:nvCxnSpPr>
           <p:spPr>
             <a:xfrm>
-              <a:off x="850680" y="3150000"/>
-              <a:ext cx="98640" cy="360"/>
+              <a:off x="850320" y="3149640"/>
+              <a:ext cx="99000" cy="360"/>
             </a:xfrm>
             <a:prstGeom prst="bentConnector2">
               <a:avLst/>
@@ -4666,11 +4865,15 @@
           </p:nvCxnSpPr>
           <p:spPr>
             <a:xfrm rot="10800000">
-              <a:off x="624240" y="3366000"/>
-              <a:ext cx="548640" cy="360"/>
+              <a:off x="623880" y="3365640"/>
+              <a:ext cx="549000" cy="360"/>
             </a:xfrm>
-            <a:prstGeom prst="bentConnector2">
-              <a:avLst/>
+            <a:prstGeom prst="bentConnector5">
+              <a:avLst>
+                <a:gd name="adj1" fmla="val 17322"/>
+                <a:gd name="adj2" fmla="val -24900000"/>
+                <a:gd name="adj3" fmla="val 132677"/>
+              </a:avLst>
             </a:prstGeom>
             <a:ln w="18000">
               <a:solidFill>
@@ -4691,11 +4894,15 @@
           </p:nvCxnSpPr>
           <p:spPr>
             <a:xfrm rot="10800000">
-              <a:off x="538200" y="3582000"/>
-              <a:ext cx="720720" cy="360"/>
+              <a:off x="537840" y="3581640"/>
+              <a:ext cx="721080" cy="360"/>
             </a:xfrm>
-            <a:prstGeom prst="bentConnector2">
-              <a:avLst/>
+            <a:prstGeom prst="bentConnector5">
+              <a:avLst>
+                <a:gd name="adj1" fmla="val 25124"/>
+                <a:gd name="adj2" fmla="val -24900000"/>
+                <a:gd name="adj3" fmla="val 124875"/>
+              </a:avLst>
             </a:prstGeom>
             <a:ln w="18000">
               <a:solidFill>
@@ -4716,11 +4923,15 @@
           </p:nvCxnSpPr>
           <p:spPr>
             <a:xfrm rot="10800000">
-              <a:off x="624240" y="3798000"/>
-              <a:ext cx="548640" cy="360"/>
+              <a:off x="623880" y="3797640"/>
+              <a:ext cx="549000" cy="360"/>
             </a:xfrm>
-            <a:prstGeom prst="bentConnector2">
-              <a:avLst/>
+            <a:prstGeom prst="bentConnector5">
+              <a:avLst>
+                <a:gd name="adj1" fmla="val 17322"/>
+                <a:gd name="adj2" fmla="val -24900000"/>
+                <a:gd name="adj3" fmla="val 132677"/>
+              </a:avLst>
             </a:prstGeom>
             <a:ln w="18000">
               <a:solidFill>
@@ -4740,12 +4951,16 @@
             <p:nvPr/>
           </p:nvCxnSpPr>
           <p:spPr>
-            <a:xfrm rot="10800000">
-              <a:off x="849240" y="4014000"/>
-              <a:ext cx="98640" cy="360"/>
+            <a:xfrm>
+              <a:off x="848880" y="4013640"/>
+              <a:ext cx="99000" cy="360"/>
             </a:xfrm>
-            <a:prstGeom prst="bentConnector2">
-              <a:avLst/>
+            <a:prstGeom prst="bentConnector5">
+              <a:avLst>
+                <a:gd name="adj1" fmla="val -131751"/>
+                <a:gd name="adj2" fmla="val -24900000"/>
+                <a:gd name="adj3" fmla="val 281751"/>
+              </a:avLst>
             </a:prstGeom>
             <a:ln w="18000">
               <a:solidFill>
@@ -4765,12 +4980,16 @@
             <p:nvPr/>
           </p:nvCxnSpPr>
           <p:spPr>
-            <a:xfrm rot="10800000">
-              <a:off x="849240" y="4230000"/>
-              <a:ext cx="98640" cy="360"/>
+            <a:xfrm>
+              <a:off x="848880" y="4229640"/>
+              <a:ext cx="99000" cy="360"/>
             </a:xfrm>
-            <a:prstGeom prst="bentConnector2">
-              <a:avLst/>
+            <a:prstGeom prst="bentConnector5">
+              <a:avLst>
+                <a:gd name="adj1" fmla="val -131751"/>
+                <a:gd name="adj2" fmla="val -24900000"/>
+                <a:gd name="adj3" fmla="val 281751"/>
+              </a:avLst>
             </a:prstGeom>
             <a:ln w="18000">
               <a:solidFill>
@@ -4791,8 +5010,8 @@
           </p:nvCxnSpPr>
           <p:spPr>
             <a:xfrm>
-              <a:off x="625680" y="4446000"/>
-              <a:ext cx="548640" cy="360"/>
+              <a:off x="625320" y="4445640"/>
+              <a:ext cx="549000" cy="360"/>
             </a:xfrm>
             <a:prstGeom prst="bentConnector2">
               <a:avLst/>
@@ -4816,8 +5035,8 @@
           </p:nvCxnSpPr>
           <p:spPr>
             <a:xfrm>
-              <a:off x="539640" y="4662000"/>
-              <a:ext cx="720720" cy="360"/>
+              <a:off x="539280" y="4661640"/>
+              <a:ext cx="721080" cy="360"/>
             </a:xfrm>
             <a:prstGeom prst="bentConnector2">
               <a:avLst/>
@@ -4841,8 +5060,8 @@
           </p:nvCxnSpPr>
           <p:spPr>
             <a:xfrm>
-              <a:off x="625680" y="4878000"/>
-              <a:ext cx="548640" cy="360"/>
+              <a:off x="625320" y="4877640"/>
+              <a:ext cx="549000" cy="360"/>
             </a:xfrm>
             <a:prstGeom prst="bentConnector2">
               <a:avLst/>
@@ -4866,8 +5085,8 @@
           </p:nvCxnSpPr>
           <p:spPr>
             <a:xfrm>
-              <a:off x="850680" y="5094000"/>
-              <a:ext cx="98640" cy="360"/>
+              <a:off x="850320" y="5093640"/>
+              <a:ext cx="99000" cy="360"/>
             </a:xfrm>
             <a:prstGeom prst="bentConnector2">
               <a:avLst/>
@@ -4891,8 +5110,8 @@
           </p:nvCxnSpPr>
           <p:spPr>
             <a:xfrm>
-              <a:off x="850680" y="5310000"/>
-              <a:ext cx="98640" cy="360"/>
+              <a:off x="850320" y="5309640"/>
+              <a:ext cx="99000" cy="360"/>
             </a:xfrm>
             <a:prstGeom prst="bentConnector2">
               <a:avLst/>
@@ -4916,11 +5135,15 @@
           </p:nvCxnSpPr>
           <p:spPr>
             <a:xfrm rot="10800000">
-              <a:off x="624240" y="5526000"/>
-              <a:ext cx="548640" cy="360"/>
+              <a:off x="623880" y="5525640"/>
+              <a:ext cx="549000" cy="360"/>
             </a:xfrm>
-            <a:prstGeom prst="bentConnector2">
-              <a:avLst/>
+            <a:prstGeom prst="bentConnector5">
+              <a:avLst>
+                <a:gd name="adj1" fmla="val 17322"/>
+                <a:gd name="adj2" fmla="val -24900000"/>
+                <a:gd name="adj3" fmla="val 132677"/>
+              </a:avLst>
             </a:prstGeom>
             <a:ln w="18000">
               <a:solidFill>
@@ -4941,11 +5164,15 @@
           </p:nvCxnSpPr>
           <p:spPr>
             <a:xfrm rot="10800000">
-              <a:off x="538200" y="5742000"/>
-              <a:ext cx="720720" cy="360"/>
+              <a:off x="537840" y="5741640"/>
+              <a:ext cx="721080" cy="360"/>
             </a:xfrm>
-            <a:prstGeom prst="bentConnector2">
-              <a:avLst/>
+            <a:prstGeom prst="bentConnector5">
+              <a:avLst>
+                <a:gd name="adj1" fmla="val 25124"/>
+                <a:gd name="adj2" fmla="val -24900000"/>
+                <a:gd name="adj3" fmla="val 124875"/>
+              </a:avLst>
             </a:prstGeom>
             <a:ln w="18000">
               <a:solidFill>
@@ -4964,7 +5191,7 @@
           <p:spPr>
             <a:xfrm>
               <a:off x="446040" y="36000"/>
-              <a:ext cx="179640" cy="179640"/>
+              <a:ext cx="179280" cy="179280"/>
             </a:xfrm>
             <a:prstGeom prst="ellipse">
               <a:avLst/>
@@ -5010,7 +5237,7 @@
           <p:spPr>
             <a:xfrm>
               <a:off x="1173960" y="36000"/>
-              <a:ext cx="179640" cy="179640"/>
+              <a:ext cx="179280" cy="179280"/>
             </a:xfrm>
             <a:prstGeom prst="ellipse">
               <a:avLst/>
@@ -5032,7 +5259,7 @@
             <a:fontRef idx="minor"/>
           </p:style>
           <p:txBody>
-            <a:bodyPr wrap="none" lIns="90000" tIns="45000" rIns="90000" bIns="45000" anchor="t">
+            <a:bodyPr wrap="none" lIns="89640" tIns="45000" rIns="89640" bIns="45000" anchor="t">
               <a:noAutofit/>
             </a:bodyPr>
             <a:p>
@@ -5056,7 +5283,7 @@
           <p:spPr>
             <a:xfrm>
               <a:off x="360000" y="252000"/>
-              <a:ext cx="179640" cy="179640"/>
+              <a:ext cx="179280" cy="179280"/>
             </a:xfrm>
             <a:prstGeom prst="ellipse">
               <a:avLst/>
@@ -5078,7 +5305,7 @@
             <a:fontRef idx="minor"/>
           </p:style>
           <p:txBody>
-            <a:bodyPr wrap="none" lIns="90000" tIns="45000" rIns="90000" bIns="45000" anchor="t">
+            <a:bodyPr wrap="none" lIns="89640" tIns="45000" rIns="89640" bIns="45000" anchor="t">
               <a:noAutofit/>
             </a:bodyPr>
             <a:p>
@@ -5102,7 +5329,7 @@
           <p:spPr>
             <a:xfrm>
               <a:off x="1260000" y="252000"/>
-              <a:ext cx="179640" cy="179640"/>
+              <a:ext cx="179280" cy="179280"/>
             </a:xfrm>
             <a:prstGeom prst="ellipse">
               <a:avLst/>
@@ -5124,7 +5351,7 @@
             <a:fontRef idx="minor"/>
           </p:style>
           <p:txBody>
-            <a:bodyPr wrap="none" lIns="90000" tIns="45000" rIns="90000" bIns="45000" anchor="t">
+            <a:bodyPr wrap="none" lIns="89640" tIns="45000" rIns="89640" bIns="45000" anchor="t">
               <a:noAutofit/>
             </a:bodyPr>
             <a:p>
@@ -5148,7 +5375,7 @@
           <p:spPr>
             <a:xfrm>
               <a:off x="446040" y="468000"/>
-              <a:ext cx="179640" cy="179640"/>
+              <a:ext cx="179280" cy="179280"/>
             </a:xfrm>
             <a:prstGeom prst="ellipse">
               <a:avLst/>
@@ -5170,7 +5397,7 @@
             <a:fontRef idx="minor"/>
           </p:style>
           <p:txBody>
-            <a:bodyPr wrap="none" lIns="90000" tIns="45000" rIns="90000" bIns="45000" anchor="t">
+            <a:bodyPr wrap="none" lIns="89640" tIns="45000" rIns="89640" bIns="45000" anchor="t">
               <a:noAutofit/>
             </a:bodyPr>
             <a:p>
@@ -5194,7 +5421,7 @@
           <p:spPr>
             <a:xfrm>
               <a:off x="1173960" y="468000"/>
-              <a:ext cx="179640" cy="179640"/>
+              <a:ext cx="179280" cy="179280"/>
             </a:xfrm>
             <a:prstGeom prst="ellipse">
               <a:avLst/>
@@ -5240,7 +5467,7 @@
           <p:spPr>
             <a:xfrm>
               <a:off x="671040" y="684000"/>
-              <a:ext cx="179640" cy="179640"/>
+              <a:ext cx="179280" cy="179280"/>
             </a:xfrm>
             <a:prstGeom prst="ellipse">
               <a:avLst/>
@@ -5262,7 +5489,7 @@
             <a:fontRef idx="minor"/>
           </p:style>
           <p:txBody>
-            <a:bodyPr wrap="none" lIns="90000" tIns="46800" rIns="90000" bIns="46800" anchor="t">
+            <a:bodyPr wrap="none" lIns="89640" tIns="46800" rIns="89640" bIns="46800" anchor="t">
               <a:noAutofit/>
             </a:bodyPr>
             <a:p>
@@ -5286,7 +5513,7 @@
           <p:spPr>
             <a:xfrm>
               <a:off x="948960" y="684000"/>
-              <a:ext cx="179640" cy="179640"/>
+              <a:ext cx="179280" cy="179280"/>
             </a:xfrm>
             <a:prstGeom prst="ellipse">
               <a:avLst/>
@@ -5332,7 +5559,7 @@
           <p:spPr>
             <a:xfrm>
               <a:off x="948960" y="900000"/>
-              <a:ext cx="179640" cy="179640"/>
+              <a:ext cx="179280" cy="179280"/>
             </a:xfrm>
             <a:prstGeom prst="ellipse">
               <a:avLst/>
@@ -5354,7 +5581,7 @@
             <a:fontRef idx="minor"/>
           </p:style>
           <p:txBody>
-            <a:bodyPr wrap="none" lIns="90000" tIns="46800" rIns="90000" bIns="46800" anchor="t">
+            <a:bodyPr wrap="none" lIns="89640" tIns="46800" rIns="89640" bIns="46800" anchor="t">
               <a:noAutofit/>
             </a:bodyPr>
             <a:p>
@@ -5378,7 +5605,7 @@
           <p:spPr>
             <a:xfrm>
               <a:off x="671040" y="900000"/>
-              <a:ext cx="179640" cy="179640"/>
+              <a:ext cx="179280" cy="179280"/>
             </a:xfrm>
             <a:prstGeom prst="ellipse">
               <a:avLst/>
@@ -5424,7 +5651,7 @@
           <p:spPr>
             <a:xfrm flipH="1">
               <a:off x="1172520" y="1116000"/>
-              <a:ext cx="179640" cy="179640"/>
+              <a:ext cx="179280" cy="179280"/>
             </a:xfrm>
             <a:prstGeom prst="ellipse">
               <a:avLst/>
@@ -5446,7 +5673,7 @@
             <a:fontRef idx="minor"/>
           </p:style>
           <p:txBody>
-            <a:bodyPr wrap="none" lIns="90000" tIns="45000" rIns="90000" bIns="45000" anchor="t">
+            <a:bodyPr wrap="none" lIns="89640" tIns="45000" rIns="89640" bIns="45000" anchor="t">
               <a:noAutofit/>
             </a:bodyPr>
             <a:p>
@@ -5470,7 +5697,7 @@
           <p:spPr>
             <a:xfrm flipH="1">
               <a:off x="444600" y="1116000"/>
-              <a:ext cx="179640" cy="179640"/>
+              <a:ext cx="179280" cy="179280"/>
             </a:xfrm>
             <a:prstGeom prst="ellipse">
               <a:avLst/>
@@ -5516,7 +5743,7 @@
           <p:spPr>
             <a:xfrm flipH="1">
               <a:off x="1258560" y="1332000"/>
-              <a:ext cx="179640" cy="179640"/>
+              <a:ext cx="179280" cy="179280"/>
             </a:xfrm>
             <a:prstGeom prst="ellipse">
               <a:avLst/>
@@ -5538,7 +5765,7 @@
             <a:fontRef idx="minor"/>
           </p:style>
           <p:txBody>
-            <a:bodyPr wrap="none" lIns="90000" tIns="45000" rIns="90000" bIns="45000" anchor="t">
+            <a:bodyPr wrap="none" lIns="89640" tIns="45000" rIns="89640" bIns="45000" anchor="t">
               <a:noAutofit/>
             </a:bodyPr>
             <a:p>
@@ -5562,7 +5789,7 @@
           <p:spPr>
             <a:xfrm flipH="1">
               <a:off x="358560" y="1332000"/>
-              <a:ext cx="179640" cy="179640"/>
+              <a:ext cx="179280" cy="179280"/>
             </a:xfrm>
             <a:prstGeom prst="ellipse">
               <a:avLst/>
@@ -5584,7 +5811,7 @@
             <a:fontRef idx="minor"/>
           </p:style>
           <p:txBody>
-            <a:bodyPr wrap="none" lIns="90000" tIns="45000" rIns="90000" bIns="45000" anchor="t">
+            <a:bodyPr wrap="none" lIns="89640" tIns="45000" rIns="89640" bIns="45000" anchor="t">
               <a:noAutofit/>
             </a:bodyPr>
             <a:p>
@@ -5608,7 +5835,7 @@
           <p:spPr>
             <a:xfrm flipH="1">
               <a:off x="1172520" y="1548000"/>
-              <a:ext cx="179640" cy="179640"/>
+              <a:ext cx="179280" cy="179280"/>
             </a:xfrm>
             <a:prstGeom prst="ellipse">
               <a:avLst/>
@@ -5654,7 +5881,7 @@
           <p:spPr>
             <a:xfrm flipH="1">
               <a:off x="444600" y="1548000"/>
-              <a:ext cx="179640" cy="179640"/>
+              <a:ext cx="179280" cy="179280"/>
             </a:xfrm>
             <a:prstGeom prst="ellipse">
               <a:avLst/>
@@ -5676,7 +5903,7 @@
             <a:fontRef idx="minor"/>
           </p:style>
           <p:txBody>
-            <a:bodyPr wrap="none" lIns="90000" tIns="45000" rIns="90000" bIns="45000" anchor="t">
+            <a:bodyPr wrap="none" lIns="89640" tIns="45000" rIns="89640" bIns="45000" anchor="t">
               <a:noAutofit/>
             </a:bodyPr>
             <a:p>
@@ -5700,7 +5927,7 @@
           <p:spPr>
             <a:xfrm flipH="1">
               <a:off x="947520" y="1764000"/>
-              <a:ext cx="179640" cy="179640"/>
+              <a:ext cx="179280" cy="179280"/>
             </a:xfrm>
             <a:prstGeom prst="ellipse">
               <a:avLst/>
@@ -5746,7 +5973,7 @@
           <p:spPr>
             <a:xfrm flipH="1">
               <a:off x="669600" y="1764000"/>
-              <a:ext cx="179640" cy="179640"/>
+              <a:ext cx="179280" cy="179280"/>
             </a:xfrm>
             <a:prstGeom prst="ellipse">
               <a:avLst/>
@@ -5768,7 +5995,7 @@
             <a:fontRef idx="minor"/>
           </p:style>
           <p:txBody>
-            <a:bodyPr wrap="none" lIns="90000" tIns="46800" rIns="90000" bIns="46800" anchor="t">
+            <a:bodyPr wrap="none" lIns="89640" tIns="46800" rIns="89640" bIns="46800" anchor="t">
               <a:noAutofit/>
             </a:bodyPr>
             <a:p>
@@ -5792,7 +6019,7 @@
           <p:spPr>
             <a:xfrm flipH="1">
               <a:off x="669600" y="1980000"/>
-              <a:ext cx="179640" cy="179640"/>
+              <a:ext cx="179280" cy="179280"/>
             </a:xfrm>
             <a:prstGeom prst="ellipse">
               <a:avLst/>
@@ -5838,7 +6065,7 @@
           <p:spPr>
             <a:xfrm flipH="1">
               <a:off x="947520" y="1980000"/>
-              <a:ext cx="179640" cy="179640"/>
+              <a:ext cx="179280" cy="179280"/>
             </a:xfrm>
             <a:prstGeom prst="ellipse">
               <a:avLst/>
@@ -5860,7 +6087,7 @@
             <a:fontRef idx="minor"/>
           </p:style>
           <p:txBody>
-            <a:bodyPr wrap="none" lIns="90000" tIns="46800" rIns="90000" bIns="46800" anchor="t">
+            <a:bodyPr wrap="none" lIns="89640" tIns="46800" rIns="89640" bIns="46800" anchor="t">
               <a:noAutofit/>
             </a:bodyPr>
             <a:p>
@@ -5884,7 +6111,7 @@
           <p:spPr>
             <a:xfrm>
               <a:off x="446040" y="2196000"/>
-              <a:ext cx="179640" cy="179640"/>
+              <a:ext cx="179280" cy="179280"/>
             </a:xfrm>
             <a:prstGeom prst="ellipse">
               <a:avLst/>
@@ -5930,7 +6157,7 @@
           <p:spPr>
             <a:xfrm>
               <a:off x="1173960" y="2196000"/>
-              <a:ext cx="179640" cy="179640"/>
+              <a:ext cx="179280" cy="179280"/>
             </a:xfrm>
             <a:prstGeom prst="ellipse">
               <a:avLst/>
@@ -5952,7 +6179,7 @@
             <a:fontRef idx="minor"/>
           </p:style>
           <p:txBody>
-            <a:bodyPr wrap="none" lIns="90000" tIns="45000" rIns="90000" bIns="45000" anchor="t">
+            <a:bodyPr wrap="none" lIns="89640" tIns="45000" rIns="89640" bIns="45000" anchor="t">
               <a:noAutofit/>
             </a:bodyPr>
             <a:p>
@@ -5976,7 +6203,7 @@
           <p:spPr>
             <a:xfrm>
               <a:off x="360000" y="2412000"/>
-              <a:ext cx="179640" cy="179640"/>
+              <a:ext cx="179280" cy="179280"/>
             </a:xfrm>
             <a:prstGeom prst="ellipse">
               <a:avLst/>
@@ -5998,7 +6225,7 @@
             <a:fontRef idx="minor"/>
           </p:style>
           <p:txBody>
-            <a:bodyPr wrap="none" lIns="90000" tIns="45000" rIns="90000" bIns="45000" anchor="t">
+            <a:bodyPr wrap="none" lIns="89640" tIns="45000" rIns="89640" bIns="45000" anchor="t">
               <a:noAutofit/>
             </a:bodyPr>
             <a:p>
@@ -6022,7 +6249,7 @@
           <p:spPr>
             <a:xfrm>
               <a:off x="1260000" y="2412000"/>
-              <a:ext cx="179640" cy="179640"/>
+              <a:ext cx="179280" cy="179280"/>
             </a:xfrm>
             <a:prstGeom prst="ellipse">
               <a:avLst/>
@@ -6044,7 +6271,7 @@
             <a:fontRef idx="minor"/>
           </p:style>
           <p:txBody>
-            <a:bodyPr wrap="none" lIns="90000" tIns="45000" rIns="90000" bIns="45000" anchor="t">
+            <a:bodyPr wrap="none" lIns="89640" tIns="45000" rIns="89640" bIns="45000" anchor="t">
               <a:noAutofit/>
             </a:bodyPr>
             <a:p>
@@ -6068,7 +6295,7 @@
           <p:spPr>
             <a:xfrm>
               <a:off x="446040" y="2628000"/>
-              <a:ext cx="179640" cy="179640"/>
+              <a:ext cx="179280" cy="179280"/>
             </a:xfrm>
             <a:prstGeom prst="ellipse">
               <a:avLst/>
@@ -6090,7 +6317,7 @@
             <a:fontRef idx="minor"/>
           </p:style>
           <p:txBody>
-            <a:bodyPr wrap="none" lIns="90000" tIns="45000" rIns="90000" bIns="45000" anchor="t">
+            <a:bodyPr wrap="none" lIns="89640" tIns="45000" rIns="89640" bIns="45000" anchor="t">
               <a:noAutofit/>
             </a:bodyPr>
             <a:p>
@@ -6114,7 +6341,7 @@
           <p:spPr>
             <a:xfrm>
               <a:off x="1173960" y="2628000"/>
-              <a:ext cx="179640" cy="179640"/>
+              <a:ext cx="179280" cy="179280"/>
             </a:xfrm>
             <a:prstGeom prst="ellipse">
               <a:avLst/>
@@ -6160,7 +6387,7 @@
           <p:spPr>
             <a:xfrm>
               <a:off x="671040" y="2844000"/>
-              <a:ext cx="179640" cy="179640"/>
+              <a:ext cx="179280" cy="179280"/>
             </a:xfrm>
             <a:prstGeom prst="ellipse">
               <a:avLst/>
@@ -6182,7 +6409,7 @@
             <a:fontRef idx="minor"/>
           </p:style>
           <p:txBody>
-            <a:bodyPr wrap="none" lIns="90000" tIns="46800" rIns="90000" bIns="46800" anchor="t">
+            <a:bodyPr wrap="none" lIns="89640" tIns="46800" rIns="89640" bIns="46800" anchor="t">
               <a:noAutofit/>
             </a:bodyPr>
             <a:p>
@@ -6206,7 +6433,7 @@
           <p:spPr>
             <a:xfrm>
               <a:off x="948960" y="2844000"/>
-              <a:ext cx="179640" cy="179640"/>
+              <a:ext cx="179280" cy="179280"/>
             </a:xfrm>
             <a:prstGeom prst="ellipse">
               <a:avLst/>
@@ -6252,7 +6479,7 @@
           <p:spPr>
             <a:xfrm>
               <a:off x="948960" y="3060000"/>
-              <a:ext cx="179640" cy="179640"/>
+              <a:ext cx="179280" cy="179280"/>
             </a:xfrm>
             <a:prstGeom prst="ellipse">
               <a:avLst/>
@@ -6274,7 +6501,7 @@
             <a:fontRef idx="minor"/>
           </p:style>
           <p:txBody>
-            <a:bodyPr wrap="none" lIns="90000" tIns="46800" rIns="90000" bIns="46800" anchor="t">
+            <a:bodyPr wrap="none" lIns="89640" tIns="46800" rIns="89640" bIns="46800" anchor="t">
               <a:noAutofit/>
             </a:bodyPr>
             <a:p>
@@ -6298,7 +6525,7 @@
           <p:spPr>
             <a:xfrm>
               <a:off x="671040" y="3060000"/>
-              <a:ext cx="179640" cy="179640"/>
+              <a:ext cx="179280" cy="179280"/>
             </a:xfrm>
             <a:prstGeom prst="ellipse">
               <a:avLst/>
@@ -6344,7 +6571,7 @@
           <p:spPr>
             <a:xfrm flipH="1">
               <a:off x="1172520" y="3276000"/>
-              <a:ext cx="179640" cy="179640"/>
+              <a:ext cx="179280" cy="179280"/>
             </a:xfrm>
             <a:prstGeom prst="ellipse">
               <a:avLst/>
@@ -6366,7 +6593,7 @@
             <a:fontRef idx="minor"/>
           </p:style>
           <p:txBody>
-            <a:bodyPr wrap="none" lIns="90000" tIns="45000" rIns="90000" bIns="45000" anchor="t">
+            <a:bodyPr wrap="none" lIns="89640" tIns="45000" rIns="89640" bIns="45000" anchor="t">
               <a:noAutofit/>
             </a:bodyPr>
             <a:p>
@@ -6390,7 +6617,7 @@
           <p:spPr>
             <a:xfrm flipH="1">
               <a:off x="444600" y="3276000"/>
-              <a:ext cx="179640" cy="179640"/>
+              <a:ext cx="179280" cy="179280"/>
             </a:xfrm>
             <a:prstGeom prst="ellipse">
               <a:avLst/>
@@ -6436,7 +6663,7 @@
           <p:spPr>
             <a:xfrm flipH="1">
               <a:off x="1258560" y="3492000"/>
-              <a:ext cx="179640" cy="179640"/>
+              <a:ext cx="179280" cy="179280"/>
             </a:xfrm>
             <a:prstGeom prst="ellipse">
               <a:avLst/>
@@ -6458,7 +6685,7 @@
             <a:fontRef idx="minor"/>
           </p:style>
           <p:txBody>
-            <a:bodyPr wrap="none" lIns="90000" tIns="45000" rIns="90000" bIns="45000" anchor="t">
+            <a:bodyPr wrap="none" lIns="89640" tIns="45000" rIns="89640" bIns="45000" anchor="t">
               <a:noAutofit/>
             </a:bodyPr>
             <a:p>
@@ -6482,7 +6709,7 @@
           <p:spPr>
             <a:xfrm flipH="1">
               <a:off x="358560" y="3492000"/>
-              <a:ext cx="179640" cy="179640"/>
+              <a:ext cx="179280" cy="179280"/>
             </a:xfrm>
             <a:prstGeom prst="ellipse">
               <a:avLst/>
@@ -6504,7 +6731,7 @@
             <a:fontRef idx="minor"/>
           </p:style>
           <p:txBody>
-            <a:bodyPr wrap="none" lIns="90000" tIns="45000" rIns="90000" bIns="45000" anchor="t">
+            <a:bodyPr wrap="none" lIns="89640" tIns="45000" rIns="89640" bIns="45000" anchor="t">
               <a:noAutofit/>
             </a:bodyPr>
             <a:p>
@@ -6528,7 +6755,7 @@
           <p:spPr>
             <a:xfrm flipH="1">
               <a:off x="1172520" y="3708000"/>
-              <a:ext cx="179640" cy="179640"/>
+              <a:ext cx="179280" cy="179280"/>
             </a:xfrm>
             <a:prstGeom prst="ellipse">
               <a:avLst/>
@@ -6574,7 +6801,7 @@
           <p:spPr>
             <a:xfrm flipH="1">
               <a:off x="444600" y="3708000"/>
-              <a:ext cx="179640" cy="179640"/>
+              <a:ext cx="179280" cy="179280"/>
             </a:xfrm>
             <a:prstGeom prst="ellipse">
               <a:avLst/>
@@ -6596,7 +6823,7 @@
             <a:fontRef idx="minor"/>
           </p:style>
           <p:txBody>
-            <a:bodyPr wrap="none" lIns="90000" tIns="45000" rIns="90000" bIns="45000" anchor="t">
+            <a:bodyPr wrap="none" lIns="89640" tIns="45000" rIns="89640" bIns="45000" anchor="t">
               <a:noAutofit/>
             </a:bodyPr>
             <a:p>
@@ -6620,7 +6847,7 @@
           <p:spPr>
             <a:xfrm flipH="1">
               <a:off x="947520" y="3924000"/>
-              <a:ext cx="179640" cy="179640"/>
+              <a:ext cx="179280" cy="179280"/>
             </a:xfrm>
             <a:prstGeom prst="ellipse">
               <a:avLst/>
@@ -6666,7 +6893,7 @@
           <p:spPr>
             <a:xfrm flipH="1">
               <a:off x="669600" y="3924000"/>
-              <a:ext cx="179640" cy="179640"/>
+              <a:ext cx="179280" cy="179280"/>
             </a:xfrm>
             <a:prstGeom prst="ellipse">
               <a:avLst/>
@@ -6688,7 +6915,7 @@
             <a:fontRef idx="minor"/>
           </p:style>
           <p:txBody>
-            <a:bodyPr wrap="none" lIns="90000" tIns="46800" rIns="90000" bIns="46800" anchor="t">
+            <a:bodyPr wrap="none" lIns="89640" tIns="46800" rIns="89640" bIns="46800" anchor="t">
               <a:noAutofit/>
             </a:bodyPr>
             <a:p>
@@ -6712,7 +6939,7 @@
           <p:spPr>
             <a:xfrm flipH="1">
               <a:off x="669600" y="4140000"/>
-              <a:ext cx="179640" cy="179640"/>
+              <a:ext cx="179280" cy="179280"/>
             </a:xfrm>
             <a:prstGeom prst="ellipse">
               <a:avLst/>
@@ -6758,7 +6985,7 @@
           <p:spPr>
             <a:xfrm flipH="1">
               <a:off x="947520" y="4140000"/>
-              <a:ext cx="179640" cy="179640"/>
+              <a:ext cx="179280" cy="179280"/>
             </a:xfrm>
             <a:prstGeom prst="ellipse">
               <a:avLst/>
@@ -6780,7 +7007,7 @@
             <a:fontRef idx="minor"/>
           </p:style>
           <p:txBody>
-            <a:bodyPr wrap="none" lIns="90000" tIns="46800" rIns="90000" bIns="46800" anchor="t">
+            <a:bodyPr wrap="none" lIns="89640" tIns="46800" rIns="89640" bIns="46800" anchor="t">
               <a:noAutofit/>
             </a:bodyPr>
             <a:p>
@@ -6804,7 +7031,7 @@
           <p:spPr>
             <a:xfrm>
               <a:off x="446040" y="4356000"/>
-              <a:ext cx="179640" cy="179640"/>
+              <a:ext cx="179280" cy="179280"/>
             </a:xfrm>
             <a:prstGeom prst="ellipse">
               <a:avLst/>
@@ -6850,7 +7077,7 @@
           <p:spPr>
             <a:xfrm>
               <a:off x="1173960" y="4356000"/>
-              <a:ext cx="179640" cy="179640"/>
+              <a:ext cx="179280" cy="179280"/>
             </a:xfrm>
             <a:prstGeom prst="ellipse">
               <a:avLst/>
@@ -6872,7 +7099,7 @@
             <a:fontRef idx="minor"/>
           </p:style>
           <p:txBody>
-            <a:bodyPr wrap="none" lIns="90000" tIns="45000" rIns="90000" bIns="45000" anchor="t">
+            <a:bodyPr wrap="none" lIns="89640" tIns="45000" rIns="89640" bIns="45000" anchor="t">
               <a:noAutofit/>
             </a:bodyPr>
             <a:p>
@@ -6896,7 +7123,7 @@
           <p:spPr>
             <a:xfrm>
               <a:off x="360000" y="4572000"/>
-              <a:ext cx="179640" cy="179640"/>
+              <a:ext cx="179280" cy="179280"/>
             </a:xfrm>
             <a:prstGeom prst="ellipse">
               <a:avLst/>
@@ -6918,7 +7145,7 @@
             <a:fontRef idx="minor"/>
           </p:style>
           <p:txBody>
-            <a:bodyPr wrap="none" lIns="90000" tIns="45000" rIns="90000" bIns="45000" anchor="t">
+            <a:bodyPr wrap="none" lIns="89640" tIns="45000" rIns="89640" bIns="45000" anchor="t">
               <a:noAutofit/>
             </a:bodyPr>
             <a:p>
@@ -6942,7 +7169,7 @@
           <p:spPr>
             <a:xfrm>
               <a:off x="1260000" y="4572000"/>
-              <a:ext cx="179640" cy="179640"/>
+              <a:ext cx="179280" cy="179280"/>
             </a:xfrm>
             <a:prstGeom prst="ellipse">
               <a:avLst/>
@@ -6964,7 +7191,7 @@
             <a:fontRef idx="minor"/>
           </p:style>
           <p:txBody>
-            <a:bodyPr wrap="none" lIns="90000" tIns="45000" rIns="90000" bIns="45000" anchor="t">
+            <a:bodyPr wrap="none" lIns="89640" tIns="45000" rIns="89640" bIns="45000" anchor="t">
               <a:noAutofit/>
             </a:bodyPr>
             <a:p>
@@ -6988,7 +7215,7 @@
           <p:spPr>
             <a:xfrm>
               <a:off x="446040" y="4788000"/>
-              <a:ext cx="179640" cy="179640"/>
+              <a:ext cx="179280" cy="179280"/>
             </a:xfrm>
             <a:prstGeom prst="ellipse">
               <a:avLst/>
@@ -7010,7 +7237,7 @@
             <a:fontRef idx="minor"/>
           </p:style>
           <p:txBody>
-            <a:bodyPr wrap="none" lIns="90000" tIns="45000" rIns="90000" bIns="45000" anchor="t">
+            <a:bodyPr wrap="none" lIns="89640" tIns="45000" rIns="89640" bIns="45000" anchor="t">
               <a:noAutofit/>
             </a:bodyPr>
             <a:p>
@@ -7034,7 +7261,7 @@
           <p:spPr>
             <a:xfrm>
               <a:off x="1173960" y="4788000"/>
-              <a:ext cx="179640" cy="179640"/>
+              <a:ext cx="179280" cy="179280"/>
             </a:xfrm>
             <a:prstGeom prst="ellipse">
               <a:avLst/>
@@ -7080,7 +7307,7 @@
           <p:spPr>
             <a:xfrm>
               <a:off x="671040" y="5004000"/>
-              <a:ext cx="179640" cy="179640"/>
+              <a:ext cx="179280" cy="179280"/>
             </a:xfrm>
             <a:prstGeom prst="ellipse">
               <a:avLst/>
@@ -7102,7 +7329,7 @@
             <a:fontRef idx="minor"/>
           </p:style>
           <p:txBody>
-            <a:bodyPr wrap="none" lIns="90000" tIns="46800" rIns="90000" bIns="46800" anchor="t">
+            <a:bodyPr wrap="none" lIns="89640" tIns="46800" rIns="89640" bIns="46800" anchor="t">
               <a:noAutofit/>
             </a:bodyPr>
             <a:p>
@@ -7126,7 +7353,7 @@
           <p:spPr>
             <a:xfrm>
               <a:off x="948960" y="5004000"/>
-              <a:ext cx="179640" cy="179640"/>
+              <a:ext cx="179280" cy="179280"/>
             </a:xfrm>
             <a:prstGeom prst="ellipse">
               <a:avLst/>
@@ -7172,7 +7399,7 @@
           <p:spPr>
             <a:xfrm>
               <a:off x="948960" y="5220000"/>
-              <a:ext cx="179640" cy="179640"/>
+              <a:ext cx="179280" cy="179280"/>
             </a:xfrm>
             <a:prstGeom prst="ellipse">
               <a:avLst/>
@@ -7194,7 +7421,7 @@
             <a:fontRef idx="minor"/>
           </p:style>
           <p:txBody>
-            <a:bodyPr wrap="none" lIns="90000" tIns="46800" rIns="90000" bIns="46800" anchor="t">
+            <a:bodyPr wrap="none" lIns="89640" tIns="46800" rIns="89640" bIns="46800" anchor="t">
               <a:noAutofit/>
             </a:bodyPr>
             <a:p>
@@ -7218,7 +7445,7 @@
           <p:spPr>
             <a:xfrm>
               <a:off x="671040" y="5220000"/>
-              <a:ext cx="179640" cy="179640"/>
+              <a:ext cx="179280" cy="179280"/>
             </a:xfrm>
             <a:prstGeom prst="ellipse">
               <a:avLst/>
@@ -7264,7 +7491,7 @@
           <p:spPr>
             <a:xfrm flipH="1">
               <a:off x="1172520" y="5436000"/>
-              <a:ext cx="179640" cy="179640"/>
+              <a:ext cx="179280" cy="179280"/>
             </a:xfrm>
             <a:prstGeom prst="ellipse">
               <a:avLst/>
@@ -7286,7 +7513,7 @@
             <a:fontRef idx="minor"/>
           </p:style>
           <p:txBody>
-            <a:bodyPr wrap="none" lIns="90000" tIns="45000" rIns="90000" bIns="45000" anchor="t">
+            <a:bodyPr wrap="none" lIns="89640" tIns="45000" rIns="89640" bIns="45000" anchor="t">
               <a:noAutofit/>
             </a:bodyPr>
             <a:p>
@@ -7310,7 +7537,7 @@
           <p:spPr>
             <a:xfrm flipH="1">
               <a:off x="444600" y="5436000"/>
-              <a:ext cx="179640" cy="179640"/>
+              <a:ext cx="179280" cy="179280"/>
             </a:xfrm>
             <a:prstGeom prst="ellipse">
               <a:avLst/>
@@ -7356,7 +7583,7 @@
           <p:spPr>
             <a:xfrm flipH="1">
               <a:off x="1258560" y="5652000"/>
-              <a:ext cx="179640" cy="179640"/>
+              <a:ext cx="179280" cy="179280"/>
             </a:xfrm>
             <a:prstGeom prst="ellipse">
               <a:avLst/>
@@ -7378,7 +7605,7 @@
             <a:fontRef idx="minor"/>
           </p:style>
           <p:txBody>
-            <a:bodyPr wrap="none" lIns="90000" tIns="45000" rIns="90000" bIns="45000" anchor="t">
+            <a:bodyPr wrap="none" lIns="89640" tIns="45000" rIns="89640" bIns="45000" anchor="t">
               <a:noAutofit/>
             </a:bodyPr>
             <a:p>
@@ -7402,7 +7629,7 @@
           <p:spPr>
             <a:xfrm flipH="1">
               <a:off x="358560" y="5652000"/>
-              <a:ext cx="179640" cy="179640"/>
+              <a:ext cx="179280" cy="179280"/>
             </a:xfrm>
             <a:prstGeom prst="ellipse">
               <a:avLst/>
@@ -7424,7 +7651,7 @@
             <a:fontRef idx="minor"/>
           </p:style>
           <p:txBody>
-            <a:bodyPr wrap="none" lIns="90000" tIns="45000" rIns="90000" bIns="45000" anchor="t">
+            <a:bodyPr wrap="none" lIns="89640" tIns="45000" rIns="89640" bIns="45000" anchor="t">
               <a:noAutofit/>
             </a:bodyPr>
             <a:p>
@@ -7452,8 +7679,8 @@
         </p:nvSpPr>
         <p:spPr>
           <a:xfrm>
-            <a:off x="1620000" y="216000"/>
-            <a:ext cx="8099640" cy="935640"/>
+            <a:off x="1620000" y="432000"/>
+            <a:ext cx="8099280" cy="503280"/>
           </a:xfrm>
           <a:prstGeom prst="rect">
             <a:avLst/>
@@ -7465,10 +7692,10 @@
         </p:spPr>
         <p:txBody>
           <a:bodyPr lIns="0" tIns="0" rIns="0" bIns="0" anchor="ctr">
-            <a:noAutofit/>
+            <a:spAutoFit/>
           </a:bodyPr>
           <a:lstStyle>
-            <a:lvl1pPr indent="0" algn="ctr">
+            <a:lvl1pPr indent="0" algn="l">
               <a:buNone/>
               <a:tabLst>
                 <a:tab pos="0" algn="l"/>
@@ -7484,7 +7711,7 @@
             </a:lvl1pPr>
           </a:lstStyle>
           <a:p>
-            <a:pPr indent="0" algn="ctr">
+            <a:pPr indent="0" algn="l">
               <a:buNone/>
               <a:tabLst>
                 <a:tab pos="0" algn="l"/>
@@ -7525,7 +7752,7 @@
         <p:spPr>
           <a:xfrm>
             <a:off x="3987000" y="5164920"/>
-            <a:ext cx="3194640" cy="390240"/>
+            <a:ext cx="3194280" cy="389880"/>
           </a:xfrm>
           <a:prstGeom prst="rect">
             <a:avLst/>
@@ -7577,7 +7804,7 @@
                 <a:uFillTx/>
                 <a:latin typeface="Times New Roman"/>
               </a:rPr>
-              <a:t>&lt;footer&gt;</a:t>
+              <a:t> </a:t>
             </a:r>
             <a:endParaRPr lang="en-US" sz="1400" b="0" u="none" strike="noStrike">
               <a:solidFill>
@@ -7603,7 +7830,7 @@
         <p:spPr>
           <a:xfrm>
             <a:off x="7227000" y="5164920"/>
-            <a:ext cx="2347920" cy="390240"/>
+            <a:ext cx="2347560" cy="389880"/>
           </a:xfrm>
           <a:prstGeom prst="rect">
             <a:avLst/>
@@ -7646,7 +7873,7 @@
                 <a:tab pos="0" algn="l"/>
               </a:tabLst>
             </a:pPr>
-            <a:fld id="{6D2FE1B0-63E7-4F85-AFDE-C020D2A903CF}" type="slidenum">
+            <a:fld id="{B88C9089-ACC5-42D1-8B69-F82856E35ECE}" type="slidenum">
               <a:rPr lang="en-US" sz="1400" b="0" u="none" strike="noStrike">
                 <a:solidFill>
                   <a:srgbClr val="000000"/>
@@ -7655,7 +7882,7 @@
                 <a:uFillTx/>
                 <a:latin typeface="Times New Roman"/>
               </a:rPr>
-              <a:t>&lt;number&gt;</a:t>
+              <a:t>1</a:t>
             </a:fld>
             <a:endParaRPr lang="en-US" sz="1400" b="0" u="none" strike="noStrike">
               <a:solidFill>
@@ -7681,7 +7908,7 @@
         <p:spPr>
           <a:xfrm>
             <a:off x="1584000" y="5164920"/>
-            <a:ext cx="2347920" cy="390240"/>
+            <a:ext cx="2347560" cy="389880"/>
           </a:xfrm>
           <a:prstGeom prst="rect">
             <a:avLst/>
@@ -7721,7 +7948,7 @@
                 <a:uFillTx/>
                 <a:latin typeface="Times New Roman"/>
               </a:rPr>
-              <a:t>&lt;date/time&gt;</a:t>
+              <a:t> </a:t>
             </a:r>
             <a:endParaRPr lang="en-US" sz="1400" b="0" u="none" strike="noStrike">
               <a:solidFill>
@@ -8126,7 +8353,7 @@
   </p:cSld>
   <p:clrMap bg1="lt1" tx1="dk1" bg2="lt2" tx2="dk2" accent1="accent1" accent2="accent2" accent3="accent3" accent4="accent4" accent5="accent5" accent6="accent6" hlink="hlink" folHlink="folHlink"/>
   <p:sldLayoutIdLst>
-    <p:sldLayoutId id="2147483651" r:id="rId2"/>
+    <p:sldLayoutId id="2147483652" r:id="rId2"/>
   </p:sldLayoutIdLst>
 </p:sldMaster>
 </file>
@@ -8161,7 +8388,7 @@
         <p:spPr>
           <a:xfrm>
             <a:off x="1620000" y="216000"/>
-            <a:ext cx="8099640" cy="935640"/>
+            <a:ext cx="8099280" cy="935280"/>
           </a:xfrm>
           <a:prstGeom prst="rect">
             <a:avLst/>
@@ -8219,8 +8446,8 @@
         </p:nvSpPr>
         <p:spPr>
           <a:xfrm>
-            <a:off x="2644200" y="2285640"/>
-            <a:ext cx="5585040" cy="1829160"/>
+            <a:off x="2644200" y="2285280"/>
+            <a:ext cx="5584680" cy="1829520"/>
           </a:xfrm>
           <a:prstGeom prst="rect">
             <a:avLst/>
@@ -8377,7 +8604,7 @@
         <p:spPr>
           <a:xfrm>
             <a:off x="4948560" y="2719440"/>
-            <a:ext cx="180360" cy="229680"/>
+            <a:ext cx="180000" cy="229320"/>
           </a:xfrm>
           <a:prstGeom prst="rect">
             <a:avLst/>
@@ -8418,7 +8645,7 @@
         <p:spPr>
           <a:xfrm>
             <a:off x="4948560" y="2719440"/>
-            <a:ext cx="180360" cy="229680"/>
+            <a:ext cx="180000" cy="229320"/>
           </a:xfrm>
           <a:prstGeom prst="rect">
             <a:avLst/>
@@ -8464,7 +8691,7 @@
         <p:spPr>
           <a:xfrm>
             <a:off x="2557440" y="5047920"/>
-            <a:ext cx="387720" cy="438120"/>
+            <a:ext cx="387360" cy="437760"/>
           </a:xfrm>
           <a:prstGeom prst="rect">
             <a:avLst/>
@@ -8484,7 +8711,7 @@
         <p:spPr>
           <a:xfrm>
             <a:off x="2945520" y="5181120"/>
-            <a:ext cx="6198120" cy="178560"/>
+            <a:ext cx="6197760" cy="178200"/>
           </a:xfrm>
           <a:prstGeom prst="rect">
             <a:avLst/>
@@ -8610,7 +8837,7 @@
         <p:txBody>
           <a:bodyPr/>
           <a:p>
-            <a:fld id="{F6915B3A-E810-4D0C-8106-401D8BBDC704}" type="slidenum">
+            <a:fld id="{AAA4B980-505C-4797-99FB-0E32E6FFB2A7}" type="slidenum">
               <a:t>1</a:t>
             </a:fld>
           </a:p>
@@ -8648,7 +8875,7 @@
       </p:grpSpPr>
       <p:sp>
         <p:nvSpPr>
-          <p:cNvPr id="211" name="PlaceHolder 1"/>
+          <p:cNvPr id="212" name="PlaceHolder 1"/>
           <p:cNvSpPr>
             <a:spLocks noGrp="1"/>
           </p:cNvSpPr>
@@ -8659,7 +8886,7 @@
         <p:spPr>
           <a:xfrm>
             <a:off x="1620000" y="216000"/>
-            <a:ext cx="8099640" cy="935640"/>
+            <a:ext cx="8099280" cy="935280"/>
           </a:xfrm>
           <a:prstGeom prst="rect">
             <a:avLst/>
@@ -8707,7 +8934,7 @@
       </p:sp>
       <p:sp>
         <p:nvSpPr>
-          <p:cNvPr id="212" name="PlaceHolder 2"/>
+          <p:cNvPr id="213" name="PlaceHolder 2"/>
           <p:cNvSpPr>
             <a:spLocks noGrp="1"/>
           </p:cNvSpPr>
@@ -8718,7 +8945,7 @@
         <p:spPr>
           <a:xfrm>
             <a:off x="1620000" y="1368000"/>
-            <a:ext cx="5466600" cy="3287880"/>
+            <a:ext cx="5466240" cy="3287520"/>
           </a:xfrm>
           <a:prstGeom prst="rect">
             <a:avLst/>
@@ -8841,7 +9068,7 @@
       </p:sp>
       <p:pic>
         <p:nvPicPr>
-          <p:cNvPr id="213" name=""/>
+          <p:cNvPr id="214" name=""/>
           <p:cNvPicPr/>
           <p:nvPr/>
         </p:nvPicPr>
@@ -8852,7 +9079,7 @@
         <p:spPr>
           <a:xfrm>
             <a:off x="7259400" y="1390320"/>
-            <a:ext cx="2341800" cy="3181680"/>
+            <a:ext cx="2341440" cy="3181320"/>
           </a:xfrm>
           <a:prstGeom prst="rect">
             <a:avLst/>
@@ -8877,7 +9104,7 @@
         <p:txBody>
           <a:bodyPr/>
           <a:p>
-            <a:fld id="{6967B2CE-2480-43F7-9730-2AD5CB812361}" type="slidenum">
+            <a:fld id="{87588B48-697B-4F66-A508-1B74C1CA9539}" type="slidenum">
               <a:t>10</a:t>
             </a:fld>
           </a:p>
@@ -8915,7 +9142,7 @@
       </p:grpSpPr>
       <p:sp>
         <p:nvSpPr>
-          <p:cNvPr id="214" name="PlaceHolder 1"/>
+          <p:cNvPr id="215" name="PlaceHolder 1"/>
           <p:cNvSpPr>
             <a:spLocks noGrp="1"/>
           </p:cNvSpPr>
@@ -8926,7 +9153,7 @@
         <p:spPr>
           <a:xfrm>
             <a:off x="1620000" y="216000"/>
-            <a:ext cx="8099640" cy="935640"/>
+            <a:ext cx="8099280" cy="935280"/>
           </a:xfrm>
           <a:prstGeom prst="rect">
             <a:avLst/>
@@ -8974,7 +9201,7 @@
       </p:sp>
       <p:sp>
         <p:nvSpPr>
-          <p:cNvPr id="215" name="PlaceHolder 2"/>
+          <p:cNvPr id="216" name="PlaceHolder 2"/>
           <p:cNvSpPr>
             <a:spLocks noGrp="1"/>
           </p:cNvSpPr>
@@ -8985,7 +9212,7 @@
         <p:spPr>
           <a:xfrm>
             <a:off x="1620000" y="1368000"/>
-            <a:ext cx="8099640" cy="3287880"/>
+            <a:ext cx="8099280" cy="3287520"/>
           </a:xfrm>
           <a:prstGeom prst="rect">
             <a:avLst/>
@@ -9260,7 +9487,7 @@
         <p:txBody>
           <a:bodyPr/>
           <a:p>
-            <a:fld id="{D62FD64E-D28A-42F1-A075-37D30FD909FC}" type="slidenum">
+            <a:fld id="{2F671383-0526-4F63-967A-252987DE8780}" type="slidenum">
               <a:t>11</a:t>
             </a:fld>
           </a:p>
@@ -9298,7 +9525,7 @@
       </p:grpSpPr>
       <p:sp>
         <p:nvSpPr>
-          <p:cNvPr id="216" name="PlaceHolder 1"/>
+          <p:cNvPr id="217" name="PlaceHolder 1"/>
           <p:cNvSpPr>
             <a:spLocks noGrp="1"/>
           </p:cNvSpPr>
@@ -9309,7 +9536,7 @@
         <p:spPr>
           <a:xfrm>
             <a:off x="1620000" y="216000"/>
-            <a:ext cx="8099640" cy="935640"/>
+            <a:ext cx="8099280" cy="935280"/>
           </a:xfrm>
           <a:prstGeom prst="rect">
             <a:avLst/>
@@ -9357,7 +9584,7 @@
       </p:sp>
       <p:sp>
         <p:nvSpPr>
-          <p:cNvPr id="217" name="PlaceHolder 2"/>
+          <p:cNvPr id="218" name="PlaceHolder 2"/>
           <p:cNvSpPr>
             <a:spLocks noGrp="1"/>
           </p:cNvSpPr>
@@ -9368,7 +9595,7 @@
         <p:spPr>
           <a:xfrm>
             <a:off x="1620000" y="1368000"/>
-            <a:ext cx="8099640" cy="460440"/>
+            <a:ext cx="8099280" cy="460080"/>
           </a:xfrm>
           <a:prstGeom prst="rect">
             <a:avLst/>
@@ -9455,7 +9682,7 @@
       </p:sp>
       <p:pic>
         <p:nvPicPr>
-          <p:cNvPr id="218" name=""/>
+          <p:cNvPr id="219" name=""/>
           <p:cNvPicPr/>
           <p:nvPr/>
         </p:nvPicPr>
@@ -9466,7 +9693,7 @@
         <p:spPr>
           <a:xfrm>
             <a:off x="3429000" y="1999440"/>
-            <a:ext cx="3029400" cy="3029400"/>
+            <a:ext cx="3029040" cy="3029040"/>
           </a:xfrm>
           <a:prstGeom prst="rect">
             <a:avLst/>
@@ -9491,7 +9718,7 @@
         <p:txBody>
           <a:bodyPr/>
           <a:p>
-            <a:fld id="{105E1EF3-24B0-45F1-85A4-06363538E111}" type="slidenum">
+            <a:fld id="{0741CF6D-03A3-4BB8-95EB-2C2E7FDD5D32}" type="slidenum">
               <a:t>12</a:t>
             </a:fld>
           </a:p>
@@ -9539,8 +9766,8 @@
         </p:nvSpPr>
         <p:spPr>
           <a:xfrm>
-            <a:off x="1620000" y="216000"/>
-            <a:ext cx="8099640" cy="935640"/>
+            <a:off x="1620000" y="215640"/>
+            <a:ext cx="8099280" cy="936000"/>
           </a:xfrm>
           <a:prstGeom prst="rect">
             <a:avLst/>
@@ -9556,6 +9783,9 @@
           </a:bodyPr>
           <a:p>
             <a:pPr indent="0" algn="ctr">
+              <a:lnSpc>
+                <a:spcPct val="100000"/>
+              </a:lnSpc>
               <a:buNone/>
               <a:tabLst>
                 <a:tab pos="0" algn="l"/>
@@ -9570,7 +9800,7 @@
                 <a:uFillTx/>
                 <a:latin typeface="Times New Roman"/>
               </a:rPr>
-              <a:t>LLMs in Biological Work</a:t>
+              <a:t>How AI is used Practically today</a:t>
             </a:r>
             <a:endParaRPr lang="en-US" sz="3300" b="0" u="none" strike="noStrike">
               <a:solidFill>
@@ -9595,8 +9825,8 @@
         </p:nvSpPr>
         <p:spPr>
           <a:xfrm>
-            <a:off x="1620000" y="1368000"/>
-            <a:ext cx="8209800" cy="3287880"/>
+            <a:off x="1828800" y="1371600"/>
+            <a:ext cx="8209440" cy="3287520"/>
           </a:xfrm>
           <a:prstGeom prst="rect">
             <a:avLst/>
@@ -9608,10 +9838,13 @@
         </p:spPr>
         <p:txBody>
           <a:bodyPr lIns="0" tIns="0" rIns="0" bIns="0" anchor="t">
-            <a:normAutofit/>
+            <a:normAutofit lnSpcReduction="9999"/>
           </a:bodyPr>
           <a:p>
             <a:pPr marL="324000" indent="-324000" algn="l">
+              <a:lnSpc>
+                <a:spcPct val="100000"/>
+              </a:lnSpc>
               <a:spcAft>
                 <a:spcPts val="1060"/>
               </a:spcAft>
@@ -9644,6 +9877,9 @@
           </a:p>
           <a:p>
             <a:pPr marL="324000" indent="-324000" algn="l">
+              <a:lnSpc>
+                <a:spcPct val="100000"/>
+              </a:lnSpc>
               <a:spcAft>
                 <a:spcPts val="1060"/>
               </a:spcAft>
@@ -9676,6 +9912,9 @@
           </a:p>
           <a:p>
             <a:pPr marL="324000" indent="-324000" algn="l">
+              <a:lnSpc>
+                <a:spcPct val="100000"/>
+              </a:lnSpc>
               <a:spcAft>
                 <a:spcPts val="1060"/>
               </a:spcAft>
@@ -9708,6 +9947,9 @@
           </a:p>
           <a:p>
             <a:pPr marL="324000" indent="-324000" algn="l">
+              <a:lnSpc>
+                <a:spcPct val="100000"/>
+              </a:lnSpc>
               <a:spcAft>
                 <a:spcPts val="1060"/>
               </a:spcAft>
@@ -9728,6 +9970,55 @@
                 <a:latin typeface="Times New Roman"/>
               </a:rPr>
               <a:t>Analyze thousands of imaging files and make diagnostic predictions</a:t>
+            </a:r>
+            <a:endParaRPr lang="en-US" sz="2400" b="0" u="none" strike="noStrike">
+              <a:solidFill>
+                <a:srgbClr val="050505"/>
+              </a:solidFill>
+              <a:effectLst/>
+              <a:uFillTx/>
+              <a:latin typeface="Times New Roman"/>
+            </a:endParaRPr>
+          </a:p>
+          <a:p>
+            <a:pPr marL="324000" indent="-324000" algn="l">
+              <a:lnSpc>
+                <a:spcPct val="100000"/>
+              </a:lnSpc>
+              <a:spcAft>
+                <a:spcPts val="1060"/>
+              </a:spcAft>
+              <a:buClr>
+                <a:srgbClr val="000000"/>
+              </a:buClr>
+              <a:buSzPct val="45000"/>
+              <a:buFont typeface="Wingdings" charset="2"/>
+              <a:buChar char=""/>
+            </a:pPr>
+            <a:r>
+              <a:rPr lang="en-US" sz="2400" b="0" u="none" strike="noStrike">
+                <a:solidFill>
+                  <a:srgbClr val="050505"/>
+                </a:solidFill>
+                <a:effectLst/>
+                <a:uFillTx/>
+                <a:latin typeface="Times New Roman"/>
+              </a:rPr>
+              <a:t>Assist RSEs in writing </a:t>
+            </a:r>
+            <a:br>
+              <a:rPr sz="2400"/>
+            </a:br>
+            <a:r>
+              <a:rPr lang="en-US" sz="2400" b="0" u="none" strike="noStrike">
+                <a:solidFill>
+                  <a:srgbClr val="050505"/>
+                </a:solidFill>
+                <a:effectLst/>
+                <a:uFillTx/>
+                <a:latin typeface="Times New Roman"/>
+              </a:rPr>
+              <a:t>research software</a:t>
             </a:r>
             <a:endParaRPr lang="en-US" sz="2400" b="0" u="none" strike="noStrike">
               <a:solidFill>
@@ -9752,8 +10043,32 @@
         </p:blipFill>
         <p:spPr>
           <a:xfrm>
-            <a:off x="5760360" y="3743640"/>
-            <a:ext cx="3840840" cy="1514160"/>
+            <a:off x="5715000" y="3657600"/>
+            <a:ext cx="3840480" cy="1513800"/>
+          </a:xfrm>
+          <a:prstGeom prst="rect">
+            <a:avLst/>
+          </a:prstGeom>
+          <a:noFill/>
+          <a:ln w="0">
+            <a:noFill/>
+          </a:ln>
+        </p:spPr>
+      </p:pic>
+      <p:pic>
+        <p:nvPicPr>
+          <p:cNvPr id="189" name="Picture 1"/>
+          <p:cNvPicPr/>
+          <p:nvPr/>
+        </p:nvPicPr>
+        <p:blipFill>
+          <a:blip r:embed="rId2"/>
+          <a:stretch/>
+        </p:blipFill>
+        <p:spPr>
+          <a:xfrm>
+            <a:off x="5943600" y="3657600"/>
+            <a:ext cx="3657600" cy="1441800"/>
           </a:xfrm>
           <a:prstGeom prst="rect">
             <a:avLst/>
@@ -9778,7 +10093,7 @@
         <p:txBody>
           <a:bodyPr/>
           <a:p>
-            <a:fld id="{0C36D44E-853F-4C93-B7C6-9689956599AB}" type="slidenum">
+            <a:fld id="{69AC9548-EA01-4890-894D-3D12F64B56D0}" type="slidenum">
               <a:t>2</a:t>
             </a:fld>
           </a:p>
@@ -9816,7 +10131,7 @@
       </p:grpSpPr>
       <p:sp>
         <p:nvSpPr>
-          <p:cNvPr id="189" name="PlaceHolder 1"/>
+          <p:cNvPr id="190" name="PlaceHolder 1"/>
           <p:cNvSpPr>
             <a:spLocks noGrp="1"/>
           </p:cNvSpPr>
@@ -9827,7 +10142,7 @@
         <p:spPr>
           <a:xfrm>
             <a:off x="1620000" y="228600"/>
-            <a:ext cx="8099640" cy="935640"/>
+            <a:ext cx="8099280" cy="935280"/>
           </a:xfrm>
           <a:prstGeom prst="rect">
             <a:avLst/>
@@ -9875,7 +10190,7 @@
       </p:sp>
       <p:sp>
         <p:nvSpPr>
-          <p:cNvPr id="190" name="PlaceHolder 2"/>
+          <p:cNvPr id="191" name="PlaceHolder 2"/>
           <p:cNvSpPr>
             <a:spLocks noGrp="1"/>
           </p:cNvSpPr>
@@ -9886,7 +10201,7 @@
         <p:spPr>
           <a:xfrm>
             <a:off x="1600200" y="1943640"/>
-            <a:ext cx="5486040" cy="914040"/>
+            <a:ext cx="5485680" cy="913680"/>
           </a:xfrm>
           <a:prstGeom prst="rect">
             <a:avLst/>
@@ -10044,14 +10359,14 @@
       </p:sp>
       <p:sp>
         <p:nvSpPr>
-          <p:cNvPr id="191" name=""/>
+          <p:cNvPr id="192" name=""/>
           <p:cNvSpPr/>
           <p:nvPr/>
         </p:nvSpPr>
         <p:spPr>
           <a:xfrm>
             <a:off x="1591920" y="1491840"/>
-            <a:ext cx="7086240" cy="410400"/>
+            <a:ext cx="7085880" cy="409680"/>
           </a:xfrm>
           <a:prstGeom prst="rect">
             <a:avLst/>
@@ -10091,6 +10406,7 @@
                 <a:effectLst/>
                 <a:uFillTx/>
                 <a:latin typeface="Times New Roman"/>
+                <a:ea typeface="DejaVu Sans"/>
               </a:rPr>
               <a:t>Genomics</a:t>
             </a:r>
@@ -10102,6 +10418,7 @@
                 <a:effectLst/>
                 <a:uFillTx/>
                 <a:latin typeface="Times New Roman"/>
+                <a:ea typeface="DejaVu Sans"/>
               </a:rPr>
               <a:t> Data</a:t>
             </a:r>
@@ -10118,14 +10435,14 @@
       </p:sp>
       <p:sp>
         <p:nvSpPr>
-          <p:cNvPr id="192" name=""/>
+          <p:cNvPr id="193" name=""/>
           <p:cNvSpPr/>
           <p:nvPr/>
         </p:nvSpPr>
         <p:spPr>
           <a:xfrm>
             <a:off x="1600200" y="2743200"/>
-            <a:ext cx="2971440" cy="2651400"/>
+            <a:ext cx="2971080" cy="2650680"/>
           </a:xfrm>
           <a:prstGeom prst="rect">
             <a:avLst/>
@@ -10168,6 +10485,7 @@
                 <a:effectLst/>
                 <a:uFillTx/>
                 <a:latin typeface="Times New Roman"/>
+                <a:ea typeface="DejaVu Sans"/>
               </a:rPr>
               <a:t>Financial Records</a:t>
             </a:r>
@@ -10203,6 +10521,7 @@
                 <a:effectLst/>
                 <a:uFillTx/>
                 <a:latin typeface="Times New Roman"/>
+                <a:ea typeface="DejaVu Sans"/>
               </a:rPr>
               <a:t>Survey Forms</a:t>
             </a:r>
@@ -10238,6 +10557,7 @@
                 <a:effectLst/>
                 <a:uFillTx/>
                 <a:latin typeface="Times New Roman"/>
+                <a:ea typeface="DejaVu Sans"/>
               </a:rPr>
               <a:t>Patient Records</a:t>
             </a:r>
@@ -10273,6 +10593,7 @@
                 <a:effectLst/>
                 <a:uFillTx/>
                 <a:latin typeface="Times New Roman"/>
+                <a:ea typeface="DejaVu Sans"/>
               </a:rPr>
               <a:t>Scan Data </a:t>
             </a:r>
@@ -10308,6 +10629,7 @@
                 <a:effectLst/>
                 <a:uFillTx/>
                 <a:latin typeface="Times New Roman"/>
+                <a:ea typeface="DejaVu Sans"/>
               </a:rPr>
               <a:t>CAT</a:t>
             </a:r>
@@ -10343,6 +10665,7 @@
                 <a:effectLst/>
                 <a:uFillTx/>
                 <a:latin typeface="Times New Roman"/>
+                <a:ea typeface="DejaVu Sans"/>
               </a:rPr>
               <a:t>MRI</a:t>
             </a:r>
@@ -10359,7 +10682,7 @@
       </p:sp>
       <p:pic>
         <p:nvPicPr>
-          <p:cNvPr id="193" name=""/>
+          <p:cNvPr id="194" name=""/>
           <p:cNvPicPr/>
           <p:nvPr/>
         </p:nvPicPr>
@@ -10370,7 +10693,7 @@
         <p:spPr>
           <a:xfrm>
             <a:off x="4845240" y="2971800"/>
-            <a:ext cx="3384000" cy="2253600"/>
+            <a:ext cx="3383640" cy="2253240"/>
           </a:xfrm>
           <a:prstGeom prst="rect">
             <a:avLst/>
@@ -10395,7 +10718,7 @@
         <p:txBody>
           <a:bodyPr/>
           <a:p>
-            <a:fld id="{AF38889B-939C-4F06-91BB-ABE10DD2460A}" type="slidenum">
+            <a:fld id="{5344C720-C9D6-49E8-AABB-C12BB1D92645}" type="slidenum">
               <a:t>3</a:t>
             </a:fld>
           </a:p>
@@ -10433,7 +10756,7 @@
       </p:grpSpPr>
       <p:sp>
         <p:nvSpPr>
-          <p:cNvPr id="194" name="PlaceHolder 1"/>
+          <p:cNvPr id="195" name="PlaceHolder 1"/>
           <p:cNvSpPr>
             <a:spLocks noGrp="1"/>
           </p:cNvSpPr>
@@ -10444,7 +10767,7 @@
         <p:spPr>
           <a:xfrm>
             <a:off x="1620000" y="216000"/>
-            <a:ext cx="8099640" cy="935640"/>
+            <a:ext cx="8099280" cy="935280"/>
           </a:xfrm>
           <a:prstGeom prst="rect">
             <a:avLst/>
@@ -10492,7 +10815,7 @@
       </p:sp>
       <p:sp>
         <p:nvSpPr>
-          <p:cNvPr id="195" name="PlaceHolder 2"/>
+          <p:cNvPr id="196" name="PlaceHolder 2"/>
           <p:cNvSpPr>
             <a:spLocks noGrp="1"/>
           </p:cNvSpPr>
@@ -10502,8 +10825,8 @@
         </p:nvSpPr>
         <p:spPr>
           <a:xfrm>
-            <a:off x="1620000" y="1283760"/>
-            <a:ext cx="8099640" cy="3973680"/>
+            <a:off x="1600200" y="1371600"/>
+            <a:ext cx="8099280" cy="3973320"/>
           </a:xfrm>
           <a:prstGeom prst="rect">
             <a:avLst/>
@@ -10801,7 +11124,7 @@
       </p:sp>
       <p:pic>
         <p:nvPicPr>
-          <p:cNvPr id="196" name=""/>
+          <p:cNvPr id="197" name=""/>
           <p:cNvPicPr/>
           <p:nvPr/>
         </p:nvPicPr>
@@ -10812,7 +11135,7 @@
         <p:spPr>
           <a:xfrm>
             <a:off x="5715000" y="1160280"/>
-            <a:ext cx="4114800" cy="1811520"/>
+            <a:ext cx="4114440" cy="1811160"/>
           </a:xfrm>
           <a:prstGeom prst="rect">
             <a:avLst/>
@@ -10837,7 +11160,7 @@
         <p:txBody>
           <a:bodyPr/>
           <a:p>
-            <a:fld id="{D603233A-8E9F-44B6-A676-EB1EB5349D5C}" type="slidenum">
+            <a:fld id="{F8FB93DA-E061-4526-9A15-F62B2E59A1D7}" type="slidenum">
               <a:t>4</a:t>
             </a:fld>
           </a:p>
@@ -10875,7 +11198,7 @@
       </p:grpSpPr>
       <p:sp>
         <p:nvSpPr>
-          <p:cNvPr id="197" name="PlaceHolder 1"/>
+          <p:cNvPr id="198" name="PlaceHolder 1"/>
           <p:cNvSpPr>
             <a:spLocks noGrp="1"/>
           </p:cNvSpPr>
@@ -10886,7 +11209,7 @@
         <p:spPr>
           <a:xfrm>
             <a:off x="1620000" y="216000"/>
-            <a:ext cx="8099640" cy="935640"/>
+            <a:ext cx="8099280" cy="935280"/>
           </a:xfrm>
           <a:prstGeom prst="rect">
             <a:avLst/>
@@ -10934,14 +11257,14 @@
       </p:sp>
       <p:sp>
         <p:nvSpPr>
-          <p:cNvPr id="198" name=""/>
+          <p:cNvPr id="199" name=""/>
           <p:cNvSpPr/>
           <p:nvPr/>
         </p:nvSpPr>
         <p:spPr>
           <a:xfrm>
             <a:off x="1600200" y="1445040"/>
-            <a:ext cx="8229240" cy="3126600"/>
+            <a:ext cx="8228880" cy="3126240"/>
           </a:xfrm>
           <a:prstGeom prst="rect">
             <a:avLst/>
@@ -10990,6 +11313,7 @@
                 <a:effectLst/>
                 <a:uFillTx/>
                 <a:latin typeface="DejaVu Sans Mono"/>
+                <a:ea typeface="DejaVu Sans"/>
               </a:rPr>
               <a:t>┌─────────┐   ┌─────────┐   ┌─────────┐   ┌─────────┐   ┌─────────┐   ┌──────────┐</a:t>
             </a:r>
@@ -11016,6 +11340,7 @@
                 <a:effectLst/>
                 <a:uFillTx/>
                 <a:latin typeface="DejaVu Sans Mono"/>
+                <a:ea typeface="DejaVu Sans"/>
               </a:rPr>
               <a:t>│Your data│──▶│ Prompts │──▶│ Model   │──▶│ Answers │──▶│ Checks  │──▶│ Analysis │</a:t>
             </a:r>
@@ -11042,6 +11367,7 @@
                 <a:effectLst/>
                 <a:uFillTx/>
                 <a:latin typeface="DejaVu Sans Mono"/>
+                <a:ea typeface="DejaVu Sans"/>
               </a:rPr>
               <a:t>│CSV, text│   │ (JSONL) │   │on a GPU │   │ (JSON)  │   │         │   │          │</a:t>
             </a:r>
@@ -11068,6 +11394,7 @@
                 <a:effectLst/>
                 <a:uFillTx/>
                 <a:latin typeface="DejaVu Sans Mono"/>
+                <a:ea typeface="DejaVu Sans"/>
               </a:rPr>
               <a:t>└─────────┘   └─────────┘   └─────────┘   └─────────┘   └─────────┘   └──────────┘</a:t>
             </a:r>
@@ -11094,6 +11421,7 @@
                 <a:effectLst/>
                 <a:uFillTx/>
                 <a:latin typeface="DejaVu Sans Mono"/>
+                <a:ea typeface="DejaVu Sans"/>
               </a:rPr>
               <a:t>└──────── you ────────┘     └ LLMFlux ┘   └──────────────── you ─────────────────┘</a:t>
             </a:r>
@@ -11120,6 +11448,7 @@
                 <a:effectLst/>
                 <a:uFillTx/>
                 <a:latin typeface="DejaVu Sans Mono"/>
+                <a:ea typeface="DejaVu Sans"/>
               </a:rPr>
               <a:t>   make_prompts.py          llmflux run     show_results.py, then your usual tools</a:t>
             </a:r>
@@ -11136,7 +11465,7 @@
       </p:sp>
       <p:pic>
         <p:nvPicPr>
-          <p:cNvPr id="199" name=""/>
+          <p:cNvPr id="200" name=""/>
           <p:cNvPicPr/>
           <p:nvPr/>
         </p:nvPicPr>
@@ -11147,7 +11476,7 @@
         <p:spPr>
           <a:xfrm>
             <a:off x="3657600" y="3157200"/>
-            <a:ext cx="3429000" cy="1872000"/>
+            <a:ext cx="3428640" cy="1871640"/>
           </a:xfrm>
           <a:prstGeom prst="rect">
             <a:avLst/>
@@ -11160,7 +11489,7 @@
       </p:pic>
       <p:pic>
         <p:nvPicPr>
-          <p:cNvPr id="200" name=""/>
+          <p:cNvPr id="201" name=""/>
           <p:cNvPicPr/>
           <p:nvPr/>
         </p:nvPicPr>
@@ -11171,7 +11500,7 @@
         <p:spPr>
           <a:xfrm>
             <a:off x="3429000" y="2971800"/>
-            <a:ext cx="4114800" cy="2246400"/>
+            <a:ext cx="4114440" cy="2246040"/>
           </a:xfrm>
           <a:prstGeom prst="rect">
             <a:avLst/>
@@ -11196,7 +11525,7 @@
         <p:txBody>
           <a:bodyPr/>
           <a:p>
-            <a:fld id="{5C194D03-4811-4750-9C4F-CC9DB4C3C78D}" type="slidenum">
+            <a:fld id="{AFF2CA3C-BA71-45AA-9B80-7F8C58F10FDC}" type="slidenum">
               <a:t>5</a:t>
             </a:fld>
           </a:p>
@@ -11234,7 +11563,7 @@
       </p:grpSpPr>
       <p:sp>
         <p:nvSpPr>
-          <p:cNvPr id="201" name="PlaceHolder 1"/>
+          <p:cNvPr id="202" name="PlaceHolder 1"/>
           <p:cNvSpPr>
             <a:spLocks noGrp="1"/>
           </p:cNvSpPr>
@@ -11245,7 +11574,7 @@
         <p:spPr>
           <a:xfrm>
             <a:off x="1620000" y="216000"/>
-            <a:ext cx="8099640" cy="935640"/>
+            <a:ext cx="8099280" cy="935280"/>
           </a:xfrm>
           <a:prstGeom prst="rect">
             <a:avLst/>
@@ -11293,7 +11622,7 @@
       </p:sp>
       <p:sp>
         <p:nvSpPr>
-          <p:cNvPr id="202" name="PlaceHolder 2"/>
+          <p:cNvPr id="203" name="PlaceHolder 2"/>
           <p:cNvSpPr>
             <a:spLocks noGrp="1"/>
           </p:cNvSpPr>
@@ -11304,7 +11633,7 @@
         <p:spPr>
           <a:xfrm>
             <a:off x="1620000" y="1368000"/>
-            <a:ext cx="8099640" cy="3287880"/>
+            <a:ext cx="8099280" cy="3287520"/>
           </a:xfrm>
           <a:prstGeom prst="rect">
             <a:avLst/>
@@ -11439,7 +11768,7 @@
         <p:txBody>
           <a:bodyPr/>
           <a:p>
-            <a:fld id="{F3E16DF6-97CD-4015-B327-9714A75BE5C4}" type="slidenum">
+            <a:fld id="{6C40A2FA-528B-4B06-9B17-55612E072986}" type="slidenum">
               <a:t>6</a:t>
             </a:fld>
           </a:p>
@@ -11477,7 +11806,7 @@
       </p:grpSpPr>
       <p:sp>
         <p:nvSpPr>
-          <p:cNvPr id="203" name="PlaceHolder 1"/>
+          <p:cNvPr id="204" name="PlaceHolder 1"/>
           <p:cNvSpPr>
             <a:spLocks noGrp="1"/>
           </p:cNvSpPr>
@@ -11488,7 +11817,7 @@
         <p:spPr>
           <a:xfrm>
             <a:off x="1620000" y="216000"/>
-            <a:ext cx="8099640" cy="935640"/>
+            <a:ext cx="8099280" cy="935280"/>
           </a:xfrm>
           <a:prstGeom prst="rect">
             <a:avLst/>
@@ -11536,7 +11865,7 @@
       </p:sp>
       <p:sp>
         <p:nvSpPr>
-          <p:cNvPr id="204" name="PlaceHolder 2"/>
+          <p:cNvPr id="205" name="PlaceHolder 2"/>
           <p:cNvSpPr>
             <a:spLocks noGrp="1"/>
           </p:cNvSpPr>
@@ -11547,7 +11876,7 @@
         <p:spPr>
           <a:xfrm>
             <a:off x="1620000" y="1969560"/>
-            <a:ext cx="8099640" cy="3287880"/>
+            <a:ext cx="8099280" cy="3287520"/>
           </a:xfrm>
           <a:prstGeom prst="rect">
             <a:avLst/>
@@ -11775,14 +12104,14 @@
       </p:sp>
       <p:sp>
         <p:nvSpPr>
-          <p:cNvPr id="205" name=""/>
+          <p:cNvPr id="206" name=""/>
           <p:cNvSpPr/>
           <p:nvPr/>
         </p:nvSpPr>
         <p:spPr>
           <a:xfrm>
             <a:off x="3429000" y="1257120"/>
-            <a:ext cx="4295160" cy="342720"/>
+            <a:ext cx="4294800" cy="342360"/>
           </a:xfrm>
           <a:prstGeom prst="rect">
             <a:avLst/>
@@ -11816,6 +12145,7 @@
                 <a:effectLst/>
                 <a:uFillTx/>
                 <a:latin typeface="Times New Roman"/>
+                <a:ea typeface="DejaVu Sans"/>
               </a:rPr>
               <a:t>login node → Slurm → GPU node → results</a:t>
             </a:r>
@@ -11832,7 +12162,7 @@
       </p:sp>
       <p:pic>
         <p:nvPicPr>
-          <p:cNvPr id="206" name=""/>
+          <p:cNvPr id="207" name=""/>
           <p:cNvPicPr/>
           <p:nvPr/>
         </p:nvPicPr>
@@ -11843,7 +12173,7 @@
         <p:spPr>
           <a:xfrm>
             <a:off x="5943600" y="3990240"/>
-            <a:ext cx="2743200" cy="1321920"/>
+            <a:ext cx="2742840" cy="1321560"/>
           </a:xfrm>
           <a:prstGeom prst="rect">
             <a:avLst/>
@@ -11868,7 +12198,7 @@
         <p:txBody>
           <a:bodyPr/>
           <a:p>
-            <a:fld id="{C9C0C86E-73EE-4F07-ABDF-8FB048543A0B}" type="slidenum">
+            <a:fld id="{DD0CD2C4-AD21-4514-91B1-A413A99371FD}" type="slidenum">
               <a:t>7</a:t>
             </a:fld>
           </a:p>
@@ -11906,7 +12236,7 @@
       </p:grpSpPr>
       <p:sp>
         <p:nvSpPr>
-          <p:cNvPr id="207" name="PlaceHolder 1"/>
+          <p:cNvPr id="208" name="PlaceHolder 1"/>
           <p:cNvSpPr>
             <a:spLocks noGrp="1"/>
           </p:cNvSpPr>
@@ -11917,7 +12247,7 @@
         <p:spPr>
           <a:xfrm>
             <a:off x="1620000" y="216000"/>
-            <a:ext cx="8099640" cy="935640"/>
+            <a:ext cx="8099280" cy="935280"/>
           </a:xfrm>
           <a:prstGeom prst="rect">
             <a:avLst/>
@@ -11965,7 +12295,7 @@
       </p:sp>
       <p:sp>
         <p:nvSpPr>
-          <p:cNvPr id="208" name="PlaceHolder 2"/>
+          <p:cNvPr id="209" name="PlaceHolder 2"/>
           <p:cNvSpPr>
             <a:spLocks noGrp="1"/>
           </p:cNvSpPr>
@@ -11976,7 +12306,7 @@
         <p:spPr>
           <a:xfrm>
             <a:off x="1620000" y="1368000"/>
-            <a:ext cx="8099640" cy="3287880"/>
+            <a:ext cx="8099280" cy="3287520"/>
           </a:xfrm>
           <a:prstGeom prst="rect">
             <a:avLst/>
@@ -12321,7 +12651,7 @@
         <p:txBody>
           <a:bodyPr/>
           <a:p>
-            <a:fld id="{D289400D-B378-4685-9A2D-2FF80D98815E}" type="slidenum">
+            <a:fld id="{3792E5FD-1EE5-47EE-B733-F570618BAC5B}" type="slidenum">
               <a:t>8</a:t>
             </a:fld>
           </a:p>
@@ -12359,7 +12689,7 @@
       </p:grpSpPr>
       <p:sp>
         <p:nvSpPr>
-          <p:cNvPr id="209" name="PlaceHolder 1"/>
+          <p:cNvPr id="210" name="PlaceHolder 1"/>
           <p:cNvSpPr>
             <a:spLocks noGrp="1"/>
           </p:cNvSpPr>
@@ -12370,7 +12700,7 @@
         <p:spPr>
           <a:xfrm>
             <a:off x="1620000" y="216000"/>
-            <a:ext cx="8099640" cy="935640"/>
+            <a:ext cx="8099280" cy="935280"/>
           </a:xfrm>
           <a:prstGeom prst="rect">
             <a:avLst/>
@@ -12418,7 +12748,7 @@
       </p:sp>
       <p:sp>
         <p:nvSpPr>
-          <p:cNvPr id="210" name="PlaceHolder 2"/>
+          <p:cNvPr id="211" name="PlaceHolder 2"/>
           <p:cNvSpPr>
             <a:spLocks noGrp="1"/>
           </p:cNvSpPr>
@@ -12429,7 +12759,7 @@
         <p:spPr>
           <a:xfrm>
             <a:off x="1620000" y="1368000"/>
-            <a:ext cx="8099640" cy="3889440"/>
+            <a:ext cx="8099280" cy="3889080"/>
           </a:xfrm>
           <a:prstGeom prst="rect">
             <a:avLst/>
@@ -12739,7 +13069,7 @@
         <p:txBody>
           <a:bodyPr/>
           <a:p>
-            <a:fld id="{AE55AB1D-D574-40DC-B77B-26F50481656F}" type="slidenum">
+            <a:fld id="{235032A1-0EBD-4E0E-A997-281C1641E762}" type="slidenum">
               <a:t>9</a:t>
             </a:fld>
           </a:p>
